--- a/组会记录/组会1210.pptx
+++ b/组会记录/组会1210.pptx
@@ -5,22 +5,25 @@
     <p:sldMasterId id="2147483648" r:id="rId1"/>
   </p:sldMasterIdLst>
   <p:notesMasterIdLst>
-    <p:notesMasterId r:id="rId10"/>
+    <p:notesMasterId r:id="rId6"/>
   </p:notesMasterIdLst>
   <p:sldIdLst>
-    <p:sldId id="397" r:id="rId2"/>
-    <p:sldId id="327" r:id="rId3"/>
-    <p:sldId id="368" r:id="rId4"/>
-    <p:sldId id="393" r:id="rId5"/>
-    <p:sldId id="356" r:id="rId6"/>
-    <p:sldId id="394" r:id="rId7"/>
-    <p:sldId id="396" r:id="rId8"/>
-    <p:sldId id="395" r:id="rId9"/>
+    <p:sldId id="403" r:id="rId3"/>
+    <p:sldId id="397" r:id="rId4"/>
+    <p:sldId id="327" r:id="rId5"/>
+    <p:sldId id="393" r:id="rId7"/>
+    <p:sldId id="398" r:id="rId8"/>
+    <p:sldId id="399" r:id="rId9"/>
+    <p:sldId id="401" r:id="rId10"/>
+    <p:sldId id="356" r:id="rId11"/>
+    <p:sldId id="404" r:id="rId12"/>
+    <p:sldId id="405" r:id="rId13"/>
+    <p:sldId id="407" r:id="rId14"/>
   </p:sldIdLst>
   <p:sldSz cx="12192000" cy="6858000"/>
   <p:notesSz cx="6858000" cy="9144000"/>
   <p:custDataLst>
-    <p:tags r:id="rId11"/>
+    <p:tags r:id="rId18"/>
   </p:custDataLst>
   <p:defaultTextStyle>
     <a:defPPr>
@@ -117,11 +120,6 @@
       </a:defRPr>
     </a:lvl9pPr>
   </p:defaultTextStyle>
-  <p:extLst>
-    <p:ext uri="{EFAFB233-063F-42B5-8137-9DF3F51BA10A}">
-      <p15:sldGuideLst xmlns:p15="http://schemas.microsoft.com/office/powerpoint/2012/main"/>
-    </p:ext>
-  </p:extLst>
 </p:presentation>
 </file>
 
@@ -207,7 +205,6 @@
           <a:p>
             <a:fld id="{D2A48B96-639E-45A3-A0BA-2464DFDB1FAA}" type="datetimeFigureOut">
               <a:rPr lang="zh-CN" altLang="en-US" smtClean="0"/>
-              <a:t>2025/12/10</a:t>
             </a:fld>
             <a:endParaRPr lang="zh-CN" altLang="en-US"/>
           </a:p>
@@ -274,6 +271,7 @@
               <a:rPr lang="zh-CN" altLang="en-US"/>
               <a:t>单击此处编辑母版文本样式</a:t>
             </a:r>
+            <a:endParaRPr lang="zh-CN" altLang="en-US"/>
           </a:p>
           <a:p>
             <a:pPr lvl="1"/>
@@ -281,6 +279,7 @@
               <a:rPr lang="zh-CN" altLang="en-US"/>
               <a:t>第二级</a:t>
             </a:r>
+            <a:endParaRPr lang="zh-CN" altLang="en-US"/>
           </a:p>
           <a:p>
             <a:pPr lvl="2"/>
@@ -288,6 +287,7 @@
               <a:rPr lang="zh-CN" altLang="en-US"/>
               <a:t>第三级</a:t>
             </a:r>
+            <a:endParaRPr lang="zh-CN" altLang="en-US"/>
           </a:p>
           <a:p>
             <a:pPr lvl="3"/>
@@ -295,6 +295,7 @@
               <a:rPr lang="zh-CN" altLang="en-US"/>
               <a:t>第四级</a:t>
             </a:r>
+            <a:endParaRPr lang="zh-CN" altLang="en-US"/>
           </a:p>
           <a:p>
             <a:pPr lvl="4"/>
@@ -302,6 +303,7 @@
               <a:rPr lang="zh-CN" altLang="en-US"/>
               <a:t>第五级</a:t>
             </a:r>
+            <a:endParaRPr lang="zh-CN" altLang="en-US"/>
           </a:p>
         </p:txBody>
       </p:sp>
@@ -365,7 +367,6 @@
           <a:p>
             <a:fld id="{A6837353-30EB-4A48-80EB-173D804AEFBD}" type="slidenum">
               <a:rPr lang="zh-CN" altLang="en-US" smtClean="0"/>
-              <a:t>‹#›</a:t>
             </a:fld>
             <a:endParaRPr lang="zh-CN" altLang="en-US"/>
           </a:p>
@@ -570,6 +571,7 @@
               <a:rPr lang="zh-CN" altLang="en-US"/>
               <a:t>单击此处编辑母版标题样式</a:t>
             </a:r>
+            <a:endParaRPr lang="zh-CN" altLang="en-US"/>
           </a:p>
         </p:txBody>
       </p:sp>
@@ -634,6 +636,7 @@
               <a:rPr lang="zh-CN" altLang="en-US"/>
               <a:t>单击此处编辑母版副标题样式</a:t>
             </a:r>
+            <a:endParaRPr lang="zh-CN" altLang="en-US"/>
           </a:p>
         </p:txBody>
       </p:sp>
@@ -654,7 +657,6 @@
           <a:p>
             <a:fld id="{837840E2-13A5-46A9-A265-C77FF1EECC77}" type="datetimeFigureOut">
               <a:rPr lang="zh-CN" altLang="en-US" smtClean="0"/>
-              <a:t>2025/12/10</a:t>
             </a:fld>
             <a:endParaRPr lang="zh-CN" altLang="en-US"/>
           </a:p>
@@ -696,7 +698,6 @@
           <a:p>
             <a:fld id="{079686F9-7E47-4853-B8F4-FBCF71CB48DC}" type="slidenum">
               <a:rPr lang="zh-CN" altLang="en-US" smtClean="0"/>
-              <a:t>‹#›</a:t>
             </a:fld>
             <a:endParaRPr lang="zh-CN" altLang="en-US"/>
           </a:p>
@@ -746,6 +747,7 @@
               <a:rPr lang="zh-CN" altLang="en-US"/>
               <a:t>单击此处编辑母版标题样式</a:t>
             </a:r>
+            <a:endParaRPr lang="zh-CN" altLang="en-US"/>
           </a:p>
         </p:txBody>
       </p:sp>
@@ -769,6 +771,7 @@
               <a:rPr lang="zh-CN" altLang="en-US"/>
               <a:t>单击此处编辑母版文本样式</a:t>
             </a:r>
+            <a:endParaRPr lang="zh-CN" altLang="en-US"/>
           </a:p>
           <a:p>
             <a:pPr lvl="1"/>
@@ -776,6 +779,7 @@
               <a:rPr lang="zh-CN" altLang="en-US"/>
               <a:t>二级</a:t>
             </a:r>
+            <a:endParaRPr lang="zh-CN" altLang="en-US"/>
           </a:p>
           <a:p>
             <a:pPr lvl="2"/>
@@ -783,6 +787,7 @@
               <a:rPr lang="zh-CN" altLang="en-US"/>
               <a:t>三级</a:t>
             </a:r>
+            <a:endParaRPr lang="zh-CN" altLang="en-US"/>
           </a:p>
           <a:p>
             <a:pPr lvl="3"/>
@@ -790,6 +795,7 @@
               <a:rPr lang="zh-CN" altLang="en-US"/>
               <a:t>四级</a:t>
             </a:r>
+            <a:endParaRPr lang="zh-CN" altLang="en-US"/>
           </a:p>
           <a:p>
             <a:pPr lvl="4"/>
@@ -797,6 +803,7 @@
               <a:rPr lang="zh-CN" altLang="en-US"/>
               <a:t>五级</a:t>
             </a:r>
+            <a:endParaRPr lang="zh-CN" altLang="en-US"/>
           </a:p>
         </p:txBody>
       </p:sp>
@@ -817,7 +824,6 @@
           <a:p>
             <a:fld id="{837840E2-13A5-46A9-A265-C77FF1EECC77}" type="datetimeFigureOut">
               <a:rPr lang="zh-CN" altLang="en-US" smtClean="0"/>
-              <a:t>2025/12/10</a:t>
             </a:fld>
             <a:endParaRPr lang="zh-CN" altLang="en-US"/>
           </a:p>
@@ -859,7 +865,6 @@
           <a:p>
             <a:fld id="{079686F9-7E47-4853-B8F4-FBCF71CB48DC}" type="slidenum">
               <a:rPr lang="zh-CN" altLang="en-US" smtClean="0"/>
-              <a:t>‹#›</a:t>
             </a:fld>
             <a:endParaRPr lang="zh-CN" altLang="en-US"/>
           </a:p>
@@ -914,6 +919,7 @@
               <a:rPr lang="zh-CN" altLang="en-US"/>
               <a:t>单击此处编辑母版标题样式</a:t>
             </a:r>
+            <a:endParaRPr lang="zh-CN" altLang="en-US"/>
           </a:p>
         </p:txBody>
       </p:sp>
@@ -942,6 +948,7 @@
               <a:rPr lang="zh-CN" altLang="en-US"/>
               <a:t>单击此处编辑母版文本样式</a:t>
             </a:r>
+            <a:endParaRPr lang="zh-CN" altLang="en-US"/>
           </a:p>
           <a:p>
             <a:pPr lvl="1"/>
@@ -949,6 +956,7 @@
               <a:rPr lang="zh-CN" altLang="en-US"/>
               <a:t>二级</a:t>
             </a:r>
+            <a:endParaRPr lang="zh-CN" altLang="en-US"/>
           </a:p>
           <a:p>
             <a:pPr lvl="2"/>
@@ -956,6 +964,7 @@
               <a:rPr lang="zh-CN" altLang="en-US"/>
               <a:t>三级</a:t>
             </a:r>
+            <a:endParaRPr lang="zh-CN" altLang="en-US"/>
           </a:p>
           <a:p>
             <a:pPr lvl="3"/>
@@ -963,6 +972,7 @@
               <a:rPr lang="zh-CN" altLang="en-US"/>
               <a:t>四级</a:t>
             </a:r>
+            <a:endParaRPr lang="zh-CN" altLang="en-US"/>
           </a:p>
           <a:p>
             <a:pPr lvl="4"/>
@@ -970,6 +980,7 @@
               <a:rPr lang="zh-CN" altLang="en-US"/>
               <a:t>五级</a:t>
             </a:r>
+            <a:endParaRPr lang="zh-CN" altLang="en-US"/>
           </a:p>
         </p:txBody>
       </p:sp>
@@ -990,7 +1001,6 @@
           <a:p>
             <a:fld id="{837840E2-13A5-46A9-A265-C77FF1EECC77}" type="datetimeFigureOut">
               <a:rPr lang="zh-CN" altLang="en-US" smtClean="0"/>
-              <a:t>2025/12/10</a:t>
             </a:fld>
             <a:endParaRPr lang="zh-CN" altLang="en-US"/>
           </a:p>
@@ -1032,7 +1042,6 @@
           <a:p>
             <a:fld id="{079686F9-7E47-4853-B8F4-FBCF71CB48DC}" type="slidenum">
               <a:rPr lang="zh-CN" altLang="en-US" smtClean="0"/>
-              <a:t>‹#›</a:t>
             </a:fld>
             <a:endParaRPr lang="zh-CN" altLang="en-US"/>
           </a:p>
@@ -1082,6 +1091,7 @@
               <a:rPr lang="zh-CN" altLang="en-US"/>
               <a:t>单击此处编辑母版标题样式</a:t>
             </a:r>
+            <a:endParaRPr lang="zh-CN" altLang="en-US"/>
           </a:p>
         </p:txBody>
       </p:sp>
@@ -1105,6 +1115,7 @@
               <a:rPr lang="zh-CN" altLang="en-US"/>
               <a:t>单击此处编辑母版文本样式</a:t>
             </a:r>
+            <a:endParaRPr lang="zh-CN" altLang="en-US"/>
           </a:p>
           <a:p>
             <a:pPr lvl="1"/>
@@ -1112,6 +1123,7 @@
               <a:rPr lang="zh-CN" altLang="en-US"/>
               <a:t>二级</a:t>
             </a:r>
+            <a:endParaRPr lang="zh-CN" altLang="en-US"/>
           </a:p>
           <a:p>
             <a:pPr lvl="2"/>
@@ -1119,6 +1131,7 @@
               <a:rPr lang="zh-CN" altLang="en-US"/>
               <a:t>三级</a:t>
             </a:r>
+            <a:endParaRPr lang="zh-CN" altLang="en-US"/>
           </a:p>
           <a:p>
             <a:pPr lvl="3"/>
@@ -1126,6 +1139,7 @@
               <a:rPr lang="zh-CN" altLang="en-US"/>
               <a:t>四级</a:t>
             </a:r>
+            <a:endParaRPr lang="zh-CN" altLang="en-US"/>
           </a:p>
           <a:p>
             <a:pPr lvl="4"/>
@@ -1133,6 +1147,7 @@
               <a:rPr lang="zh-CN" altLang="en-US"/>
               <a:t>五级</a:t>
             </a:r>
+            <a:endParaRPr lang="zh-CN" altLang="en-US"/>
           </a:p>
         </p:txBody>
       </p:sp>
@@ -1153,7 +1168,6 @@
           <a:p>
             <a:fld id="{837840E2-13A5-46A9-A265-C77FF1EECC77}" type="datetimeFigureOut">
               <a:rPr lang="zh-CN" altLang="en-US" smtClean="0"/>
-              <a:t>2025/12/10</a:t>
             </a:fld>
             <a:endParaRPr lang="zh-CN" altLang="en-US"/>
           </a:p>
@@ -1195,7 +1209,6 @@
           <a:p>
             <a:fld id="{079686F9-7E47-4853-B8F4-FBCF71CB48DC}" type="slidenum">
               <a:rPr lang="zh-CN" altLang="en-US" smtClean="0"/>
-              <a:t>‹#›</a:t>
             </a:fld>
             <a:endParaRPr lang="zh-CN" altLang="en-US"/>
           </a:p>
@@ -1254,6 +1267,7 @@
               <a:rPr lang="zh-CN" altLang="en-US"/>
               <a:t>单击此处编辑母版标题样式</a:t>
             </a:r>
+            <a:endParaRPr lang="zh-CN" altLang="en-US"/>
           </a:p>
         </p:txBody>
       </p:sp>
@@ -1373,6 +1387,7 @@
               <a:rPr lang="zh-CN" altLang="en-US"/>
               <a:t>单击此处编辑母版文本样式</a:t>
             </a:r>
+            <a:endParaRPr lang="zh-CN" altLang="en-US"/>
           </a:p>
         </p:txBody>
       </p:sp>
@@ -1393,7 +1408,6 @@
           <a:p>
             <a:fld id="{837840E2-13A5-46A9-A265-C77FF1EECC77}" type="datetimeFigureOut">
               <a:rPr lang="zh-CN" altLang="en-US" smtClean="0"/>
-              <a:t>2025/12/10</a:t>
             </a:fld>
             <a:endParaRPr lang="zh-CN" altLang="en-US"/>
           </a:p>
@@ -1435,7 +1449,6 @@
           <a:p>
             <a:fld id="{079686F9-7E47-4853-B8F4-FBCF71CB48DC}" type="slidenum">
               <a:rPr lang="zh-CN" altLang="en-US" smtClean="0"/>
-              <a:t>‹#›</a:t>
             </a:fld>
             <a:endParaRPr lang="zh-CN" altLang="en-US"/>
           </a:p>
@@ -1485,6 +1498,7 @@
               <a:rPr lang="zh-CN" altLang="en-US"/>
               <a:t>单击此处编辑母版标题样式</a:t>
             </a:r>
+            <a:endParaRPr lang="zh-CN" altLang="en-US"/>
           </a:p>
         </p:txBody>
       </p:sp>
@@ -1513,6 +1527,7 @@
               <a:rPr lang="zh-CN" altLang="en-US"/>
               <a:t>单击此处编辑母版文本样式</a:t>
             </a:r>
+            <a:endParaRPr lang="zh-CN" altLang="en-US"/>
           </a:p>
           <a:p>
             <a:pPr lvl="1"/>
@@ -1520,6 +1535,7 @@
               <a:rPr lang="zh-CN" altLang="en-US"/>
               <a:t>二级</a:t>
             </a:r>
+            <a:endParaRPr lang="zh-CN" altLang="en-US"/>
           </a:p>
           <a:p>
             <a:pPr lvl="2"/>
@@ -1527,6 +1543,7 @@
               <a:rPr lang="zh-CN" altLang="en-US"/>
               <a:t>三级</a:t>
             </a:r>
+            <a:endParaRPr lang="zh-CN" altLang="en-US"/>
           </a:p>
           <a:p>
             <a:pPr lvl="3"/>
@@ -1534,6 +1551,7 @@
               <a:rPr lang="zh-CN" altLang="en-US"/>
               <a:t>四级</a:t>
             </a:r>
+            <a:endParaRPr lang="zh-CN" altLang="en-US"/>
           </a:p>
           <a:p>
             <a:pPr lvl="4"/>
@@ -1541,6 +1559,7 @@
               <a:rPr lang="zh-CN" altLang="en-US"/>
               <a:t>五级</a:t>
             </a:r>
+            <a:endParaRPr lang="zh-CN" altLang="en-US"/>
           </a:p>
         </p:txBody>
       </p:sp>
@@ -1569,6 +1588,7 @@
               <a:rPr lang="zh-CN" altLang="en-US"/>
               <a:t>单击此处编辑母版文本样式</a:t>
             </a:r>
+            <a:endParaRPr lang="zh-CN" altLang="en-US"/>
           </a:p>
           <a:p>
             <a:pPr lvl="1"/>
@@ -1576,6 +1596,7 @@
               <a:rPr lang="zh-CN" altLang="en-US"/>
               <a:t>二级</a:t>
             </a:r>
+            <a:endParaRPr lang="zh-CN" altLang="en-US"/>
           </a:p>
           <a:p>
             <a:pPr lvl="2"/>
@@ -1583,6 +1604,7 @@
               <a:rPr lang="zh-CN" altLang="en-US"/>
               <a:t>三级</a:t>
             </a:r>
+            <a:endParaRPr lang="zh-CN" altLang="en-US"/>
           </a:p>
           <a:p>
             <a:pPr lvl="3"/>
@@ -1590,6 +1612,7 @@
               <a:rPr lang="zh-CN" altLang="en-US"/>
               <a:t>四级</a:t>
             </a:r>
+            <a:endParaRPr lang="zh-CN" altLang="en-US"/>
           </a:p>
           <a:p>
             <a:pPr lvl="4"/>
@@ -1597,6 +1620,7 @@
               <a:rPr lang="zh-CN" altLang="en-US"/>
               <a:t>五级</a:t>
             </a:r>
+            <a:endParaRPr lang="zh-CN" altLang="en-US"/>
           </a:p>
         </p:txBody>
       </p:sp>
@@ -1617,7 +1641,6 @@
           <a:p>
             <a:fld id="{837840E2-13A5-46A9-A265-C77FF1EECC77}" type="datetimeFigureOut">
               <a:rPr lang="zh-CN" altLang="en-US" smtClean="0"/>
-              <a:t>2025/12/10</a:t>
             </a:fld>
             <a:endParaRPr lang="zh-CN" altLang="en-US"/>
           </a:p>
@@ -1659,7 +1682,6 @@
           <a:p>
             <a:fld id="{079686F9-7E47-4853-B8F4-FBCF71CB48DC}" type="slidenum">
               <a:rPr lang="zh-CN" altLang="en-US" smtClean="0"/>
-              <a:t>‹#›</a:t>
             </a:fld>
             <a:endParaRPr lang="zh-CN" altLang="en-US"/>
           </a:p>
@@ -1714,6 +1736,7 @@
               <a:rPr lang="zh-CN" altLang="en-US"/>
               <a:t>单击此处编辑母版标题样式</a:t>
             </a:r>
+            <a:endParaRPr lang="zh-CN" altLang="en-US"/>
           </a:p>
         </p:txBody>
       </p:sp>
@@ -1779,6 +1802,7 @@
               <a:rPr lang="zh-CN" altLang="en-US"/>
               <a:t>单击此处编辑母版文本样式</a:t>
             </a:r>
+            <a:endParaRPr lang="zh-CN" altLang="en-US"/>
           </a:p>
         </p:txBody>
       </p:sp>
@@ -1807,6 +1831,7 @@
               <a:rPr lang="zh-CN" altLang="en-US"/>
               <a:t>单击此处编辑母版文本样式</a:t>
             </a:r>
+            <a:endParaRPr lang="zh-CN" altLang="en-US"/>
           </a:p>
           <a:p>
             <a:pPr lvl="1"/>
@@ -1814,6 +1839,7 @@
               <a:rPr lang="zh-CN" altLang="en-US"/>
               <a:t>二级</a:t>
             </a:r>
+            <a:endParaRPr lang="zh-CN" altLang="en-US"/>
           </a:p>
           <a:p>
             <a:pPr lvl="2"/>
@@ -1821,6 +1847,7 @@
               <a:rPr lang="zh-CN" altLang="en-US"/>
               <a:t>三级</a:t>
             </a:r>
+            <a:endParaRPr lang="zh-CN" altLang="en-US"/>
           </a:p>
           <a:p>
             <a:pPr lvl="3"/>
@@ -1828,6 +1855,7 @@
               <a:rPr lang="zh-CN" altLang="en-US"/>
               <a:t>四级</a:t>
             </a:r>
+            <a:endParaRPr lang="zh-CN" altLang="en-US"/>
           </a:p>
           <a:p>
             <a:pPr lvl="4"/>
@@ -1835,6 +1863,7 @@
               <a:rPr lang="zh-CN" altLang="en-US"/>
               <a:t>五级</a:t>
             </a:r>
+            <a:endParaRPr lang="zh-CN" altLang="en-US"/>
           </a:p>
         </p:txBody>
       </p:sp>
@@ -1900,6 +1929,7 @@
               <a:rPr lang="zh-CN" altLang="en-US"/>
               <a:t>单击此处编辑母版文本样式</a:t>
             </a:r>
+            <a:endParaRPr lang="zh-CN" altLang="en-US"/>
           </a:p>
         </p:txBody>
       </p:sp>
@@ -1928,6 +1958,7 @@
               <a:rPr lang="zh-CN" altLang="en-US"/>
               <a:t>单击此处编辑母版文本样式</a:t>
             </a:r>
+            <a:endParaRPr lang="zh-CN" altLang="en-US"/>
           </a:p>
           <a:p>
             <a:pPr lvl="1"/>
@@ -1935,6 +1966,7 @@
               <a:rPr lang="zh-CN" altLang="en-US"/>
               <a:t>二级</a:t>
             </a:r>
+            <a:endParaRPr lang="zh-CN" altLang="en-US"/>
           </a:p>
           <a:p>
             <a:pPr lvl="2"/>
@@ -1942,6 +1974,7 @@
               <a:rPr lang="zh-CN" altLang="en-US"/>
               <a:t>三级</a:t>
             </a:r>
+            <a:endParaRPr lang="zh-CN" altLang="en-US"/>
           </a:p>
           <a:p>
             <a:pPr lvl="3"/>
@@ -1949,6 +1982,7 @@
               <a:rPr lang="zh-CN" altLang="en-US"/>
               <a:t>四级</a:t>
             </a:r>
+            <a:endParaRPr lang="zh-CN" altLang="en-US"/>
           </a:p>
           <a:p>
             <a:pPr lvl="4"/>
@@ -1956,6 +1990,7 @@
               <a:rPr lang="zh-CN" altLang="en-US"/>
               <a:t>五级</a:t>
             </a:r>
+            <a:endParaRPr lang="zh-CN" altLang="en-US"/>
           </a:p>
         </p:txBody>
       </p:sp>
@@ -1976,7 +2011,6 @@
           <a:p>
             <a:fld id="{837840E2-13A5-46A9-A265-C77FF1EECC77}" type="datetimeFigureOut">
               <a:rPr lang="zh-CN" altLang="en-US" smtClean="0"/>
-              <a:t>2025/12/10</a:t>
             </a:fld>
             <a:endParaRPr lang="zh-CN" altLang="en-US"/>
           </a:p>
@@ -2018,7 +2052,6 @@
           <a:p>
             <a:fld id="{079686F9-7E47-4853-B8F4-FBCF71CB48DC}" type="slidenum">
               <a:rPr lang="zh-CN" altLang="en-US" smtClean="0"/>
-              <a:t>‹#›</a:t>
             </a:fld>
             <a:endParaRPr lang="zh-CN" altLang="en-US"/>
           </a:p>
@@ -2068,6 +2101,7 @@
               <a:rPr lang="zh-CN" altLang="en-US"/>
               <a:t>单击此处编辑母版标题样式</a:t>
             </a:r>
+            <a:endParaRPr lang="zh-CN" altLang="en-US"/>
           </a:p>
         </p:txBody>
       </p:sp>
@@ -2088,7 +2122,6 @@
           <a:p>
             <a:fld id="{837840E2-13A5-46A9-A265-C77FF1EECC77}" type="datetimeFigureOut">
               <a:rPr lang="zh-CN" altLang="en-US" smtClean="0"/>
-              <a:t>2025/12/10</a:t>
             </a:fld>
             <a:endParaRPr lang="zh-CN" altLang="en-US"/>
           </a:p>
@@ -2130,7 +2163,6 @@
           <a:p>
             <a:fld id="{079686F9-7E47-4853-B8F4-FBCF71CB48DC}" type="slidenum">
               <a:rPr lang="zh-CN" altLang="en-US" smtClean="0"/>
-              <a:t>‹#›</a:t>
             </a:fld>
             <a:endParaRPr lang="zh-CN" altLang="en-US"/>
           </a:p>
@@ -2178,7 +2210,6 @@
           <a:p>
             <a:fld id="{837840E2-13A5-46A9-A265-C77FF1EECC77}" type="datetimeFigureOut">
               <a:rPr lang="zh-CN" altLang="en-US" smtClean="0"/>
-              <a:t>2025/12/10</a:t>
             </a:fld>
             <a:endParaRPr lang="zh-CN" altLang="en-US"/>
           </a:p>
@@ -2220,7 +2251,6 @@
           <a:p>
             <a:fld id="{079686F9-7E47-4853-B8F4-FBCF71CB48DC}" type="slidenum">
               <a:rPr lang="zh-CN" altLang="en-US" smtClean="0"/>
-              <a:t>‹#›</a:t>
             </a:fld>
             <a:endParaRPr lang="zh-CN" altLang="en-US"/>
           </a:p>
@@ -2279,6 +2309,7 @@
               <a:rPr lang="zh-CN" altLang="en-US"/>
               <a:t>单击此处编辑母版标题样式</a:t>
             </a:r>
+            <a:endParaRPr lang="zh-CN" altLang="en-US"/>
           </a:p>
         </p:txBody>
       </p:sp>
@@ -2335,6 +2366,7 @@
               <a:rPr lang="zh-CN" altLang="en-US"/>
               <a:t>单击此处编辑母版文本样式</a:t>
             </a:r>
+            <a:endParaRPr lang="zh-CN" altLang="en-US"/>
           </a:p>
           <a:p>
             <a:pPr lvl="1"/>
@@ -2342,6 +2374,7 @@
               <a:rPr lang="zh-CN" altLang="en-US"/>
               <a:t>二级</a:t>
             </a:r>
+            <a:endParaRPr lang="zh-CN" altLang="en-US"/>
           </a:p>
           <a:p>
             <a:pPr lvl="2"/>
@@ -2349,6 +2382,7 @@
               <a:rPr lang="zh-CN" altLang="en-US"/>
               <a:t>三级</a:t>
             </a:r>
+            <a:endParaRPr lang="zh-CN" altLang="en-US"/>
           </a:p>
           <a:p>
             <a:pPr lvl="3"/>
@@ -2356,6 +2390,7 @@
               <a:rPr lang="zh-CN" altLang="en-US"/>
               <a:t>四级</a:t>
             </a:r>
+            <a:endParaRPr lang="zh-CN" altLang="en-US"/>
           </a:p>
           <a:p>
             <a:pPr lvl="4"/>
@@ -2363,6 +2398,7 @@
               <a:rPr lang="zh-CN" altLang="en-US"/>
               <a:t>五级</a:t>
             </a:r>
+            <a:endParaRPr lang="zh-CN" altLang="en-US"/>
           </a:p>
         </p:txBody>
       </p:sp>
@@ -2428,6 +2464,7 @@
               <a:rPr lang="zh-CN" altLang="en-US"/>
               <a:t>单击此处编辑母版文本样式</a:t>
             </a:r>
+            <a:endParaRPr lang="zh-CN" altLang="en-US"/>
           </a:p>
         </p:txBody>
       </p:sp>
@@ -2448,7 +2485,6 @@
           <a:p>
             <a:fld id="{837840E2-13A5-46A9-A265-C77FF1EECC77}" type="datetimeFigureOut">
               <a:rPr lang="zh-CN" altLang="en-US" smtClean="0"/>
-              <a:t>2025/12/10</a:t>
             </a:fld>
             <a:endParaRPr lang="zh-CN" altLang="en-US"/>
           </a:p>
@@ -2490,7 +2526,6 @@
           <a:p>
             <a:fld id="{079686F9-7E47-4853-B8F4-FBCF71CB48DC}" type="slidenum">
               <a:rPr lang="zh-CN" altLang="en-US" smtClean="0"/>
-              <a:t>‹#›</a:t>
             </a:fld>
             <a:endParaRPr lang="zh-CN" altLang="en-US"/>
           </a:p>
@@ -2549,6 +2584,7 @@
               <a:rPr lang="zh-CN" altLang="en-US"/>
               <a:t>单击此处编辑母版标题样式</a:t>
             </a:r>
+            <a:endParaRPr lang="zh-CN" altLang="en-US"/>
           </a:p>
         </p:txBody>
       </p:sp>
@@ -2675,6 +2711,7 @@
               <a:rPr lang="zh-CN" altLang="en-US"/>
               <a:t>单击此处编辑母版文本样式</a:t>
             </a:r>
+            <a:endParaRPr lang="zh-CN" altLang="en-US"/>
           </a:p>
         </p:txBody>
       </p:sp>
@@ -2695,7 +2732,6 @@
           <a:p>
             <a:fld id="{837840E2-13A5-46A9-A265-C77FF1EECC77}" type="datetimeFigureOut">
               <a:rPr lang="zh-CN" altLang="en-US" smtClean="0"/>
-              <a:t>2025/12/10</a:t>
             </a:fld>
             <a:endParaRPr lang="zh-CN" altLang="en-US"/>
           </a:p>
@@ -2737,7 +2773,6 @@
           <a:p>
             <a:fld id="{079686F9-7E47-4853-B8F4-FBCF71CB48DC}" type="slidenum">
               <a:rPr lang="zh-CN" altLang="en-US" smtClean="0"/>
-              <a:t>‹#›</a:t>
             </a:fld>
             <a:endParaRPr lang="zh-CN" altLang="en-US"/>
           </a:p>
@@ -2802,6 +2837,7 @@
               <a:rPr lang="zh-CN" altLang="en-US"/>
               <a:t>单击此处编辑母版标题样式</a:t>
             </a:r>
+            <a:endParaRPr lang="zh-CN" altLang="en-US"/>
           </a:p>
         </p:txBody>
       </p:sp>
@@ -2835,6 +2871,7 @@
               <a:rPr lang="zh-CN" altLang="en-US"/>
               <a:t>单击此处编辑母版文本样式</a:t>
             </a:r>
+            <a:endParaRPr lang="zh-CN" altLang="en-US"/>
           </a:p>
           <a:p>
             <a:pPr lvl="1"/>
@@ -2842,6 +2879,7 @@
               <a:rPr lang="zh-CN" altLang="en-US"/>
               <a:t>二级</a:t>
             </a:r>
+            <a:endParaRPr lang="zh-CN" altLang="en-US"/>
           </a:p>
           <a:p>
             <a:pPr lvl="2"/>
@@ -2849,6 +2887,7 @@
               <a:rPr lang="zh-CN" altLang="en-US"/>
               <a:t>三级</a:t>
             </a:r>
+            <a:endParaRPr lang="zh-CN" altLang="en-US"/>
           </a:p>
           <a:p>
             <a:pPr lvl="3"/>
@@ -2856,6 +2895,7 @@
               <a:rPr lang="zh-CN" altLang="en-US"/>
               <a:t>四级</a:t>
             </a:r>
+            <a:endParaRPr lang="zh-CN" altLang="en-US"/>
           </a:p>
           <a:p>
             <a:pPr lvl="4"/>
@@ -2863,6 +2903,7 @@
               <a:rPr lang="zh-CN" altLang="en-US"/>
               <a:t>五级</a:t>
             </a:r>
+            <a:endParaRPr lang="zh-CN" altLang="en-US"/>
           </a:p>
         </p:txBody>
       </p:sp>
@@ -2901,7 +2942,6 @@
           <a:p>
             <a:fld id="{837840E2-13A5-46A9-A265-C77FF1EECC77}" type="datetimeFigureOut">
               <a:rPr lang="zh-CN" altLang="en-US" smtClean="0"/>
-              <a:t>2025/12/10</a:t>
             </a:fld>
             <a:endParaRPr lang="zh-CN" altLang="en-US"/>
           </a:p>
@@ -2979,7 +3019,6 @@
           <a:p>
             <a:fld id="{079686F9-7E47-4853-B8F4-FBCF71CB48DC}" type="slidenum">
               <a:rPr lang="zh-CN" altLang="en-US" smtClean="0"/>
-              <a:t>‹#›</a:t>
             </a:fld>
             <a:endParaRPr lang="zh-CN" altLang="en-US"/>
           </a:p>
@@ -3310,7 +3349,7 @@
         <p:spPr>
           <a:xfrm>
             <a:off x="599090" y="302697"/>
-            <a:ext cx="7087197" cy="584775"/>
+            <a:ext cx="7015480" cy="583565"/>
           </a:xfrm>
           <a:prstGeom prst="rect">
             <a:avLst/>
@@ -3325,7 +3364,7 @@
           <a:p>
             <a:r>
               <a:rPr lang="zh-CN" altLang="en-US" sz="3200" dirty="0"/>
-              <a:t>上周会议纪要：</a:t>
+              <a:t>本周会议纪要：</a:t>
             </a:r>
             <a:r>
               <a:rPr lang="zh-CN" altLang="en-US" sz="3200" dirty="0">
@@ -3337,7 +3376,7 @@
               <a:rPr lang="en-US" altLang="zh-CN" sz="3200" dirty="0">
                 <a:sym typeface="+mn-ea"/>
               </a:rPr>
-              <a:t>1204</a:t>
+              <a:t>1210</a:t>
             </a:r>
             <a:r>
               <a:rPr lang="zh-CN" altLang="en-US" sz="3200" dirty="0">
@@ -3349,8 +3388,11 @@
               <a:rPr lang="en-US" altLang="zh-CN" sz="3200" dirty="0">
                 <a:sym typeface="+mn-ea"/>
               </a:rPr>
-              <a:t>10</a:t>
-            </a:r>
+              <a:t>11</a:t>
+            </a:r>
+            <a:endParaRPr lang="en-US" altLang="zh-CN" sz="3200" dirty="0">
+              <a:sym typeface="+mn-ea"/>
+            </a:endParaRPr>
           </a:p>
         </p:txBody>
       </p:sp>
@@ -3363,7 +3405,7 @@
         <p:spPr>
           <a:xfrm>
             <a:off x="186690" y="1167130"/>
-            <a:ext cx="11818620" cy="3277116"/>
+            <a:ext cx="11818620" cy="3322955"/>
           </a:xfrm>
           <a:prstGeom prst="rect">
             <a:avLst/>
@@ -3382,6 +3424,54 @@
               </a:lnSpc>
               <a:buNone/>
             </a:pPr>
+            <a:r>
+              <a:rPr lang="en-US" sz="2000" dirty="0">
+                <a:solidFill>
+                  <a:schemeClr val="tx2">
+                    <a:lumMod val="75000"/>
+                    <a:lumOff val="25000"/>
+                  </a:schemeClr>
+                </a:solidFill>
+                <a:sym typeface="+mn-ea"/>
+              </a:rPr>
+              <a:t>1. </a:t>
+            </a:r>
+            <a:r>
+              <a:rPr lang="zh-CN" altLang="en-US" sz="2000" dirty="0">
+                <a:solidFill>
+                  <a:schemeClr val="tx2">
+                    <a:lumMod val="75000"/>
+                    <a:lumOff val="25000"/>
+                  </a:schemeClr>
+                </a:solidFill>
+                <a:sym typeface="+mn-ea"/>
+              </a:rPr>
+              <a:t>完成</a:t>
+            </a:r>
+            <a:r>
+              <a:rPr lang="en-US" altLang="zh-CN" sz="2000" dirty="0" err="1">
+                <a:solidFill>
+                  <a:schemeClr val="tx2">
+                    <a:lumMod val="75000"/>
+                    <a:lumOff val="25000"/>
+                  </a:schemeClr>
+                </a:solidFill>
+                <a:sym typeface="+mn-ea"/>
+              </a:rPr>
+              <a:t>claude</a:t>
+            </a:r>
+            <a:r>
+              <a:rPr lang="zh-CN" altLang="en-US" sz="2000" dirty="0">
+                <a:solidFill>
+                  <a:schemeClr val="tx2">
+                    <a:lumMod val="75000"/>
+                    <a:lumOff val="25000"/>
+                  </a:schemeClr>
+                </a:solidFill>
+                <a:sym typeface="+mn-ea"/>
+              </a:rPr>
+              <a:t>生产了一批同规模的四类</a:t>
+            </a:r>
             <a:r>
               <a:rPr lang="en-US" altLang="zh-CN" sz="2000" dirty="0">
                 <a:solidFill>
@@ -3392,7 +3482,7 @@
                 </a:solidFill>
                 <a:sym typeface="+mn-ea"/>
               </a:rPr>
-              <a:t>1. </a:t>
+              <a:t>cot</a:t>
             </a:r>
             <a:r>
               <a:rPr lang="zh-CN" altLang="en-US" sz="2000" dirty="0">
@@ -3404,19 +3494,7 @@
                 </a:solidFill>
                 <a:sym typeface="+mn-ea"/>
               </a:rPr>
-              <a:t>根据需求新增了新的一类的</a:t>
-            </a:r>
-            <a:r>
-              <a:rPr lang="en-US" altLang="zh-CN" sz="2000" dirty="0" err="1">
-                <a:solidFill>
-                  <a:schemeClr val="tx2">
-                    <a:lumMod val="75000"/>
-                    <a:lumOff val="25000"/>
-                  </a:schemeClr>
-                </a:solidFill>
-                <a:sym typeface="+mn-ea"/>
-              </a:rPr>
-              <a:t>COT“before_reduced_natural_cot</a:t>
+              <a:t>数据集；完成了服务于推理模型三类</a:t>
             </a:r>
             <a:r>
               <a:rPr lang="en-US" altLang="zh-CN" sz="2000" dirty="0">
@@ -3428,7 +3506,7 @@
                 </a:solidFill>
                 <a:sym typeface="+mn-ea"/>
               </a:rPr>
-              <a:t>”</a:t>
+              <a:t>think-response</a:t>
             </a:r>
             <a:r>
               <a:rPr lang="zh-CN" altLang="en-US" sz="2000" dirty="0">
@@ -3440,9 +3518,295 @@
                 </a:solidFill>
                 <a:sym typeface="+mn-ea"/>
               </a:rPr>
-              <a:t>，并进行评估</a:t>
-            </a:r>
-            <a:endParaRPr lang="en-US" altLang="zh-CN" sz="2000" b="0" dirty="0">
+              <a:t>训练集；扩充数据集规模，目前已经扩展到</a:t>
+            </a:r>
+            <a:r>
+              <a:rPr lang="en-US" altLang="zh-CN" sz="2000" dirty="0">
+                <a:solidFill>
+                  <a:schemeClr val="tx2">
+                    <a:lumMod val="75000"/>
+                    <a:lumOff val="25000"/>
+                  </a:schemeClr>
+                </a:solidFill>
+                <a:sym typeface="+mn-ea"/>
+              </a:rPr>
+              <a:t>4500</a:t>
+            </a:r>
+            <a:r>
+              <a:rPr lang="zh-CN" altLang="en-US" sz="2000" dirty="0">
+                <a:solidFill>
+                  <a:schemeClr val="tx2">
+                    <a:lumMod val="75000"/>
+                    <a:lumOff val="25000"/>
+                  </a:schemeClr>
+                </a:solidFill>
+                <a:sym typeface="+mn-ea"/>
+              </a:rPr>
+              <a:t>，后续预期到</a:t>
+            </a:r>
+            <a:r>
+              <a:rPr lang="en-US" altLang="zh-CN" sz="2000" dirty="0">
+                <a:solidFill>
+                  <a:schemeClr val="tx2">
+                    <a:lumMod val="75000"/>
+                    <a:lumOff val="25000"/>
+                  </a:schemeClr>
+                </a:solidFill>
+                <a:sym typeface="+mn-ea"/>
+              </a:rPr>
+              <a:t>1-2w</a:t>
+            </a:r>
+            <a:r>
+              <a:rPr lang="zh-CN" altLang="en-US" sz="2000" dirty="0">
+                <a:solidFill>
+                  <a:schemeClr val="tx2">
+                    <a:lumMod val="75000"/>
+                    <a:lumOff val="25000"/>
+                  </a:schemeClr>
+                </a:solidFill>
+                <a:sym typeface="+mn-ea"/>
+              </a:rPr>
+              <a:t>条左右</a:t>
+            </a:r>
+            <a:r>
+              <a:rPr lang="zh-CN" altLang="en-US" sz="2000" dirty="0">
+                <a:solidFill>
+                  <a:schemeClr val="tx2">
+                    <a:lumMod val="75000"/>
+                    <a:lumOff val="25000"/>
+                  </a:schemeClr>
+                </a:solidFill>
+                <a:sym typeface="+mn-ea"/>
+              </a:rPr>
+              <a:t>是</a:t>
+            </a:r>
+            <a:endParaRPr lang="zh-CN" altLang="en-US" sz="2000" dirty="0">
+              <a:solidFill>
+                <a:schemeClr val="tx2">
+                  <a:lumMod val="75000"/>
+                  <a:lumOff val="25000"/>
+                </a:schemeClr>
+              </a:solidFill>
+              <a:sym typeface="+mn-ea"/>
+            </a:endParaRPr>
+          </a:p>
+          <a:p>
+            <a:pPr indent="0" algn="l">
+              <a:lnSpc>
+                <a:spcPct val="150000"/>
+              </a:lnSpc>
+              <a:buNone/>
+            </a:pPr>
+            <a:r>
+              <a:rPr lang="en-US" altLang="zh-CN" sz="2000" dirty="0">
+                <a:solidFill>
+                  <a:schemeClr val="tx2">
+                    <a:lumMod val="75000"/>
+                    <a:lumOff val="25000"/>
+                  </a:schemeClr>
+                </a:solidFill>
+                <a:sym typeface="+mn-ea"/>
+              </a:rPr>
+              <a:t>2. </a:t>
+            </a:r>
+            <a:r>
+              <a:rPr lang="zh-CN" altLang="en-US" sz="2000" dirty="0">
+                <a:solidFill>
+                  <a:schemeClr val="tx2">
+                    <a:lumMod val="75000"/>
+                    <a:lumOff val="25000"/>
+                  </a:schemeClr>
+                </a:solidFill>
+                <a:sym typeface="+mn-ea"/>
+              </a:rPr>
+              <a:t>对</a:t>
+            </a:r>
+            <a:r>
+              <a:rPr lang="en-US" altLang="zh-CN" sz="2000" dirty="0">
+                <a:solidFill>
+                  <a:schemeClr val="tx2">
+                    <a:lumMod val="75000"/>
+                    <a:lumOff val="25000"/>
+                  </a:schemeClr>
+                </a:solidFill>
+                <a:sym typeface="+mn-ea"/>
+              </a:rPr>
+              <a:t>Qwen-2.5-32B-Instruct</a:t>
+            </a:r>
+            <a:r>
+              <a:rPr lang="zh-CN" altLang="en-US" sz="2000" dirty="0">
+                <a:solidFill>
+                  <a:schemeClr val="tx2">
+                    <a:lumMod val="75000"/>
+                    <a:lumOff val="25000"/>
+                  </a:schemeClr>
+                </a:solidFill>
+                <a:sym typeface="+mn-ea"/>
+              </a:rPr>
+              <a:t>模型进行</a:t>
+            </a:r>
+            <a:r>
+              <a:rPr lang="en-US" altLang="zh-CN" sz="2000" dirty="0">
+                <a:solidFill>
+                  <a:schemeClr val="tx2">
+                    <a:lumMod val="75000"/>
+                    <a:lumOff val="25000"/>
+                  </a:schemeClr>
+                </a:solidFill>
+                <a:sym typeface="+mn-ea"/>
+              </a:rPr>
+              <a:t>lora</a:t>
+            </a:r>
+            <a:r>
+              <a:rPr lang="zh-CN" altLang="en-US" sz="2000" dirty="0">
+                <a:solidFill>
+                  <a:schemeClr val="tx2">
+                    <a:lumMod val="75000"/>
+                    <a:lumOff val="25000"/>
+                  </a:schemeClr>
+                </a:solidFill>
+                <a:sym typeface="+mn-ea"/>
+              </a:rPr>
+              <a:t>微调和评估，</a:t>
+            </a:r>
+            <a:r>
+              <a:rPr lang="zh-CN" altLang="en-US" sz="2000" dirty="0">
+                <a:solidFill>
+                  <a:schemeClr val="tx2">
+                    <a:lumMod val="75000"/>
+                    <a:lumOff val="25000"/>
+                  </a:schemeClr>
+                </a:solidFill>
+                <a:sym typeface="+mn-ea"/>
+              </a:rPr>
+              <a:t>对比结果发现提升幅度更小</a:t>
+            </a:r>
+            <a:endParaRPr lang="zh-CN" altLang="en-US" sz="2000" dirty="0">
+              <a:solidFill>
+                <a:schemeClr val="tx2">
+                  <a:lumMod val="75000"/>
+                  <a:lumOff val="25000"/>
+                </a:schemeClr>
+              </a:solidFill>
+              <a:sym typeface="+mn-ea"/>
+            </a:endParaRPr>
+          </a:p>
+          <a:p>
+            <a:pPr indent="0" algn="l">
+              <a:lnSpc>
+                <a:spcPct val="150000"/>
+              </a:lnSpc>
+              <a:buNone/>
+            </a:pPr>
+            <a:r>
+              <a:rPr lang="en-US" altLang="zh-CN" sz="2000" dirty="0">
+                <a:solidFill>
+                  <a:schemeClr val="tx2">
+                    <a:lumMod val="75000"/>
+                    <a:lumOff val="25000"/>
+                  </a:schemeClr>
+                </a:solidFill>
+                <a:sym typeface="+mn-ea"/>
+              </a:rPr>
+              <a:t>3. </a:t>
+            </a:r>
+            <a:r>
+              <a:rPr lang="zh-CN" altLang="en-US" sz="2000" dirty="0">
+                <a:solidFill>
+                  <a:schemeClr val="tx2">
+                    <a:lumMod val="75000"/>
+                    <a:lumOff val="25000"/>
+                  </a:schemeClr>
+                </a:solidFill>
+                <a:sym typeface="+mn-ea"/>
+              </a:rPr>
+              <a:t>对</a:t>
+            </a:r>
+            <a:r>
+              <a:rPr lang="en-US" altLang="zh-CN" sz="2000" dirty="0">
+                <a:solidFill>
+                  <a:schemeClr val="tx2">
+                    <a:lumMod val="75000"/>
+                    <a:lumOff val="25000"/>
+                  </a:schemeClr>
+                </a:solidFill>
+                <a:sym typeface="+mn-ea"/>
+              </a:rPr>
+              <a:t>DeepSeek-R1-Distill-7B</a:t>
+            </a:r>
+            <a:r>
+              <a:rPr lang="zh-CN" altLang="en-US" sz="2000" dirty="0">
+                <a:solidFill>
+                  <a:schemeClr val="tx2">
+                    <a:lumMod val="75000"/>
+                    <a:lumOff val="25000"/>
+                  </a:schemeClr>
+                </a:solidFill>
+                <a:sym typeface="+mn-ea"/>
+              </a:rPr>
+              <a:t>和</a:t>
+            </a:r>
+            <a:r>
+              <a:rPr lang="en-US" altLang="zh-CN" sz="2000" dirty="0">
+                <a:solidFill>
+                  <a:schemeClr val="tx2">
+                    <a:lumMod val="75000"/>
+                    <a:lumOff val="25000"/>
+                  </a:schemeClr>
+                </a:solidFill>
+                <a:sym typeface="+mn-ea"/>
+              </a:rPr>
+              <a:t>14B</a:t>
+            </a:r>
+            <a:r>
+              <a:rPr lang="zh-CN" altLang="en-US" sz="2000" dirty="0">
+                <a:solidFill>
+                  <a:schemeClr val="tx2">
+                    <a:lumMod val="75000"/>
+                    <a:lumOff val="25000"/>
+                  </a:schemeClr>
+                </a:solidFill>
+                <a:sym typeface="+mn-ea"/>
+              </a:rPr>
+              <a:t>模型进行</a:t>
+            </a:r>
+            <a:r>
+              <a:rPr lang="en-US" altLang="zh-CN" sz="2000" dirty="0">
+                <a:solidFill>
+                  <a:schemeClr val="tx2">
+                    <a:lumMod val="75000"/>
+                    <a:lumOff val="25000"/>
+                  </a:schemeClr>
+                </a:solidFill>
+                <a:sym typeface="+mn-ea"/>
+              </a:rPr>
+              <a:t>lora</a:t>
+            </a:r>
+            <a:r>
+              <a:rPr lang="zh-CN" altLang="en-US" sz="2000" dirty="0">
+                <a:solidFill>
+                  <a:schemeClr val="tx2">
+                    <a:lumMod val="75000"/>
+                    <a:lumOff val="25000"/>
+                  </a:schemeClr>
+                </a:solidFill>
+                <a:sym typeface="+mn-ea"/>
+              </a:rPr>
+              <a:t>微调和评估，</a:t>
+            </a:r>
+            <a:r>
+              <a:rPr lang="zh-CN" altLang="en-US" sz="2000" dirty="0">
+                <a:solidFill>
+                  <a:schemeClr val="tx2">
+                    <a:lumMod val="75000"/>
+                    <a:lumOff val="25000"/>
+                  </a:schemeClr>
+                </a:solidFill>
+                <a:sym typeface="+mn-ea"/>
+              </a:rPr>
+              <a:t>整体表现不错</a:t>
+            </a:r>
+            <a:endParaRPr lang="zh-CN" altLang="en-US" sz="2000" b="0" dirty="0">
               <a:solidFill>
                 <a:schemeClr val="tx2">
                   <a:lumMod val="75000"/>
@@ -3461,70 +3825,44 @@
             <a:r>
               <a:rPr lang="en-US" altLang="zh-CN" sz="2000" dirty="0">
                 <a:solidFill>
-                  <a:schemeClr val="tx2">
-                    <a:lumMod val="75000"/>
-                    <a:lumOff val="25000"/>
-                  </a:schemeClr>
+                  <a:schemeClr val="tx1"/>
                 </a:solidFill>
                 <a:sym typeface="+mn-ea"/>
               </a:rPr>
-              <a:t>2. </a:t>
+              <a:t>4. [todo] </a:t>
             </a:r>
             <a:r>
               <a:rPr lang="zh-CN" altLang="en-US" sz="2000" dirty="0">
                 <a:solidFill>
-                  <a:schemeClr val="tx2">
-                    <a:lumMod val="75000"/>
-                    <a:lumOff val="25000"/>
-                  </a:schemeClr>
+                  <a:schemeClr val="tx1"/>
                 </a:solidFill>
                 <a:sym typeface="+mn-ea"/>
               </a:rPr>
-              <a:t>尝试用</a:t>
-            </a:r>
-            <a:r>
-              <a:rPr lang="en-US" altLang="zh-CN" sz="2000" dirty="0" err="1">
+              <a:t>调研业界最新的论文是调哪个模型，确定模型类型（推理</a:t>
+            </a:r>
+            <a:r>
+              <a:rPr lang="en-US" altLang="zh-CN" sz="2000" dirty="0">
                 <a:solidFill>
-                  <a:schemeClr val="tx2">
-                    <a:lumMod val="75000"/>
-                    <a:lumOff val="25000"/>
-                  </a:schemeClr>
+                  <a:schemeClr val="tx1"/>
                 </a:solidFill>
                 <a:sym typeface="+mn-ea"/>
               </a:rPr>
-              <a:t>claude</a:t>
+              <a:t>/</a:t>
             </a:r>
             <a:r>
               <a:rPr lang="zh-CN" altLang="en-US" sz="2000" dirty="0">
                 <a:solidFill>
-                  <a:schemeClr val="tx2">
-                    <a:lumMod val="75000"/>
-                    <a:lumOff val="25000"/>
-                  </a:schemeClr>
+                  <a:schemeClr val="tx1"/>
                 </a:solidFill>
                 <a:sym typeface="+mn-ea"/>
               </a:rPr>
-              <a:t>生产了一批同规模数据集，且已经生产了对应的两类</a:t>
-            </a:r>
-            <a:r>
-              <a:rPr lang="en-US" altLang="zh-CN" sz="2000" dirty="0">
-                <a:solidFill>
-                  <a:schemeClr val="tx2">
-                    <a:lumMod val="75000"/>
-                    <a:lumOff val="25000"/>
-                  </a:schemeClr>
-                </a:solidFill>
-                <a:sym typeface="+mn-ea"/>
-              </a:rPr>
-              <a:t>cot</a:t>
-            </a:r>
-            <a:endParaRPr lang="en-US" altLang="zh-CN" sz="2000" b="0" dirty="0">
+              <a:t>非推理）与模型参数</a:t>
+            </a:r>
+            <a:endParaRPr lang="zh-CN" altLang="en-US" sz="2000" dirty="0">
               <a:solidFill>
-                <a:schemeClr val="tx2">
-                  <a:lumMod val="75000"/>
-                  <a:lumOff val="25000"/>
-                </a:schemeClr>
+                <a:schemeClr val="tx1"/>
               </a:solidFill>
+              <a:sym typeface="+mn-ea"/>
             </a:endParaRPr>
           </a:p>
           <a:p>
@@ -3537,51 +3875,54 @@
             <a:r>
               <a:rPr lang="en-US" altLang="zh-CN" sz="2000" dirty="0">
                 <a:solidFill>
-                  <a:schemeClr val="tx2">
-                    <a:lumMod val="75000"/>
-                    <a:lumOff val="25000"/>
-                  </a:schemeClr>
+                  <a:schemeClr val="tx1"/>
                 </a:solidFill>
                 <a:sym typeface="+mn-ea"/>
               </a:rPr>
-              <a:t>3. </a:t>
+              <a:t>5. [todo] </a:t>
             </a:r>
             <a:r>
               <a:rPr lang="zh-CN" altLang="en-US" sz="2000" dirty="0">
                 <a:solidFill>
-                  <a:schemeClr val="tx2">
-                    <a:lumMod val="75000"/>
-                    <a:lumOff val="25000"/>
-                  </a:schemeClr>
+                  <a:schemeClr val="tx1"/>
                 </a:solidFill>
                 <a:sym typeface="+mn-ea"/>
               </a:rPr>
-              <a:t>对三个模型在</a:t>
+              <a:t>分析【</a:t>
             </a:r>
             <a:r>
               <a:rPr lang="en-US" altLang="zh-CN" sz="2000" dirty="0">
                 <a:solidFill>
-                  <a:schemeClr val="tx2">
-                    <a:lumMod val="75000"/>
-                    <a:lumOff val="25000"/>
-                  </a:schemeClr>
+                  <a:schemeClr val="tx1"/>
                 </a:solidFill>
                 <a:sym typeface="+mn-ea"/>
               </a:rPr>
-              <a:t>4</a:t>
+              <a:t>qwq-32B</a:t>
             </a:r>
             <a:r>
               <a:rPr lang="zh-CN" altLang="en-US" sz="2000" dirty="0">
                 <a:solidFill>
-                  <a:schemeClr val="tx2">
-                    <a:lumMod val="75000"/>
-                    <a:lumOff val="25000"/>
-                  </a:schemeClr>
+                  <a:schemeClr val="tx1"/>
                 </a:solidFill>
                 <a:sym typeface="+mn-ea"/>
               </a:rPr>
-              <a:t>个数据集上进行训练。再进行评估</a:t>
-            </a:r>
+              <a:t>提升高】与【目前提升低】的差异原因</a:t>
+            </a:r>
+            <a:r>
+              <a:rPr lang="en-US" altLang="zh-CN" sz="2000" dirty="0">
+                <a:solidFill>
+                  <a:schemeClr val="tx1"/>
+                </a:solidFill>
+                <a:sym typeface="+mn-ea"/>
+              </a:rPr>
+              <a:t> --- P0 ---</a:t>
+            </a:r>
+            <a:endParaRPr lang="zh-CN" altLang="en-US" sz="2000" dirty="0">
+              <a:solidFill>
+                <a:schemeClr val="tx1"/>
+              </a:solidFill>
+              <a:sym typeface="+mn-ea"/>
+            </a:endParaRPr>
           </a:p>
           <a:p>
             <a:pPr indent="0" algn="l">
@@ -3593,265 +3934,325 @@
             <a:r>
               <a:rPr lang="en-US" altLang="zh-CN" sz="2000" dirty="0">
                 <a:solidFill>
-                  <a:schemeClr val="tx2">
-                    <a:lumMod val="75000"/>
-                    <a:lumOff val="25000"/>
-                  </a:schemeClr>
+                  <a:schemeClr val="tx1"/>
                 </a:solidFill>
                 <a:sym typeface="+mn-ea"/>
               </a:rPr>
-              <a:t>4. </a:t>
+              <a:t>6. [todo] </a:t>
             </a:r>
             <a:r>
               <a:rPr lang="zh-CN" altLang="en-US" sz="2000" dirty="0">
-                <a:sym typeface="+mn-ea"/>
-              </a:rPr>
-              <a:t>下周尝试：【全参</a:t>
+                <a:solidFill>
+                  <a:schemeClr val="tx1"/>
+                </a:solidFill>
+                <a:sym typeface="+mn-ea"/>
+              </a:rPr>
+              <a:t>分析</a:t>
             </a:r>
             <a:r>
               <a:rPr lang="en-US" altLang="zh-CN" sz="2000" dirty="0">
-                <a:sym typeface="+mn-ea"/>
-              </a:rPr>
-              <a:t> VS lora</a:t>
+                <a:solidFill>
+                  <a:schemeClr val="tx1"/>
+                </a:solidFill>
+                <a:sym typeface="+mn-ea"/>
+              </a:rPr>
+              <a:t>Jung</a:t>
             </a:r>
             <a:r>
               <a:rPr lang="zh-CN" altLang="en-US" sz="2000" dirty="0">
-                <a:sym typeface="+mn-ea"/>
-              </a:rPr>
-              <a:t>参数对比】</a:t>
-            </a:r>
-            <a:r>
-              <a:rPr lang="en-US" altLang="zh-CN" sz="2000" dirty="0" err="1">
-                <a:sym typeface="+mn-ea"/>
-              </a:rPr>
-              <a:t>Deepseek</a:t>
-            </a:r>
-            <a:r>
-              <a:rPr lang="en-US" altLang="zh-CN" sz="2000" dirty="0">
-                <a:sym typeface="+mn-ea"/>
-              </a:rPr>
-              <a:t> R1 distill </a:t>
-            </a:r>
-            <a:r>
-              <a:rPr lang="en-US" altLang="zh-CN" sz="2000" dirty="0" err="1">
-                <a:sym typeface="+mn-ea"/>
-              </a:rPr>
-              <a:t>qwen</a:t>
-            </a:r>
-            <a:r>
-              <a:rPr lang="en-US" altLang="zh-CN" sz="2000" dirty="0">
-                <a:sym typeface="+mn-ea"/>
-              </a:rPr>
-              <a:t> 7B</a:t>
+                <a:solidFill>
+                  <a:schemeClr val="tx1"/>
+                </a:solidFill>
+                <a:sym typeface="+mn-ea"/>
+              </a:rPr>
+              <a:t>他们的工作细节，看有没有对我们有帮助的</a:t>
             </a:r>
             <a:r>
               <a:rPr lang="zh-CN" altLang="en-US" sz="2000" dirty="0">
-                <a:sym typeface="+mn-ea"/>
-              </a:rPr>
-              <a:t>、</a:t>
-            </a:r>
-            <a:r>
-              <a:rPr lang="en-US" altLang="zh-CN" sz="2000" dirty="0">
-                <a:sym typeface="+mn-ea"/>
-              </a:rPr>
-              <a:t>14B</a:t>
-            </a:r>
-            <a:r>
-              <a:rPr lang="zh-CN" altLang="en-US" sz="2000" dirty="0">
-                <a:sym typeface="+mn-ea"/>
-              </a:rPr>
-              <a:t>（</a:t>
-            </a:r>
-            <a:r>
-              <a:rPr lang="en-US" altLang="zh-CN" sz="2000" dirty="0">
-                <a:sym typeface="+mn-ea"/>
-              </a:rPr>
-              <a:t>32B</a:t>
-            </a:r>
-            <a:r>
-              <a:rPr lang="zh-CN" altLang="en-US" sz="2000" dirty="0">
-                <a:sym typeface="+mn-ea"/>
-              </a:rPr>
-              <a:t>）</a:t>
-            </a:r>
-            <a:r>
-              <a:rPr lang="en-US" altLang="zh-CN" sz="2000" dirty="0">
-                <a:sym typeface="+mn-ea"/>
-              </a:rPr>
-              <a:t>  </a:t>
-            </a:r>
-            <a:r>
-              <a:rPr lang="en-US" altLang="zh-CN" sz="2000" dirty="0" err="1">
-                <a:sym typeface="+mn-ea"/>
-              </a:rPr>
-              <a:t>claude</a:t>
-            </a:r>
-            <a:r>
-              <a:rPr lang="zh-CN" altLang="en-US" sz="2000" dirty="0">
-                <a:sym typeface="+mn-ea"/>
-              </a:rPr>
-              <a:t>数据集</a:t>
-            </a:r>
-            <a:endParaRPr lang="zh-CN" altLang="en-US" sz="2000" b="0" dirty="0">
+                <a:solidFill>
+                  <a:schemeClr val="tx1"/>
+                </a:solidFill>
+                <a:sym typeface="+mn-ea"/>
+              </a:rPr>
+              <a:t>地方</a:t>
+            </a:r>
+            <a:endParaRPr lang="zh-CN" altLang="en-US" sz="2000" dirty="0">
               <a:solidFill>
                 <a:schemeClr val="tx1"/>
               </a:solidFill>
+              <a:sym typeface="+mn-ea"/>
             </a:endParaRPr>
           </a:p>
-          <a:p>
-            <a:pPr indent="0" algn="l">
-              <a:lnSpc>
-                <a:spcPct val="150000"/>
-              </a:lnSpc>
-              <a:buNone/>
-            </a:pPr>
-            <a:r>
-              <a:rPr lang="en-US" altLang="zh-CN" sz="2000" dirty="0">
-                <a:sym typeface="+mn-ea"/>
-              </a:rPr>
-              <a:t>5. </a:t>
-            </a:r>
-            <a:r>
-              <a:rPr lang="zh-CN" altLang="en-US" sz="2000" dirty="0">
-                <a:sym typeface="+mn-ea"/>
-              </a:rPr>
-              <a:t>下周尝试：【大模型训练实验】</a:t>
-            </a:r>
-            <a:r>
-              <a:rPr lang="en-US" altLang="zh-CN" sz="2000" dirty="0" err="1">
-                <a:sym typeface="+mn-ea"/>
-              </a:rPr>
-              <a:t>qwen</a:t>
-            </a:r>
-            <a:r>
-              <a:rPr lang="en-US" altLang="zh-CN" sz="2000" dirty="0">
-                <a:sym typeface="+mn-ea"/>
-              </a:rPr>
-              <a:t> 32B </a:t>
-            </a:r>
-            <a:r>
-              <a:rPr lang="zh-CN" altLang="en-US" sz="2000" dirty="0">
-                <a:sym typeface="+mn-ea"/>
-              </a:rPr>
-              <a:t>尝试四个</a:t>
-            </a:r>
-            <a:r>
-              <a:rPr lang="en-US" altLang="zh-CN" sz="2000" dirty="0">
-                <a:sym typeface="+mn-ea"/>
-              </a:rPr>
-              <a:t>cot</a:t>
-            </a:r>
-            <a:r>
-              <a:rPr lang="zh-CN" altLang="en-US" sz="2000" dirty="0">
-                <a:sym typeface="+mn-ea"/>
-              </a:rPr>
-              <a:t>数据集的对比</a:t>
-            </a:r>
-            <a:endParaRPr lang="zh-CN" altLang="en-US" sz="2000" b="0" dirty="0">
-              <a:solidFill>
-                <a:schemeClr val="tx1"/>
-              </a:solidFill>
-            </a:endParaRPr>
-          </a:p>
-          <a:p>
-            <a:pPr indent="0" algn="l">
-              <a:lnSpc>
-                <a:spcPct val="150000"/>
-              </a:lnSpc>
-              <a:buNone/>
-            </a:pPr>
-            <a:r>
-              <a:rPr lang="en-US" altLang="zh-CN" sz="2000" dirty="0">
-                <a:sym typeface="+mn-ea"/>
-              </a:rPr>
-              <a:t>6. </a:t>
-            </a:r>
-            <a:r>
-              <a:rPr lang="zh-CN" altLang="en-US" sz="2000" dirty="0">
-                <a:sym typeface="+mn-ea"/>
-              </a:rPr>
-              <a:t>后续更改问答对设置：之前</a:t>
-            </a:r>
-            <a:r>
-              <a:rPr lang="en-US" altLang="zh-CN" sz="2000" dirty="0">
-                <a:sym typeface="+mn-ea"/>
-              </a:rPr>
-              <a:t>-&lt;</a:t>
-            </a:r>
-            <a:r>
-              <a:rPr lang="zh-CN" altLang="en-US" sz="2000" dirty="0">
-                <a:sym typeface="+mn-ea"/>
-              </a:rPr>
-              <a:t>描述</a:t>
-            </a:r>
-            <a:r>
-              <a:rPr lang="en-US" altLang="zh-CN" sz="2000" dirty="0">
-                <a:sym typeface="+mn-ea"/>
-              </a:rPr>
-              <a:t>+CODE&gt;-&lt;cot&gt;</a:t>
-            </a:r>
-            <a:r>
-              <a:rPr lang="zh-CN" altLang="en-US" sz="2000" dirty="0">
-                <a:sym typeface="+mn-ea"/>
-              </a:rPr>
-              <a:t>；后续：着重推理模型训练：</a:t>
-            </a:r>
-            <a:r>
-              <a:rPr lang="en-US" altLang="zh-CN" sz="2000" dirty="0">
-                <a:sym typeface="+mn-ea"/>
-              </a:rPr>
-              <a:t>&lt;</a:t>
-            </a:r>
-            <a:r>
-              <a:rPr lang="zh-CN" altLang="en-US" sz="2000" dirty="0">
-                <a:sym typeface="+mn-ea"/>
-              </a:rPr>
-              <a:t>描述</a:t>
-            </a:r>
-            <a:r>
-              <a:rPr lang="en-US" altLang="zh-CN" sz="2000" dirty="0">
-                <a:sym typeface="+mn-ea"/>
-              </a:rPr>
-              <a:t>+CODE&gt;-&lt;</a:t>
-            </a:r>
-            <a:r>
-              <a:rPr lang="en-US" altLang="zh-CN" sz="2000" dirty="0" err="1">
-                <a:sym typeface="+mn-ea"/>
-              </a:rPr>
-              <a:t>cot+</a:t>
-            </a:r>
-            <a:r>
-              <a:rPr lang="en-US" altLang="zh-CN" sz="2000" dirty="0" err="1">
-                <a:highlight>
-                  <a:srgbClr val="FFFF00"/>
-                </a:highlight>
-                <a:sym typeface="+mn-ea"/>
-              </a:rPr>
-              <a:t>answer</a:t>
-            </a:r>
-            <a:r>
-              <a:rPr lang="zh-CN" altLang="en-US" sz="2000" dirty="0">
-                <a:highlight>
-                  <a:srgbClr val="FFFF00"/>
-                </a:highlight>
-                <a:sym typeface="+mn-ea"/>
-              </a:rPr>
-              <a:t>简要过程</a:t>
-            </a:r>
-            <a:r>
-              <a:rPr lang="en-US" altLang="zh-CN" sz="2000" dirty="0">
-                <a:sym typeface="+mn-ea"/>
-              </a:rPr>
-              <a:t>&gt;</a:t>
-            </a:r>
-            <a:endParaRPr lang="zh-CN" altLang="en-US" sz="2000" b="0" dirty="0">
-              <a:solidFill>
-                <a:schemeClr val="tx1"/>
-              </a:solidFill>
-            </a:endParaRPr>
-          </a:p>
-        </p:txBody>
-      </p:sp>
+        </p:txBody>
+      </p:sp>
+    </p:spTree>
+  </p:cSld>
+  <p:clrMapOvr>
+    <a:masterClrMapping/>
+  </p:clrMapOvr>
+</p:sld>
+</file>
+
+<file path=ppt/slides/slide10.xml><?xml version="1.0" encoding="utf-8"?>
+<p:sld xmlns:a="http://schemas.openxmlformats.org/drawingml/2006/main" xmlns:r="http://schemas.openxmlformats.org/officeDocument/2006/relationships" xmlns:p="http://schemas.openxmlformats.org/presentationml/2006/main">
+  <p:cSld>
+    <p:spTree>
+      <p:nvGrpSpPr>
+        <p:cNvPr id="1" name=""/>
+        <p:cNvGrpSpPr/>
+        <p:nvPr/>
+      </p:nvGrpSpPr>
+      <p:grpSpPr>
+        <a:xfrm>
+          <a:off x="0" y="0"/>
+          <a:ext cx="0" cy="0"/>
+          <a:chOff x="0" y="0"/>
+          <a:chExt cx="0" cy="0"/>
+        </a:xfrm>
+      </p:grpSpPr>
+      <p:sp>
+        <p:nvSpPr>
+          <p:cNvPr id="2" name="文本框 1"/>
+          <p:cNvSpPr txBox="1"/>
+          <p:nvPr/>
+        </p:nvSpPr>
+        <p:spPr>
+          <a:xfrm>
+            <a:off x="175895" y="82550"/>
+            <a:ext cx="10258425" cy="460375"/>
+          </a:xfrm>
+          <a:prstGeom prst="rect">
+            <a:avLst/>
+          </a:prstGeom>
+          <a:noFill/>
+        </p:spPr>
+        <p:txBody>
+          <a:bodyPr wrap="square" rtlCol="0">
+            <a:spAutoFit/>
+          </a:bodyPr>
+          <a:lstStyle/>
+          <a:p>
+            <a:r>
+              <a:rPr lang="zh-CN" altLang="en-US" sz="2400" dirty="0"/>
+              <a:t>附录：详细</a:t>
+            </a:r>
+            <a:r>
+              <a:rPr lang="zh-CN" altLang="en-US" sz="2400" dirty="0"/>
+              <a:t>数据</a:t>
+            </a:r>
+            <a:endParaRPr lang="zh-CN" altLang="en-US" sz="2400" dirty="0"/>
+          </a:p>
+        </p:txBody>
+      </p:sp>
+      <p:pic>
+        <p:nvPicPr>
+          <p:cNvPr id="5" name="图片 4"/>
+          <p:cNvPicPr>
+            <a:picLocks noChangeAspect="1"/>
+          </p:cNvPicPr>
+          <p:nvPr/>
+        </p:nvPicPr>
+        <p:blipFill>
+          <a:blip r:embed="rId1"/>
+          <a:stretch>
+            <a:fillRect/>
+          </a:stretch>
+        </p:blipFill>
+        <p:spPr>
+          <a:xfrm>
+            <a:off x="208280" y="3843020"/>
+            <a:ext cx="11776075" cy="2875280"/>
+          </a:xfrm>
+          <a:prstGeom prst="rect">
+            <a:avLst/>
+          </a:prstGeom>
+          <a:ln w="38100">
+            <a:solidFill>
+              <a:schemeClr val="accent1"/>
+            </a:solidFill>
+          </a:ln>
+        </p:spPr>
+      </p:pic>
+      <p:pic>
+        <p:nvPicPr>
+          <p:cNvPr id="6" name="图片 5"/>
+          <p:cNvPicPr>
+            <a:picLocks noChangeAspect="1"/>
+          </p:cNvPicPr>
+          <p:nvPr/>
+        </p:nvPicPr>
+        <p:blipFill>
+          <a:blip r:embed="rId2"/>
+          <a:stretch>
+            <a:fillRect/>
+          </a:stretch>
+        </p:blipFill>
+        <p:spPr>
+          <a:xfrm>
+            <a:off x="175895" y="642620"/>
+            <a:ext cx="11808460" cy="3050540"/>
+          </a:xfrm>
+          <a:prstGeom prst="rect">
+            <a:avLst/>
+          </a:prstGeom>
+          <a:ln w="28575" cmpd="sng">
+            <a:solidFill>
+              <a:schemeClr val="accent1">
+                <a:shade val="50000"/>
+              </a:schemeClr>
+            </a:solidFill>
+            <a:prstDash val="solid"/>
+          </a:ln>
+        </p:spPr>
+      </p:pic>
+    </p:spTree>
+  </p:cSld>
+  <p:clrMapOvr>
+    <a:masterClrMapping/>
+  </p:clrMapOvr>
+</p:sld>
+</file>
+
+<file path=ppt/slides/slide11.xml><?xml version="1.0" encoding="utf-8"?>
+<p:sld xmlns:a="http://schemas.openxmlformats.org/drawingml/2006/main" xmlns:r="http://schemas.openxmlformats.org/officeDocument/2006/relationships" xmlns:p="http://schemas.openxmlformats.org/presentationml/2006/main">
+  <p:cSld>
+    <p:spTree>
+      <p:nvGrpSpPr>
+        <p:cNvPr id="1" name=""/>
+        <p:cNvGrpSpPr/>
+        <p:nvPr/>
+      </p:nvGrpSpPr>
+      <p:grpSpPr>
+        <a:xfrm>
+          <a:off x="0" y="0"/>
+          <a:ext cx="0" cy="0"/>
+          <a:chOff x="0" y="0"/>
+          <a:chExt cx="0" cy="0"/>
+        </a:xfrm>
+      </p:grpSpPr>
+      <p:sp>
+        <p:nvSpPr>
+          <p:cNvPr id="2" name="文本框 1"/>
+          <p:cNvSpPr txBox="1"/>
+          <p:nvPr/>
+        </p:nvSpPr>
+        <p:spPr>
+          <a:xfrm>
+            <a:off x="175895" y="82550"/>
+            <a:ext cx="10258425" cy="460375"/>
+          </a:xfrm>
+          <a:prstGeom prst="rect">
+            <a:avLst/>
+          </a:prstGeom>
+          <a:noFill/>
+        </p:spPr>
+        <p:txBody>
+          <a:bodyPr wrap="square" rtlCol="0">
+            <a:spAutoFit/>
+          </a:bodyPr>
+          <a:lstStyle/>
+          <a:p>
+            <a:r>
+              <a:rPr lang="zh-CN" altLang="en-US" sz="2400" dirty="0"/>
+              <a:t>附录：详细</a:t>
+            </a:r>
+            <a:r>
+              <a:rPr lang="zh-CN" altLang="en-US" sz="2400" dirty="0"/>
+              <a:t>数据</a:t>
+            </a:r>
+            <a:endParaRPr lang="zh-CN" altLang="en-US" sz="2400" dirty="0"/>
+          </a:p>
+        </p:txBody>
+      </p:sp>
+      <p:pic>
+        <p:nvPicPr>
+          <p:cNvPr id="3" name="图片 2"/>
+          <p:cNvPicPr>
+            <a:picLocks noChangeAspect="1"/>
+          </p:cNvPicPr>
+          <p:nvPr/>
+        </p:nvPicPr>
+        <p:blipFill>
+          <a:blip r:embed="rId1"/>
+          <a:srcRect t="17720"/>
+          <a:stretch>
+            <a:fillRect/>
+          </a:stretch>
+        </p:blipFill>
+        <p:spPr>
+          <a:xfrm>
+            <a:off x="2906395" y="2337435"/>
+            <a:ext cx="8404860" cy="2129790"/>
+          </a:xfrm>
+          <a:prstGeom prst="rect">
+            <a:avLst/>
+          </a:prstGeom>
+          <a:ln w="19050">
+            <a:solidFill>
+              <a:schemeClr val="accent1"/>
+            </a:solidFill>
+          </a:ln>
+        </p:spPr>
+      </p:pic>
+      <p:pic>
+        <p:nvPicPr>
+          <p:cNvPr id="7" name="图片 6"/>
+          <p:cNvPicPr>
+            <a:picLocks noChangeAspect="1"/>
+          </p:cNvPicPr>
+          <p:nvPr/>
+        </p:nvPicPr>
+        <p:blipFill>
+          <a:blip r:embed="rId2"/>
+          <a:srcRect t="18401"/>
+          <a:stretch>
+            <a:fillRect/>
+          </a:stretch>
+        </p:blipFill>
+        <p:spPr>
+          <a:xfrm>
+            <a:off x="2906395" y="4552315"/>
+            <a:ext cx="8404225" cy="2306320"/>
+          </a:xfrm>
+          <a:prstGeom prst="rect">
+            <a:avLst/>
+          </a:prstGeom>
+          <a:ln w="19050">
+            <a:solidFill>
+              <a:schemeClr val="accent1"/>
+            </a:solidFill>
+          </a:ln>
+        </p:spPr>
+      </p:pic>
+      <p:pic>
+        <p:nvPicPr>
+          <p:cNvPr id="8" name="图片 7"/>
+          <p:cNvPicPr>
+            <a:picLocks noChangeAspect="1"/>
+          </p:cNvPicPr>
+          <p:nvPr/>
+        </p:nvPicPr>
+        <p:blipFill>
+          <a:blip r:embed="rId3"/>
+          <a:stretch>
+            <a:fillRect/>
+          </a:stretch>
+        </p:blipFill>
+        <p:spPr>
+          <a:xfrm>
+            <a:off x="2906395" y="79375"/>
+            <a:ext cx="8378190" cy="2163445"/>
+          </a:xfrm>
+          <a:prstGeom prst="rect">
+            <a:avLst/>
+          </a:prstGeom>
+          <a:ln w="19050">
+            <a:solidFill>
+              <a:schemeClr val="accent1"/>
+            </a:solidFill>
+          </a:ln>
+        </p:spPr>
+      </p:pic>
     </p:spTree>
   </p:cSld>
   <p:clrMapOvr>
@@ -3885,6 +4286,576 @@
         </p:nvSpPr>
         <p:spPr>
           <a:xfrm>
+            <a:off x="599090" y="302697"/>
+            <a:ext cx="7087197" cy="584775"/>
+          </a:xfrm>
+          <a:prstGeom prst="rect">
+            <a:avLst/>
+          </a:prstGeom>
+          <a:noFill/>
+        </p:spPr>
+        <p:txBody>
+          <a:bodyPr wrap="none" rtlCol="0">
+            <a:spAutoFit/>
+          </a:bodyPr>
+          <a:lstStyle/>
+          <a:p>
+            <a:r>
+              <a:rPr lang="zh-CN" altLang="en-US" sz="3200" dirty="0"/>
+              <a:t>上周会议纪要：</a:t>
+            </a:r>
+            <a:r>
+              <a:rPr lang="zh-CN" altLang="en-US" sz="3200" dirty="0">
+                <a:sym typeface="+mn-ea"/>
+              </a:rPr>
+              <a:t>2025</a:t>
+            </a:r>
+            <a:r>
+              <a:rPr lang="en-US" altLang="zh-CN" sz="3200" dirty="0">
+                <a:sym typeface="+mn-ea"/>
+              </a:rPr>
+              <a:t>1204</a:t>
+            </a:r>
+            <a:r>
+              <a:rPr lang="zh-CN" altLang="en-US" sz="3200" dirty="0">
+                <a:sym typeface="+mn-ea"/>
+              </a:rPr>
+              <a:t> 会议纪要 </a:t>
+            </a:r>
+            <a:r>
+              <a:rPr lang="en-US" altLang="zh-CN" sz="3200" dirty="0">
+                <a:sym typeface="+mn-ea"/>
+              </a:rPr>
+              <a:t>10</a:t>
+            </a:r>
+            <a:endParaRPr lang="en-US" altLang="zh-CN" sz="3200" dirty="0">
+              <a:sym typeface="+mn-ea"/>
+            </a:endParaRPr>
+          </a:p>
+        </p:txBody>
+      </p:sp>
+      <p:sp>
+        <p:nvSpPr>
+          <p:cNvPr id="4" name="文本框 3"/>
+          <p:cNvSpPr txBox="1"/>
+          <p:nvPr/>
+        </p:nvSpPr>
+        <p:spPr>
+          <a:xfrm>
+            <a:off x="186690" y="1167130"/>
+            <a:ext cx="11818620" cy="3322955"/>
+          </a:xfrm>
+          <a:prstGeom prst="rect">
+            <a:avLst/>
+          </a:prstGeom>
+          <a:noFill/>
+        </p:spPr>
+        <p:txBody>
+          <a:bodyPr wrap="square">
+            <a:spAutoFit/>
+          </a:bodyPr>
+          <a:lstStyle/>
+          <a:p>
+            <a:pPr indent="0" algn="l">
+              <a:lnSpc>
+                <a:spcPct val="150000"/>
+              </a:lnSpc>
+              <a:buNone/>
+            </a:pPr>
+            <a:r>
+              <a:rPr lang="en-US" altLang="zh-CN" sz="2000" dirty="0">
+                <a:solidFill>
+                  <a:schemeClr val="tx2">
+                    <a:lumMod val="75000"/>
+                    <a:lumOff val="25000"/>
+                  </a:schemeClr>
+                </a:solidFill>
+                <a:sym typeface="+mn-ea"/>
+              </a:rPr>
+              <a:t>1. </a:t>
+            </a:r>
+            <a:r>
+              <a:rPr lang="zh-CN" altLang="en-US" sz="2000" dirty="0">
+                <a:solidFill>
+                  <a:schemeClr val="tx2">
+                    <a:lumMod val="75000"/>
+                    <a:lumOff val="25000"/>
+                  </a:schemeClr>
+                </a:solidFill>
+                <a:sym typeface="+mn-ea"/>
+              </a:rPr>
+              <a:t>根据需求新增了新的一类的</a:t>
+            </a:r>
+            <a:r>
+              <a:rPr lang="en-US" altLang="zh-CN" sz="2000" dirty="0" err="1">
+                <a:solidFill>
+                  <a:schemeClr val="tx2">
+                    <a:lumMod val="75000"/>
+                    <a:lumOff val="25000"/>
+                  </a:schemeClr>
+                </a:solidFill>
+                <a:sym typeface="+mn-ea"/>
+              </a:rPr>
+              <a:t>COT“before_reduced_natural_cot</a:t>
+            </a:r>
+            <a:r>
+              <a:rPr lang="en-US" altLang="zh-CN" sz="2000" dirty="0">
+                <a:solidFill>
+                  <a:schemeClr val="tx2">
+                    <a:lumMod val="75000"/>
+                    <a:lumOff val="25000"/>
+                  </a:schemeClr>
+                </a:solidFill>
+                <a:sym typeface="+mn-ea"/>
+              </a:rPr>
+              <a:t>”</a:t>
+            </a:r>
+            <a:r>
+              <a:rPr lang="zh-CN" altLang="en-US" sz="2000" dirty="0">
+                <a:solidFill>
+                  <a:schemeClr val="tx2">
+                    <a:lumMod val="75000"/>
+                    <a:lumOff val="25000"/>
+                  </a:schemeClr>
+                </a:solidFill>
+                <a:sym typeface="+mn-ea"/>
+              </a:rPr>
+              <a:t>，并进行评估</a:t>
+            </a:r>
+            <a:endParaRPr lang="en-US" altLang="zh-CN" sz="2000" b="0" dirty="0">
+              <a:solidFill>
+                <a:schemeClr val="tx2">
+                  <a:lumMod val="75000"/>
+                  <a:lumOff val="25000"/>
+                </a:schemeClr>
+              </a:solidFill>
+            </a:endParaRPr>
+          </a:p>
+          <a:p>
+            <a:pPr indent="0" algn="l">
+              <a:lnSpc>
+                <a:spcPct val="150000"/>
+              </a:lnSpc>
+              <a:buNone/>
+            </a:pPr>
+            <a:r>
+              <a:rPr lang="en-US" altLang="zh-CN" sz="2000" dirty="0">
+                <a:solidFill>
+                  <a:schemeClr val="tx2">
+                    <a:lumMod val="75000"/>
+                    <a:lumOff val="25000"/>
+                  </a:schemeClr>
+                </a:solidFill>
+                <a:sym typeface="+mn-ea"/>
+              </a:rPr>
+              <a:t>2. </a:t>
+            </a:r>
+            <a:r>
+              <a:rPr lang="zh-CN" altLang="en-US" sz="2000" dirty="0">
+                <a:solidFill>
+                  <a:schemeClr val="tx2">
+                    <a:lumMod val="75000"/>
+                    <a:lumOff val="25000"/>
+                  </a:schemeClr>
+                </a:solidFill>
+                <a:sym typeface="+mn-ea"/>
+              </a:rPr>
+              <a:t>尝试用</a:t>
+            </a:r>
+            <a:r>
+              <a:rPr lang="en-US" altLang="zh-CN" sz="2000" dirty="0" err="1">
+                <a:solidFill>
+                  <a:schemeClr val="tx2">
+                    <a:lumMod val="75000"/>
+                    <a:lumOff val="25000"/>
+                  </a:schemeClr>
+                </a:solidFill>
+                <a:sym typeface="+mn-ea"/>
+              </a:rPr>
+              <a:t>claude</a:t>
+            </a:r>
+            <a:r>
+              <a:rPr lang="zh-CN" altLang="en-US" sz="2000" dirty="0">
+                <a:solidFill>
+                  <a:schemeClr val="tx2">
+                    <a:lumMod val="75000"/>
+                    <a:lumOff val="25000"/>
+                  </a:schemeClr>
+                </a:solidFill>
+                <a:sym typeface="+mn-ea"/>
+              </a:rPr>
+              <a:t>生产了一批同规模数据集，且已经生产了对应的两类</a:t>
+            </a:r>
+            <a:r>
+              <a:rPr lang="en-US" altLang="zh-CN" sz="2000" dirty="0">
+                <a:solidFill>
+                  <a:schemeClr val="tx2">
+                    <a:lumMod val="75000"/>
+                    <a:lumOff val="25000"/>
+                  </a:schemeClr>
+                </a:solidFill>
+                <a:sym typeface="+mn-ea"/>
+              </a:rPr>
+              <a:t>cot</a:t>
+            </a:r>
+            <a:endParaRPr lang="en-US" altLang="zh-CN" sz="2000" b="0" dirty="0">
+              <a:solidFill>
+                <a:schemeClr val="tx2">
+                  <a:lumMod val="75000"/>
+                  <a:lumOff val="25000"/>
+                </a:schemeClr>
+              </a:solidFill>
+            </a:endParaRPr>
+          </a:p>
+          <a:p>
+            <a:pPr indent="0" algn="l">
+              <a:lnSpc>
+                <a:spcPct val="150000"/>
+              </a:lnSpc>
+              <a:buNone/>
+            </a:pPr>
+            <a:r>
+              <a:rPr lang="en-US" altLang="zh-CN" sz="2000" dirty="0">
+                <a:solidFill>
+                  <a:schemeClr val="tx2">
+                    <a:lumMod val="75000"/>
+                    <a:lumOff val="25000"/>
+                  </a:schemeClr>
+                </a:solidFill>
+                <a:sym typeface="+mn-ea"/>
+              </a:rPr>
+              <a:t>3. </a:t>
+            </a:r>
+            <a:r>
+              <a:rPr lang="zh-CN" altLang="en-US" sz="2000" dirty="0">
+                <a:solidFill>
+                  <a:schemeClr val="tx2">
+                    <a:lumMod val="75000"/>
+                    <a:lumOff val="25000"/>
+                  </a:schemeClr>
+                </a:solidFill>
+                <a:sym typeface="+mn-ea"/>
+              </a:rPr>
+              <a:t>对三个模型在</a:t>
+            </a:r>
+            <a:r>
+              <a:rPr lang="en-US" altLang="zh-CN" sz="2000" dirty="0">
+                <a:solidFill>
+                  <a:schemeClr val="tx2">
+                    <a:lumMod val="75000"/>
+                    <a:lumOff val="25000"/>
+                  </a:schemeClr>
+                </a:solidFill>
+                <a:sym typeface="+mn-ea"/>
+              </a:rPr>
+              <a:t>4</a:t>
+            </a:r>
+            <a:r>
+              <a:rPr lang="zh-CN" altLang="en-US" sz="2000" dirty="0">
+                <a:solidFill>
+                  <a:schemeClr val="tx2">
+                    <a:lumMod val="75000"/>
+                    <a:lumOff val="25000"/>
+                  </a:schemeClr>
+                </a:solidFill>
+                <a:sym typeface="+mn-ea"/>
+              </a:rPr>
+              <a:t>个数据集上进行训练。再进行评估</a:t>
+            </a:r>
+            <a:endParaRPr lang="zh-CN" altLang="en-US" sz="2000" dirty="0">
+              <a:solidFill>
+                <a:schemeClr val="tx2">
+                  <a:lumMod val="75000"/>
+                  <a:lumOff val="25000"/>
+                </a:schemeClr>
+              </a:solidFill>
+              <a:sym typeface="+mn-ea"/>
+            </a:endParaRPr>
+          </a:p>
+          <a:p>
+            <a:pPr indent="0" algn="l">
+              <a:lnSpc>
+                <a:spcPct val="150000"/>
+              </a:lnSpc>
+              <a:buNone/>
+            </a:pPr>
+            <a:r>
+              <a:rPr lang="en-US" altLang="zh-CN" sz="2000" dirty="0">
+                <a:solidFill>
+                  <a:schemeClr val="tx2">
+                    <a:lumMod val="75000"/>
+                    <a:lumOff val="25000"/>
+                  </a:schemeClr>
+                </a:solidFill>
+                <a:sym typeface="+mn-ea"/>
+              </a:rPr>
+              <a:t>4. </a:t>
+            </a:r>
+            <a:r>
+              <a:rPr lang="zh-CN" altLang="en-US" sz="2000" dirty="0">
+                <a:sym typeface="+mn-ea"/>
+              </a:rPr>
+              <a:t>下周尝试：【全参</a:t>
+            </a:r>
+            <a:r>
+              <a:rPr lang="en-US" altLang="zh-CN" sz="2000" dirty="0">
+                <a:sym typeface="+mn-ea"/>
+              </a:rPr>
+              <a:t> VS lora</a:t>
+            </a:r>
+            <a:r>
+              <a:rPr lang="zh-CN" altLang="en-US" sz="2000" dirty="0">
+                <a:sym typeface="+mn-ea"/>
+              </a:rPr>
+              <a:t>参数对比】</a:t>
+            </a:r>
+            <a:r>
+              <a:rPr lang="en-US" altLang="zh-CN" sz="2000" dirty="0" err="1">
+                <a:sym typeface="+mn-ea"/>
+              </a:rPr>
+              <a:t>Deepseek</a:t>
+            </a:r>
+            <a:r>
+              <a:rPr lang="en-US" altLang="zh-CN" sz="2000" dirty="0">
+                <a:sym typeface="+mn-ea"/>
+              </a:rPr>
+              <a:t> R1 distill </a:t>
+            </a:r>
+            <a:r>
+              <a:rPr lang="en-US" altLang="zh-CN" sz="2000" dirty="0" err="1">
+                <a:sym typeface="+mn-ea"/>
+              </a:rPr>
+              <a:t>qwen</a:t>
+            </a:r>
+            <a:r>
+              <a:rPr lang="en-US" altLang="zh-CN" sz="2000" dirty="0">
+                <a:sym typeface="+mn-ea"/>
+              </a:rPr>
+              <a:t> 7B</a:t>
+            </a:r>
+            <a:r>
+              <a:rPr lang="zh-CN" altLang="en-US" sz="2000" dirty="0">
+                <a:sym typeface="+mn-ea"/>
+              </a:rPr>
+              <a:t>、</a:t>
+            </a:r>
+            <a:r>
+              <a:rPr lang="en-US" altLang="zh-CN" sz="2000" dirty="0">
+                <a:sym typeface="+mn-ea"/>
+              </a:rPr>
+              <a:t>14B</a:t>
+            </a:r>
+            <a:r>
+              <a:rPr lang="zh-CN" altLang="en-US" sz="2000" dirty="0">
+                <a:sym typeface="+mn-ea"/>
+              </a:rPr>
+              <a:t>（</a:t>
+            </a:r>
+            <a:r>
+              <a:rPr lang="en-US" altLang="zh-CN" sz="2000" dirty="0">
+                <a:sym typeface="+mn-ea"/>
+              </a:rPr>
+              <a:t>32B</a:t>
+            </a:r>
+            <a:r>
+              <a:rPr lang="zh-CN" altLang="en-US" sz="2000" dirty="0">
+                <a:sym typeface="+mn-ea"/>
+              </a:rPr>
+              <a:t>）</a:t>
+            </a:r>
+            <a:endParaRPr lang="zh-CN" altLang="en-US" sz="2000" b="0" dirty="0">
+              <a:solidFill>
+                <a:schemeClr val="tx1"/>
+              </a:solidFill>
+            </a:endParaRPr>
+          </a:p>
+          <a:p>
+            <a:pPr indent="0" algn="l">
+              <a:lnSpc>
+                <a:spcPct val="150000"/>
+              </a:lnSpc>
+              <a:buNone/>
+            </a:pPr>
+            <a:r>
+              <a:rPr lang="en-US" altLang="zh-CN" sz="2000" dirty="0">
+                <a:sym typeface="+mn-ea"/>
+              </a:rPr>
+              <a:t>5. </a:t>
+            </a:r>
+            <a:r>
+              <a:rPr lang="zh-CN" altLang="en-US" sz="2000" dirty="0">
+                <a:sym typeface="+mn-ea"/>
+              </a:rPr>
+              <a:t>下周尝试：【大模型训练实验】</a:t>
+            </a:r>
+            <a:r>
+              <a:rPr lang="en-US" altLang="zh-CN" sz="2000" dirty="0" err="1">
+                <a:sym typeface="+mn-ea"/>
+              </a:rPr>
+              <a:t>qwen</a:t>
+            </a:r>
+            <a:r>
+              <a:rPr lang="en-US" altLang="zh-CN" sz="2000" dirty="0">
+                <a:sym typeface="+mn-ea"/>
+              </a:rPr>
+              <a:t> 32B </a:t>
+            </a:r>
+            <a:r>
+              <a:rPr lang="zh-CN" altLang="en-US" sz="2000" dirty="0">
+                <a:sym typeface="+mn-ea"/>
+              </a:rPr>
+              <a:t>尝试四个</a:t>
+            </a:r>
+            <a:r>
+              <a:rPr lang="en-US" altLang="zh-CN" sz="2000" dirty="0">
+                <a:sym typeface="+mn-ea"/>
+              </a:rPr>
+              <a:t>cot</a:t>
+            </a:r>
+            <a:r>
+              <a:rPr lang="zh-CN" altLang="en-US" sz="2000" dirty="0">
+                <a:sym typeface="+mn-ea"/>
+              </a:rPr>
+              <a:t>数据集的对比</a:t>
+            </a:r>
+            <a:endParaRPr lang="zh-CN" altLang="en-US" sz="2000" b="0" dirty="0">
+              <a:solidFill>
+                <a:schemeClr val="tx1"/>
+              </a:solidFill>
+            </a:endParaRPr>
+          </a:p>
+          <a:p>
+            <a:pPr indent="0" algn="l">
+              <a:lnSpc>
+                <a:spcPct val="150000"/>
+              </a:lnSpc>
+              <a:buNone/>
+            </a:pPr>
+            <a:r>
+              <a:rPr lang="en-US" altLang="zh-CN" sz="2000" dirty="0">
+                <a:sym typeface="+mn-ea"/>
+              </a:rPr>
+              <a:t>6. </a:t>
+            </a:r>
+            <a:r>
+              <a:rPr lang="zh-CN" altLang="en-US" sz="2000" dirty="0">
+                <a:sym typeface="+mn-ea"/>
+              </a:rPr>
+              <a:t>后续更改问答对设置：之前</a:t>
+            </a:r>
+            <a:r>
+              <a:rPr lang="en-US" altLang="zh-CN" sz="2000" dirty="0">
+                <a:sym typeface="+mn-ea"/>
+              </a:rPr>
+              <a:t>-&lt;</a:t>
+            </a:r>
+            <a:r>
+              <a:rPr lang="zh-CN" altLang="en-US" sz="2000" dirty="0">
+                <a:sym typeface="+mn-ea"/>
+              </a:rPr>
+              <a:t>描述</a:t>
+            </a:r>
+            <a:r>
+              <a:rPr lang="en-US" altLang="zh-CN" sz="2000" dirty="0">
+                <a:sym typeface="+mn-ea"/>
+              </a:rPr>
+              <a:t>+CODE&gt;-&lt;cot&gt;</a:t>
+            </a:r>
+            <a:r>
+              <a:rPr lang="zh-CN" altLang="en-US" sz="2000" dirty="0">
+                <a:sym typeface="+mn-ea"/>
+              </a:rPr>
+              <a:t>；后续：着重推理模型训练：</a:t>
+            </a:r>
+            <a:r>
+              <a:rPr lang="en-US" altLang="zh-CN" sz="2000" dirty="0">
+                <a:sym typeface="+mn-ea"/>
+              </a:rPr>
+              <a:t>&lt;</a:t>
+            </a:r>
+            <a:r>
+              <a:rPr lang="zh-CN" altLang="en-US" sz="2000" dirty="0">
+                <a:sym typeface="+mn-ea"/>
+              </a:rPr>
+              <a:t>描述</a:t>
+            </a:r>
+            <a:r>
+              <a:rPr lang="en-US" altLang="zh-CN" sz="2000" dirty="0">
+                <a:sym typeface="+mn-ea"/>
+              </a:rPr>
+              <a:t>+CODE&gt;-&lt;</a:t>
+            </a:r>
+            <a:r>
+              <a:rPr lang="en-US" altLang="zh-CN" sz="2000" dirty="0" err="1">
+                <a:sym typeface="+mn-ea"/>
+              </a:rPr>
+              <a:t>cot+</a:t>
+            </a:r>
+            <a:r>
+              <a:rPr lang="en-US" altLang="zh-CN" sz="2000" dirty="0" err="1">
+                <a:highlight>
+                  <a:srgbClr val="FFFF00"/>
+                </a:highlight>
+                <a:sym typeface="+mn-ea"/>
+              </a:rPr>
+              <a:t>answer</a:t>
+            </a:r>
+            <a:r>
+              <a:rPr lang="zh-CN" altLang="en-US" sz="2000" dirty="0">
+                <a:highlight>
+                  <a:srgbClr val="FFFF00"/>
+                </a:highlight>
+                <a:sym typeface="+mn-ea"/>
+              </a:rPr>
+              <a:t>简要过程</a:t>
+            </a:r>
+            <a:r>
+              <a:rPr lang="en-US" altLang="zh-CN" sz="2000" dirty="0">
+                <a:sym typeface="+mn-ea"/>
+              </a:rPr>
+              <a:t>&gt;</a:t>
+            </a:r>
+            <a:endParaRPr lang="zh-CN" altLang="en-US" sz="2000" b="0" dirty="0">
+              <a:solidFill>
+                <a:schemeClr val="tx1"/>
+              </a:solidFill>
+            </a:endParaRPr>
+          </a:p>
+        </p:txBody>
+      </p:sp>
+    </p:spTree>
+  </p:cSld>
+  <p:clrMapOvr>
+    <a:masterClrMapping/>
+  </p:clrMapOvr>
+</p:sld>
+</file>
+
+<file path=ppt/slides/slide3.xml><?xml version="1.0" encoding="utf-8"?>
+<p:sld xmlns:a="http://schemas.openxmlformats.org/drawingml/2006/main" xmlns:r="http://schemas.openxmlformats.org/officeDocument/2006/relationships" xmlns:p="http://schemas.openxmlformats.org/presentationml/2006/main">
+  <p:cSld>
+    <p:spTree>
+      <p:nvGrpSpPr>
+        <p:cNvPr id="1" name=""/>
+        <p:cNvGrpSpPr/>
+        <p:nvPr/>
+      </p:nvGrpSpPr>
+      <p:grpSpPr>
+        <a:xfrm>
+          <a:off x="0" y="0"/>
+          <a:ext cx="0" cy="0"/>
+          <a:chOff x="0" y="0"/>
+          <a:chExt cx="0" cy="0"/>
+        </a:xfrm>
+      </p:grpSpPr>
+      <p:sp>
+        <p:nvSpPr>
+          <p:cNvPr id="2" name="文本框 1"/>
+          <p:cNvSpPr txBox="1"/>
+          <p:nvPr/>
+        </p:nvSpPr>
+        <p:spPr>
+          <a:xfrm>
             <a:off x="427640" y="83622"/>
             <a:ext cx="2646878" cy="584775"/>
           </a:xfrm>
@@ -3903,6 +4874,7 @@
               <a:rPr lang="zh-CN" altLang="en-US" sz="3200" dirty="0"/>
               <a:t>本周内容总结</a:t>
             </a:r>
+            <a:endParaRPr lang="zh-CN" altLang="en-US" sz="3200" dirty="0"/>
           </a:p>
         </p:txBody>
       </p:sp>
@@ -3916,16 +4888,11 @@
             <p:custDataLst>
               <p:tags r:id="rId1"/>
             </p:custDataLst>
-            <p:extLst>
-              <p:ext uri="{D42A27DB-BD31-4B8C-83A1-F6EECF244321}">
-                <p14:modId xmlns:p14="http://schemas.microsoft.com/office/powerpoint/2010/main" val="2382244496"/>
-              </p:ext>
-            </p:extLst>
           </p:nvPr>
         </p:nvGraphicFramePr>
         <p:xfrm>
           <a:off x="196850" y="668655"/>
-          <a:ext cx="11798300" cy="6543342"/>
+          <a:ext cx="11798300" cy="6064885"/>
         </p:xfrm>
         <a:graphic>
           <a:graphicData uri="http://schemas.openxmlformats.org/drawingml/2006/table">
@@ -3934,22 +4901,10 @@
                 <a:tableStyleId>{073A0DAA-6AF3-43AB-8588-CEC1D06C72B9}</a:tableStyleId>
               </a:tblPr>
               <a:tblGrid>
-                <a:gridCol w="1210310">
-                  <a:extLst>
-                    <a:ext uri="{9D8B030D-6E8A-4147-A177-3AD203B41FA5}">
-                      <a16:colId xmlns:a16="http://schemas.microsoft.com/office/drawing/2014/main" val="20000"/>
-                    </a:ext>
-                  </a:extLst>
-                </a:gridCol>
-                <a:gridCol w="10587990">
-                  <a:extLst>
-                    <a:ext uri="{9D8B030D-6E8A-4147-A177-3AD203B41FA5}">
-                      <a16:colId xmlns:a16="http://schemas.microsoft.com/office/drawing/2014/main" val="20001"/>
-                    </a:ext>
-                  </a:extLst>
-                </a:gridCol>
+                <a:gridCol w="1210310"/>
+                <a:gridCol w="10587990"/>
               </a:tblGrid>
-              <a:tr h="1453515">
+              <a:tr h="2560320">
                 <a:tc>
                   <a:txBody>
                     <a:bodyPr/>
@@ -3964,6 +4919,11 @@
                         </a:rPr>
                         <a:t>细节进展</a:t>
                       </a:r>
+                      <a:endParaRPr lang="zh-CN" altLang="en-US" sz="1800" b="0" dirty="0">
+                        <a:solidFill>
+                          <a:schemeClr val="tx1"/>
+                        </a:solidFill>
+                      </a:endParaRPr>
                     </a:p>
                   </a:txBody>
                   <a:tcPr anchor="ctr">
@@ -4077,7 +5037,18 @@
                             </a:schemeClr>
                           </a:solidFill>
                         </a:rPr>
-                        <a:t>生产了一批同规模的四类</a:t>
+                        <a:t>生产</a:t>
+                      </a:r>
+                      <a:r>
+                        <a:rPr lang="zh-CN" altLang="en-US" sz="1800" b="0" dirty="0">
+                          <a:solidFill>
+                            <a:schemeClr val="tx2">
+                              <a:lumMod val="75000"/>
+                              <a:lumOff val="25000"/>
+                            </a:schemeClr>
+                          </a:solidFill>
+                        </a:rPr>
+                        <a:t>的一批同规模的四类</a:t>
                       </a:r>
                       <a:r>
                         <a:rPr lang="en-US" altLang="zh-CN" sz="1800" b="0" dirty="0">
@@ -4274,7 +5245,7 @@
                             </a:schemeClr>
                           </a:solidFill>
                         </a:rPr>
-                        <a:t>1-2w</a:t>
+                        <a:t>1w</a:t>
                       </a:r>
                       <a:r>
                         <a:rPr lang="zh-CN" altLang="en-US" sz="1800" b="0" dirty="0">
@@ -4313,6 +5284,176 @@
                           </a:solidFill>
                         </a:rPr>
                         <a:t>[NEW] </a:t>
+                      </a:r>
+                      <a:r>
+                        <a:rPr lang="zh-CN" altLang="en-US" sz="1800" b="0" dirty="0">
+                          <a:solidFill>
+                            <a:schemeClr val="tx2">
+                              <a:lumMod val="75000"/>
+                              <a:lumOff val="25000"/>
+                            </a:schemeClr>
+                          </a:solidFill>
+                        </a:rPr>
+                        <a:t>对</a:t>
+                      </a:r>
+                      <a:r>
+                        <a:rPr lang="en-US" altLang="zh-CN" sz="1800" b="0" dirty="0">
+                          <a:solidFill>
+                            <a:schemeClr val="tx2">
+                              <a:lumMod val="75000"/>
+                              <a:lumOff val="25000"/>
+                            </a:schemeClr>
+                          </a:solidFill>
+                        </a:rPr>
+                        <a:t>Qwen-2.5-32B-Instruct</a:t>
+                      </a:r>
+                      <a:r>
+                        <a:rPr lang="zh-CN" altLang="en-US" sz="1800" b="0" dirty="0">
+                          <a:solidFill>
+                            <a:schemeClr val="tx2">
+                              <a:lumMod val="75000"/>
+                              <a:lumOff val="25000"/>
+                            </a:schemeClr>
+                          </a:solidFill>
+                        </a:rPr>
+                        <a:t>模型进行</a:t>
+                      </a:r>
+                      <a:r>
+                        <a:rPr lang="en-US" altLang="zh-CN" sz="1800" b="0" dirty="0">
+                          <a:solidFill>
+                            <a:schemeClr val="tx2">
+                              <a:lumMod val="75000"/>
+                              <a:lumOff val="25000"/>
+                            </a:schemeClr>
+                          </a:solidFill>
+                        </a:rPr>
+                        <a:t>lora</a:t>
+                      </a:r>
+                      <a:r>
+                        <a:rPr lang="zh-CN" altLang="en-US" sz="1800" b="0" dirty="0">
+                          <a:solidFill>
+                            <a:schemeClr val="tx2">
+                              <a:lumMod val="75000"/>
+                              <a:lumOff val="25000"/>
+                            </a:schemeClr>
+                          </a:solidFill>
+                        </a:rPr>
+                        <a:t>微调，对比结果发现提升幅度更小；</a:t>
+                      </a:r>
+                      <a:endParaRPr lang="zh-CN" altLang="en-US" sz="1800" b="0" dirty="0">
+                        <a:solidFill>
+                          <a:schemeClr val="tx2">
+                            <a:lumMod val="75000"/>
+                            <a:lumOff val="25000"/>
+                          </a:schemeClr>
+                        </a:solidFill>
+                      </a:endParaRPr>
+                    </a:p>
+                    <a:p>
+                      <a:pPr marL="342900" indent="-342900" algn="l">
+                        <a:lnSpc>
+                          <a:spcPct val="150000"/>
+                        </a:lnSpc>
+                        <a:buAutoNum type="arabicPeriod"/>
+                      </a:pPr>
+                      <a:r>
+                        <a:rPr lang="en-US" altLang="zh-CN" sz="1800" b="0" dirty="0">
+                          <a:solidFill>
+                            <a:schemeClr val="tx2">
+                              <a:lumMod val="75000"/>
+                              <a:lumOff val="25000"/>
+                            </a:schemeClr>
+                          </a:solidFill>
+                        </a:rPr>
+                        <a:t>[NEW] </a:t>
+                      </a:r>
+                      <a:r>
+                        <a:rPr lang="zh-CN" altLang="en-US" sz="1800" b="0" dirty="0">
+                          <a:solidFill>
+                            <a:schemeClr val="tx2">
+                              <a:lumMod val="75000"/>
+                              <a:lumOff val="25000"/>
+                            </a:schemeClr>
+                          </a:solidFill>
+                        </a:rPr>
+                        <a:t>对</a:t>
+                      </a:r>
+                      <a:r>
+                        <a:rPr lang="en-US" altLang="zh-CN" sz="1800" b="0" dirty="0">
+                          <a:solidFill>
+                            <a:schemeClr val="tx2">
+                              <a:lumMod val="75000"/>
+                              <a:lumOff val="25000"/>
+                            </a:schemeClr>
+                          </a:solidFill>
+                        </a:rPr>
+                        <a:t>DeepSeek-R1-Distill-7B</a:t>
+                      </a:r>
+                      <a:r>
+                        <a:rPr lang="zh-CN" altLang="en-US" sz="1800" b="0" dirty="0">
+                          <a:solidFill>
+                            <a:schemeClr val="tx2">
+                              <a:lumMod val="75000"/>
+                              <a:lumOff val="25000"/>
+                            </a:schemeClr>
+                          </a:solidFill>
+                        </a:rPr>
+                        <a:t>和</a:t>
+                      </a:r>
+                      <a:r>
+                        <a:rPr lang="en-US" altLang="zh-CN" sz="1800" b="0" dirty="0">
+                          <a:solidFill>
+                            <a:schemeClr val="tx2">
+                              <a:lumMod val="75000"/>
+                              <a:lumOff val="25000"/>
+                            </a:schemeClr>
+                          </a:solidFill>
+                        </a:rPr>
+                        <a:t>14B</a:t>
+                      </a:r>
+                      <a:r>
+                        <a:rPr lang="zh-CN" altLang="en-US" sz="1800" b="0" dirty="0">
+                          <a:solidFill>
+                            <a:schemeClr val="tx2">
+                              <a:lumMod val="75000"/>
+                              <a:lumOff val="25000"/>
+                            </a:schemeClr>
+                          </a:solidFill>
+                        </a:rPr>
+                        <a:t>模型进行</a:t>
+                      </a:r>
+                      <a:r>
+                        <a:rPr lang="en-US" altLang="zh-CN" sz="1800" b="0" dirty="0">
+                          <a:solidFill>
+                            <a:schemeClr val="tx2">
+                              <a:lumMod val="75000"/>
+                              <a:lumOff val="25000"/>
+                            </a:schemeClr>
+                          </a:solidFill>
+                        </a:rPr>
+                        <a:t>lora</a:t>
+                      </a:r>
+                      <a:r>
+                        <a:rPr lang="zh-CN" altLang="en-US" sz="1800" b="0" dirty="0">
+                          <a:solidFill>
+                            <a:schemeClr val="tx2">
+                              <a:lumMod val="75000"/>
+                              <a:lumOff val="25000"/>
+                            </a:schemeClr>
+                          </a:solidFill>
+                        </a:rPr>
+                        <a:t>微调，整体表现</a:t>
+                      </a:r>
+                      <a:r>
+                        <a:rPr lang="zh-CN" altLang="en-US" sz="1800" b="0" dirty="0">
+                          <a:solidFill>
+                            <a:schemeClr val="tx2">
+                              <a:lumMod val="75000"/>
+                              <a:lumOff val="25000"/>
+                            </a:schemeClr>
+                          </a:solidFill>
+                        </a:rPr>
+                        <a:t>不错</a:t>
                       </a:r>
                       <a:endParaRPr lang="zh-CN" altLang="en-US" sz="1800" b="0" dirty="0">
                         <a:solidFill>
@@ -4374,13 +5515,8 @@
                     </a:solidFill>
                   </a:tcPr>
                 </a:tc>
-                <a:extLst>
-                  <a:ext uri="{0D108BD9-81ED-4DB2-BD59-A6C34878D82A}">
-                    <a16:rowId xmlns:a16="http://schemas.microsoft.com/office/drawing/2014/main" val="10000"/>
-                  </a:ext>
-                </a:extLst>
               </a:tr>
-              <a:tr h="3197886">
+              <a:tr h="2402205">
                 <a:tc>
                   <a:txBody>
                     <a:bodyPr/>
@@ -4403,6 +5539,11 @@
                         </a:rPr>
                         <a:t>Todo</a:t>
                       </a:r>
+                      <a:endParaRPr lang="en-US" altLang="zh-CN" sz="1800" b="0" dirty="0">
+                        <a:solidFill>
+                          <a:schemeClr val="tx1"/>
+                        </a:solidFill>
+                      </a:endParaRPr>
                     </a:p>
                   </a:txBody>
                   <a:tcPr anchor="ctr">
@@ -4472,7 +5613,7 @@
                             <a:schemeClr val="tx1"/>
                           </a:solidFill>
                         </a:rPr>
-                        <a:t>相对于</a:t>
+                        <a:t>训练集从不同维度都做了一系列的设计和完善：</a:t>
                       </a:r>
                       <a:r>
                         <a:rPr lang="en-US" altLang="zh-CN" sz="1800" b="0" dirty="0">
@@ -4480,7 +5621,7 @@
                             <a:schemeClr val="tx1"/>
                           </a:solidFill>
                         </a:rPr>
-                        <a:t>codeIO</a:t>
+                        <a:t>ai</a:t>
                       </a:r>
                       <a:r>
                         <a:rPr lang="zh-CN" altLang="en-US" sz="1800" b="0" dirty="0">
@@ -4488,7 +5629,7 @@
                             <a:schemeClr val="tx1"/>
                           </a:solidFill>
                         </a:rPr>
-                        <a:t>有</a:t>
+                        <a:t>生成</a:t>
                       </a:r>
                       <a:r>
                         <a:rPr lang="en-US" altLang="zh-CN" sz="1800" b="0" dirty="0">
@@ -4496,7 +5637,7 @@
                             <a:schemeClr val="tx1"/>
                           </a:solidFill>
                         </a:rPr>
-                        <a:t>10G 350w</a:t>
+                        <a:t>vs</a:t>
                       </a:r>
                       <a:r>
                         <a:rPr lang="zh-CN" altLang="en-US" sz="1800" b="0" dirty="0">
@@ -4504,7 +5645,7 @@
                             <a:schemeClr val="tx1"/>
                           </a:solidFill>
                         </a:rPr>
-                        <a:t>条数据和</a:t>
+                        <a:t>剪枝模板</a:t>
                       </a:r>
                       <a:r>
                         <a:rPr lang="en-US" altLang="zh-CN" sz="1800" b="0" dirty="0">
@@ -4512,7 +5653,7 @@
                             <a:schemeClr val="tx1"/>
                           </a:solidFill>
                         </a:rPr>
-                        <a:t>Dongwon Jung</a:t>
+                        <a:t>vs</a:t>
                       </a:r>
                       <a:r>
                         <a:rPr lang="zh-CN" altLang="en-US" sz="1800" b="0" dirty="0">
@@ -4520,7 +5661,7 @@
                             <a:schemeClr val="tx1"/>
                           </a:solidFill>
                         </a:rPr>
-                        <a:t>有</a:t>
+                        <a:t>剪枝</a:t>
                       </a:r>
                       <a:r>
                         <a:rPr lang="en-US" altLang="zh-CN" sz="1800" b="0" dirty="0">
@@ -4528,7 +5669,7 @@
                             <a:schemeClr val="tx1"/>
                           </a:solidFill>
                         </a:rPr>
-                        <a:t>1w</a:t>
+                        <a:t>ai</a:t>
                       </a:r>
                       <a:r>
                         <a:rPr lang="zh-CN" altLang="en-US" sz="1800" b="0" dirty="0">
@@ -4536,69 +5677,111 @@
                             <a:schemeClr val="tx1"/>
                           </a:solidFill>
                         </a:rPr>
-                        <a:t>条数据，我们的数据量较少，可能需要抉择是否提量与提量到多少</a:t>
-                      </a:r>
-                    </a:p>
-                    <a:p>
-                      <a:pPr marL="457200" indent="-457200" algn="l">
-                        <a:lnSpc>
-                          <a:spcPct val="150000"/>
-                        </a:lnSpc>
-                        <a:buAutoNum type="arabicPeriod"/>
-                      </a:pPr>
-                      <a:r>
-                        <a:rPr lang="zh-CN" altLang="en-US" sz="1800" dirty="0">
-                          <a:sym typeface="+mn-ea"/>
-                        </a:rPr>
-                        <a:t>实验结果发现</a:t>
-                      </a:r>
-                      <a:r>
-                        <a:rPr lang="en-US" altLang="zh-CN" sz="1800" dirty="0">
-                          <a:sym typeface="+mn-ea"/>
-                        </a:rPr>
-                        <a:t>deepseek-llama</a:t>
-                      </a:r>
-                      <a:r>
-                        <a:rPr lang="zh-CN" altLang="en-US" sz="1800" dirty="0">
-                          <a:sym typeface="+mn-ea"/>
-                        </a:rPr>
-                        <a:t>的模型学</a:t>
-                      </a:r>
-                      <a:r>
-                        <a:rPr lang="en-US" altLang="zh-CN" sz="1800" dirty="0">
-                          <a:sym typeface="+mn-ea"/>
-                        </a:rPr>
-                        <a:t>simpleai</a:t>
-                      </a:r>
-                      <a:r>
-                        <a:rPr lang="zh-CN" altLang="en-US" sz="1800" dirty="0">
-                          <a:sym typeface="+mn-ea"/>
-                        </a:rPr>
-                        <a:t>提升最高；</a:t>
-                      </a:r>
-                      <a:r>
-                        <a:rPr lang="en-US" altLang="zh-CN" sz="1800" dirty="0">
-                          <a:sym typeface="+mn-ea"/>
-                        </a:rPr>
-                        <a:t>qwentrace</a:t>
-                      </a:r>
-                      <a:r>
-                        <a:rPr lang="zh-CN" altLang="en-US" sz="1800" dirty="0">
-                          <a:sym typeface="+mn-ea"/>
-                        </a:rPr>
-                        <a:t>和剪枝类型的数据集提升比</a:t>
-                      </a:r>
-                      <a:r>
-                        <a:rPr lang="en-US" altLang="zh-CN" sz="1800" dirty="0">
-                          <a:sym typeface="+mn-ea"/>
-                        </a:rPr>
-                        <a:t>simpleai</a:t>
-                      </a:r>
-                      <a:r>
-                        <a:rPr lang="zh-CN" altLang="en-US" sz="1800" dirty="0">
-                          <a:sym typeface="+mn-ea"/>
-                        </a:rPr>
-                        <a:t>高</a:t>
+                        <a:t>生成；不同</a:t>
+                      </a:r>
+                      <a:r>
+                        <a:rPr lang="en-US" altLang="zh-CN" sz="1800" b="0" dirty="0">
+                          <a:solidFill>
+                            <a:schemeClr val="tx1"/>
+                          </a:solidFill>
+                        </a:rPr>
+                        <a:t>ai</a:t>
+                      </a:r>
+                      <a:r>
+                        <a:rPr lang="zh-CN" altLang="en-US" sz="1800" b="0" dirty="0">
+                          <a:solidFill>
+                            <a:schemeClr val="tx1"/>
+                          </a:solidFill>
+                        </a:rPr>
+                        <a:t>生成的</a:t>
+                      </a:r>
+                      <a:r>
+                        <a:rPr lang="en-US" altLang="zh-CN" sz="1800" b="0" dirty="0">
+                          <a:solidFill>
+                            <a:schemeClr val="tx1"/>
+                          </a:solidFill>
+                        </a:rPr>
+                        <a:t>code</a:t>
+                      </a:r>
+                      <a:r>
+                        <a:rPr lang="zh-CN" altLang="en-US" sz="1800" b="0" dirty="0">
+                          <a:solidFill>
+                            <a:schemeClr val="tx1"/>
+                          </a:solidFill>
+                        </a:rPr>
+                        <a:t>和</a:t>
+                      </a:r>
+                      <a:r>
+                        <a:rPr lang="en-US" altLang="zh-CN" sz="1800" b="0" dirty="0">
+                          <a:solidFill>
+                            <a:schemeClr val="tx1"/>
+                          </a:solidFill>
+                        </a:rPr>
+                        <a:t>cot</a:t>
+                      </a:r>
+                      <a:r>
+                        <a:rPr lang="zh-CN" altLang="en-US" sz="1800" b="0" dirty="0">
+                          <a:solidFill>
+                            <a:schemeClr val="tx1"/>
+                          </a:solidFill>
+                        </a:rPr>
+                        <a:t>；非推理类数据集</a:t>
+                      </a:r>
+                      <a:r>
+                        <a:rPr lang="en-US" altLang="zh-CN" sz="1800" b="0" dirty="0">
+                          <a:solidFill>
+                            <a:schemeClr val="tx1"/>
+                          </a:solidFill>
+                        </a:rPr>
+                        <a:t>vs</a:t>
+                      </a:r>
+                      <a:r>
+                        <a:rPr lang="zh-CN" altLang="en-US" sz="1800" b="0" dirty="0">
+                          <a:solidFill>
+                            <a:schemeClr val="tx1"/>
+                          </a:solidFill>
+                        </a:rPr>
+                        <a:t>推理类有</a:t>
+                      </a:r>
+                      <a:r>
+                        <a:rPr lang="en-US" altLang="zh-CN" sz="1800" b="0" dirty="0">
+                          <a:solidFill>
+                            <a:schemeClr val="tx1"/>
+                          </a:solidFill>
+                        </a:rPr>
+                        <a:t>think</a:t>
+                      </a:r>
+                      <a:r>
+                        <a:rPr lang="zh-CN" altLang="en-US" sz="1800" b="0" dirty="0">
+                          <a:solidFill>
+                            <a:schemeClr val="tx1"/>
+                          </a:solidFill>
+                        </a:rPr>
+                        <a:t>标签数据集；普通规模训练集</a:t>
+                      </a:r>
+                      <a:r>
+                        <a:rPr lang="en-US" altLang="zh-CN" sz="1800" b="0" dirty="0">
+                          <a:solidFill>
+                            <a:schemeClr val="tx1"/>
+                          </a:solidFill>
+                        </a:rPr>
+                        <a:t>vs</a:t>
+                      </a:r>
+                      <a:r>
+                        <a:rPr lang="zh-CN" altLang="en-US" sz="1800" b="0" dirty="0">
+                          <a:solidFill>
+                            <a:schemeClr val="tx1"/>
+                          </a:solidFill>
+                        </a:rPr>
+                        <a:t>超大规模</a:t>
+                      </a:r>
+                      <a:r>
+                        <a:rPr lang="zh-CN" altLang="en-US" sz="1800" b="0" dirty="0">
+                          <a:solidFill>
+                            <a:schemeClr val="tx1"/>
+                          </a:solidFill>
+                        </a:rPr>
+                        <a:t>训练集</a:t>
                       </a:r>
                       <a:endParaRPr lang="zh-CN" altLang="en-US" sz="1800" b="0" dirty="0">
                         <a:solidFill>
@@ -4619,8 +5802,66 @@
                             <a:schemeClr val="tx1"/>
                           </a:solidFill>
                         </a:rPr>
-                        <a:t>后续考虑选一个好的方案去对比其他数据集</a:t>
-                      </a:r>
+                        <a:t>上周布置的几个大实验正在跑和评估，还差全参</a:t>
+                      </a:r>
+                      <a:r>
+                        <a:rPr lang="zh-CN" altLang="en-US" sz="1800" b="0" dirty="0">
+                          <a:solidFill>
+                            <a:schemeClr val="tx1"/>
+                          </a:solidFill>
+                        </a:rPr>
+                        <a:t>微调，稳步推进</a:t>
+                      </a:r>
+                      <a:r>
+                        <a:rPr lang="zh-CN" altLang="en-US" sz="1800" b="0" dirty="0">
+                          <a:solidFill>
+                            <a:schemeClr val="tx1"/>
+                          </a:solidFill>
+                        </a:rPr>
+                        <a:t>中</a:t>
+                      </a:r>
+                      <a:endParaRPr lang="zh-CN" altLang="en-US" sz="1800" b="0" dirty="0">
+                        <a:solidFill>
+                          <a:schemeClr val="tx1"/>
+                        </a:solidFill>
+                      </a:endParaRPr>
+                    </a:p>
+                    <a:p>
+                      <a:pPr marL="457200" indent="-457200" algn="l">
+                        <a:lnSpc>
+                          <a:spcPct val="150000"/>
+                        </a:lnSpc>
+                        <a:buAutoNum type="arabicPeriod"/>
+                      </a:pPr>
+                      <a:r>
+                        <a:rPr lang="zh-CN" altLang="en-US" sz="1800" b="0" dirty="0">
+                          <a:solidFill>
+                            <a:schemeClr val="tx1"/>
+                          </a:solidFill>
+                        </a:rPr>
+                        <a:t>认为实验结果也与调参有非常大的关系，对于普通情况的实验结果可能并不是哪里的逻辑错了，而是没调到合适的参数。</a:t>
+                      </a:r>
+                      <a:r>
+                        <a:rPr lang="zh-CN" altLang="en-US" sz="1800" b="1" dirty="0">
+                          <a:solidFill>
+                            <a:schemeClr val="tx1"/>
+                          </a:solidFill>
+                        </a:rPr>
+                        <a:t>认为后续可以确定实验模型</a:t>
+                      </a:r>
+                      <a:r>
+                        <a:rPr lang="zh-CN" altLang="en-US" sz="1800" b="1" dirty="0">
+                          <a:solidFill>
+                            <a:schemeClr val="tx1"/>
+                          </a:solidFill>
+                        </a:rPr>
+                        <a:t>且深耕几个实验进行多次调参</a:t>
+                      </a:r>
+                      <a:endParaRPr lang="zh-CN" altLang="en-US" sz="1800" b="1" dirty="0">
+                        <a:solidFill>
+                          <a:schemeClr val="tx1"/>
+                        </a:solidFill>
+                      </a:endParaRPr>
                     </a:p>
                   </a:txBody>
                   <a:tcPr anchor="ctr">
@@ -4673,13 +5914,8 @@
                     </a:solidFill>
                   </a:tcPr>
                 </a:tc>
-                <a:extLst>
-                  <a:ext uri="{0D108BD9-81ED-4DB2-BD59-A6C34878D82A}">
-                    <a16:rowId xmlns:a16="http://schemas.microsoft.com/office/drawing/2014/main" val="10001"/>
-                  </a:ext>
-                </a:extLst>
               </a:tr>
-              <a:tr h="1238399">
+              <a:tr h="1102360">
                 <a:tc>
                   <a:txBody>
                     <a:bodyPr/>
@@ -4696,6 +5932,11 @@
                         </a:rPr>
                         <a:t>评价</a:t>
                       </a:r>
+                      <a:endParaRPr lang="zh-CN" altLang="en-US" sz="1800" b="0" dirty="0">
+                        <a:solidFill>
+                          <a:schemeClr val="tx1"/>
+                        </a:solidFill>
+                      </a:endParaRPr>
                     </a:p>
                   </a:txBody>
                   <a:tcPr anchor="ctr">
@@ -4824,11 +6065,6 @@
                     </a:solidFill>
                   </a:tcPr>
                 </a:tc>
-                <a:extLst>
-                  <a:ext uri="{0D108BD9-81ED-4DB2-BD59-A6C34878D82A}">
-                    <a16:rowId xmlns:a16="http://schemas.microsoft.com/office/drawing/2014/main" val="10002"/>
-                  </a:ext>
-                </a:extLst>
               </a:tr>
             </a:tbl>
           </a:graphicData>
@@ -4842,7 +6078,7 @@
 </p:sld>
 </file>
 
-<file path=ppt/slides/slide3.xml><?xml version="1.0" encoding="utf-8"?>
+<file path=ppt/slides/slide4.xml><?xml version="1.0" encoding="utf-8"?>
 <p:sld xmlns:a="http://schemas.openxmlformats.org/drawingml/2006/main" xmlns:r="http://schemas.openxmlformats.org/officeDocument/2006/relationships" xmlns:p="http://schemas.openxmlformats.org/presentationml/2006/main">
   <p:cSld>
     <p:spTree>
@@ -4888,7 +6124,16 @@
                   <a:schemeClr val="tx1"/>
                 </a:solidFill>
               </a:rPr>
-              <a:t>进展一：</a:t>
+              <a:t>进展二：</a:t>
+            </a:r>
+            <a:r>
+              <a:rPr lang="en-US" sz="2400" dirty="0">
+                <a:solidFill>
+                  <a:schemeClr val="tx1"/>
+                </a:solidFill>
+                <a:sym typeface="+mn-ea"/>
+              </a:rPr>
+              <a:t>Claude</a:t>
             </a:r>
             <a:r>
               <a:rPr lang="zh-CN" altLang="en-US" sz="2400" dirty="0">
@@ -4897,17 +6142,23 @@
                 </a:solidFill>
                 <a:sym typeface="+mn-ea"/>
               </a:rPr>
-              <a:t>根据需求新增了新的一类的</a:t>
-            </a:r>
-            <a:r>
-              <a:rPr lang="en-US" altLang="zh-CN" sz="2400" dirty="0">
+              <a:t>数据集</a:t>
+            </a:r>
+            <a:r>
+              <a:rPr lang="zh-CN" altLang="en-US" sz="2400" dirty="0">
                 <a:solidFill>
                   <a:schemeClr val="tx1"/>
                 </a:solidFill>
                 <a:sym typeface="+mn-ea"/>
               </a:rPr>
-              <a:t>COT“before_reduced_natural_cot”</a:t>
-            </a:r>
+              <a:t>生产</a:t>
+            </a:r>
+            <a:endParaRPr lang="zh-CN" altLang="en-US" sz="2400" dirty="0">
+              <a:solidFill>
+                <a:schemeClr val="tx1"/>
+              </a:solidFill>
+              <a:sym typeface="+mn-ea"/>
+            </a:endParaRPr>
           </a:p>
         </p:txBody>
       </p:sp>
@@ -4919,8 +6170,8 @@
         </p:nvSpPr>
         <p:spPr>
           <a:xfrm>
-            <a:off x="179705" y="1219835"/>
-            <a:ext cx="12228195" cy="3646170"/>
+            <a:off x="344805" y="1140460"/>
+            <a:ext cx="11587480" cy="2122805"/>
           </a:xfrm>
           <a:prstGeom prst="rect">
             <a:avLst/>
@@ -4940,8 +6191,33 @@
             </a:pPr>
             <a:r>
               <a:rPr lang="zh-CN" altLang="en-US" sz="2200"/>
-              <a:t>背景：</a:t>
-            </a:r>
+              <a:t>背景：评估后认为效果不好的可能原因是训练集代码质量一般。猜测</a:t>
+            </a:r>
+            <a:r>
+              <a:rPr lang="en-US" altLang="zh-CN" sz="2200"/>
+              <a:t>claude</a:t>
+            </a:r>
+            <a:r>
+              <a:rPr lang="zh-CN" altLang="en-US" sz="2200"/>
+              <a:t>生产的</a:t>
+            </a:r>
+            <a:r>
+              <a:rPr lang="en-US" altLang="zh-CN" sz="2200"/>
+              <a:t>code</a:t>
+            </a:r>
+            <a:r>
+              <a:rPr lang="zh-CN" altLang="en-US" sz="2200"/>
+              <a:t>数据和</a:t>
+            </a:r>
+            <a:r>
+              <a:rPr lang="en-US" altLang="zh-CN" sz="2200"/>
+              <a:t>cot</a:t>
+            </a:r>
+            <a:r>
+              <a:rPr lang="zh-CN" altLang="en-US" sz="2200"/>
+              <a:t>数据会更好。尝试生产一批同规模做对比试验。</a:t>
+            </a:r>
+            <a:endParaRPr lang="zh-CN" altLang="en-US" sz="2200"/>
           </a:p>
           <a:p>
             <a:pPr>
@@ -4949,33 +6225,7 @@
                 <a:spcPct val="150000"/>
               </a:lnSpc>
             </a:pPr>
-            <a:r>
-              <a:rPr lang="zh-CN" altLang="en-US" sz="2200"/>
-              <a:t>之前提到的一篇</a:t>
-            </a:r>
-            <a:r>
-              <a:rPr lang="en-US" altLang="zh-CN" sz="2200"/>
-              <a:t> </a:t>
-            </a:r>
-            <a:r>
-              <a:rPr lang="en-US" altLang="zh-CN" sz="2200">
-                <a:solidFill>
-                  <a:srgbClr val="000000"/>
-                </a:solidFill>
-                <a:latin typeface="Lucida Grande"/>
-                <a:ea typeface="Lucida Grande"/>
-                <a:sym typeface="+mn-ea"/>
-              </a:rPr>
-              <a:t>EMNLP 2025 </a:t>
-            </a:r>
-            <a:r>
-              <a:rPr lang="zh-CN" altLang="en-US" sz="2200"/>
-              <a:t>文章</a:t>
-            </a:r>
-            <a:r>
-              <a:rPr lang="en-US" altLang="zh-CN" sz="2200"/>
-              <a:t>“Code Execution as Grounded Supervision for LLM Reasoning”</a:t>
-            </a:r>
+            <a:endParaRPr lang="zh-CN" altLang="en-US" sz="2200"/>
           </a:p>
           <a:p>
             <a:pPr>
@@ -4983,96 +6233,23 @@
                 <a:spcPct val="150000"/>
               </a:lnSpc>
             </a:pPr>
-            <a:endParaRPr lang="en-US" altLang="zh-CN" sz="2200"/>
-          </a:p>
-          <a:p>
-            <a:pPr>
-              <a:lnSpc>
-                <a:spcPct val="150000"/>
-              </a:lnSpc>
-            </a:pPr>
             <a:r>
               <a:rPr lang="zh-CN" altLang="en-US" sz="2200"/>
-              <a:t>它的数据集方案是：</a:t>
+              <a:t>进展：已经全部生产完成，后续进行</a:t>
             </a:r>
             <a:r>
               <a:rPr lang="en-US" altLang="zh-CN" sz="2200"/>
-              <a:t>code trace+AI</a:t>
+              <a:t>10^3</a:t>
             </a:r>
             <a:r>
               <a:rPr lang="zh-CN" altLang="en-US" sz="2200"/>
-              <a:t>生产</a:t>
-            </a:r>
-            <a:r>
-              <a:rPr lang="en-US" altLang="zh-CN" sz="2200"/>
-              <a:t>cot</a:t>
-            </a:r>
-          </a:p>
-          <a:p>
-            <a:pPr>
-              <a:lnSpc>
-                <a:spcPct val="150000"/>
-              </a:lnSpc>
-            </a:pPr>
+              <a:t>数据量的评估</a:t>
+            </a:r>
             <a:r>
               <a:rPr lang="zh-CN" altLang="en-US" sz="2200"/>
-              <a:t>我们相较的区别是：</a:t>
-            </a:r>
-            <a:r>
-              <a:rPr lang="en-US" altLang="zh-CN" sz="2200"/>
-              <a:t>code trace -&gt; </a:t>
-            </a:r>
-            <a:r>
-              <a:rPr lang="zh-CN" altLang="en-US" sz="2200"/>
-              <a:t>剪枝</a:t>
-            </a:r>
-            <a:r>
-              <a:rPr lang="en-US" altLang="zh-CN" sz="2200"/>
-              <a:t> -&gt; format/AI</a:t>
-            </a:r>
-            <a:r>
-              <a:rPr lang="zh-CN" altLang="en-US" sz="2200"/>
-              <a:t>生产</a:t>
-            </a:r>
-            <a:r>
-              <a:rPr lang="en-US" altLang="zh-CN" sz="2200"/>
-              <a:t>cot</a:t>
-            </a:r>
-          </a:p>
-          <a:p>
-            <a:pPr>
-              <a:lnSpc>
-                <a:spcPct val="150000"/>
-              </a:lnSpc>
-            </a:pPr>
-            <a:endParaRPr lang="en-US" altLang="zh-CN" sz="2200"/>
-          </a:p>
-          <a:p>
-            <a:pPr>
-              <a:lnSpc>
-                <a:spcPct val="150000"/>
-              </a:lnSpc>
-            </a:pPr>
-            <a:r>
-              <a:rPr lang="zh-CN" altLang="en-US" sz="2200"/>
-              <a:t>认为需要补充消融实验，即直接那我们数据集的</a:t>
-            </a:r>
-            <a:r>
-              <a:rPr lang="en-US" altLang="zh-CN" sz="2200"/>
-              <a:t>code trace </a:t>
-            </a:r>
-            <a:r>
-              <a:rPr lang="zh-CN" altLang="en-US" sz="2200"/>
-              <a:t>生产</a:t>
-            </a:r>
-            <a:r>
-              <a:rPr lang="en-US" altLang="zh-CN" sz="2200"/>
-              <a:t>ai cot</a:t>
-            </a:r>
-            <a:r>
-              <a:rPr lang="zh-CN" altLang="en-US" sz="2200"/>
-              <a:t>。对比看剪枝有无提升</a:t>
-            </a:r>
+              <a:t>对比</a:t>
+            </a:r>
+            <a:endParaRPr lang="zh-CN" altLang="en-US" sz="2200"/>
           </a:p>
         </p:txBody>
       </p:sp>
@@ -5084,7 +6261,7 @@
         </p:nvSpPr>
         <p:spPr>
           <a:xfrm>
-            <a:off x="729615" y="5388610"/>
+            <a:off x="344805" y="4262755"/>
             <a:ext cx="2300605" cy="1033780"/>
           </a:xfrm>
           <a:prstGeom prst="rightArrow">
@@ -5130,8 +6307,8 @@
         </p:nvSpPr>
         <p:spPr>
           <a:xfrm>
-            <a:off x="3355975" y="5674995"/>
-            <a:ext cx="4154170" cy="460375"/>
+            <a:off x="3062605" y="3597275"/>
+            <a:ext cx="6943090" cy="460375"/>
           </a:xfrm>
           <a:prstGeom prst="rect">
             <a:avLst/>
@@ -5154,8 +6331,131 @@
               <a:rPr lang="en-US" altLang="zh-CN" sz="2400" dirty="0">
                 <a:sym typeface="+mn-ea"/>
               </a:rPr>
-              <a:t>before_reduced_natural_cot</a:t>
-            </a:r>
+              <a:t>TreecEva_data_claude_simple_ai_cot</a:t>
+            </a:r>
+            <a:endParaRPr lang="en-US" altLang="zh-CN" sz="2400" dirty="0">
+              <a:sym typeface="+mn-ea"/>
+            </a:endParaRPr>
+          </a:p>
+        </p:txBody>
+      </p:sp>
+      <p:sp>
+        <p:nvSpPr>
+          <p:cNvPr id="3" name="文本框 2"/>
+          <p:cNvSpPr txBox="1"/>
+          <p:nvPr/>
+        </p:nvSpPr>
+        <p:spPr>
+          <a:xfrm>
+            <a:off x="3062605" y="4262755"/>
+            <a:ext cx="6943090" cy="460375"/>
+          </a:xfrm>
+          <a:prstGeom prst="rect">
+            <a:avLst/>
+          </a:prstGeom>
+          <a:noFill/>
+          <a:ln>
+            <a:solidFill>
+              <a:schemeClr val="accent1"/>
+            </a:solidFill>
+          </a:ln>
+        </p:spPr>
+        <p:txBody>
+          <a:bodyPr wrap="square" rtlCol="0" anchor="t">
+            <a:spAutoFit/>
+          </a:bodyPr>
+          <a:lstStyle/>
+          <a:p>
+            <a:pPr algn="ctr"/>
+            <a:r>
+              <a:rPr lang="en-US" altLang="zh-CN" sz="2400" dirty="0">
+                <a:sym typeface="+mn-ea"/>
+              </a:rPr>
+              <a:t>TreecEva_data_claude_reduced_formated_cot</a:t>
+            </a:r>
+            <a:endParaRPr lang="en-US" altLang="zh-CN" sz="2400" dirty="0">
+              <a:sym typeface="+mn-ea"/>
+            </a:endParaRPr>
+          </a:p>
+        </p:txBody>
+      </p:sp>
+      <p:sp>
+        <p:nvSpPr>
+          <p:cNvPr id="5" name="文本框 4"/>
+          <p:cNvSpPr txBox="1"/>
+          <p:nvPr/>
+        </p:nvSpPr>
+        <p:spPr>
+          <a:xfrm>
+            <a:off x="3062605" y="4928235"/>
+            <a:ext cx="6943090" cy="460375"/>
+          </a:xfrm>
+          <a:prstGeom prst="rect">
+            <a:avLst/>
+          </a:prstGeom>
+          <a:noFill/>
+          <a:ln>
+            <a:solidFill>
+              <a:schemeClr val="accent1"/>
+            </a:solidFill>
+          </a:ln>
+        </p:spPr>
+        <p:txBody>
+          <a:bodyPr wrap="square" rtlCol="0" anchor="t">
+            <a:spAutoFit/>
+          </a:bodyPr>
+          <a:lstStyle/>
+          <a:p>
+            <a:pPr algn="ctr"/>
+            <a:r>
+              <a:rPr lang="en-US" altLang="zh-CN" sz="2400" dirty="0">
+                <a:sym typeface="+mn-ea"/>
+              </a:rPr>
+              <a:t>TreecEva_data_claude_reduced_natural_cot</a:t>
+            </a:r>
+            <a:endParaRPr lang="en-US" altLang="zh-CN" sz="2400" dirty="0">
+              <a:sym typeface="+mn-ea"/>
+            </a:endParaRPr>
+          </a:p>
+        </p:txBody>
+      </p:sp>
+      <p:sp>
+        <p:nvSpPr>
+          <p:cNvPr id="7" name="文本框 6"/>
+          <p:cNvSpPr txBox="1"/>
+          <p:nvPr/>
+        </p:nvSpPr>
+        <p:spPr>
+          <a:xfrm>
+            <a:off x="3062605" y="5593715"/>
+            <a:ext cx="6943090" cy="460375"/>
+          </a:xfrm>
+          <a:prstGeom prst="rect">
+            <a:avLst/>
+          </a:prstGeom>
+          <a:noFill/>
+          <a:ln>
+            <a:solidFill>
+              <a:schemeClr val="accent1"/>
+            </a:solidFill>
+          </a:ln>
+        </p:spPr>
+        <p:txBody>
+          <a:bodyPr wrap="square" rtlCol="0" anchor="t">
+            <a:spAutoFit/>
+          </a:bodyPr>
+          <a:lstStyle/>
+          <a:p>
+            <a:pPr algn="ctr"/>
+            <a:r>
+              <a:rPr lang="en-US" altLang="zh-CN" sz="2400">
+                <a:sym typeface="+mn-ea"/>
+              </a:rPr>
+              <a:t>TreecEva_data_claude_before_reduced_natural_cot</a:t>
+            </a:r>
+            <a:endParaRPr lang="en-US" altLang="zh-CN" sz="2400" dirty="0">
+              <a:sym typeface="+mn-ea"/>
+            </a:endParaRPr>
           </a:p>
         </p:txBody>
       </p:sp>
@@ -5167,7 +6467,7 @@
 </p:sld>
 </file>
 
-<file path=ppt/slides/slide4.xml><?xml version="1.0" encoding="utf-8"?>
+<file path=ppt/slides/slide5.xml><?xml version="1.0" encoding="utf-8"?>
 <p:sld xmlns:a="http://schemas.openxmlformats.org/drawingml/2006/main" xmlns:r="http://schemas.openxmlformats.org/officeDocument/2006/relationships" xmlns:p="http://schemas.openxmlformats.org/presentationml/2006/main">
   <p:cSld>
     <p:spTree>
@@ -5216,22 +6516,22 @@
               <a:t>进展二：</a:t>
             </a:r>
             <a:r>
+              <a:rPr lang="en-US" sz="2400" dirty="0">
+                <a:solidFill>
+                  <a:schemeClr val="tx1"/>
+                </a:solidFill>
+                <a:sym typeface="+mn-ea"/>
+              </a:rPr>
+              <a:t>think</a:t>
+            </a:r>
+            <a:r>
               <a:rPr lang="zh-CN" altLang="en-US" sz="2400" dirty="0">
                 <a:solidFill>
                   <a:schemeClr val="tx1"/>
                 </a:solidFill>
                 <a:sym typeface="+mn-ea"/>
               </a:rPr>
-              <a:t>尝试生产一批同规模的</a:t>
-            </a:r>
-            <a:r>
-              <a:rPr lang="en-US" altLang="zh-CN" sz="2400" dirty="0">
-                <a:solidFill>
-                  <a:schemeClr val="tx1"/>
-                </a:solidFill>
-                <a:sym typeface="+mn-ea"/>
-              </a:rPr>
-              <a:t>claude</a:t>
+              <a:t>标签数据集</a:t>
             </a:r>
             <a:r>
               <a:rPr lang="zh-CN" altLang="en-US" sz="2400" dirty="0">
@@ -5240,8 +6540,14 @@
                 </a:solidFill>
                 <a:sym typeface="+mn-ea"/>
               </a:rPr>
-              <a:t>生产数据集，待评估</a:t>
-            </a:r>
+              <a:t>生产</a:t>
+            </a:r>
+            <a:endParaRPr lang="zh-CN" altLang="en-US" sz="2400" dirty="0">
+              <a:solidFill>
+                <a:schemeClr val="tx1"/>
+              </a:solidFill>
+              <a:sym typeface="+mn-ea"/>
+            </a:endParaRPr>
           </a:p>
         </p:txBody>
       </p:sp>
@@ -5253,8 +6559,8 @@
         </p:nvSpPr>
         <p:spPr>
           <a:xfrm>
-            <a:off x="344805" y="1140460"/>
-            <a:ext cx="11587480" cy="3646170"/>
+            <a:off x="344805" y="1233170"/>
+            <a:ext cx="11587480" cy="2630170"/>
           </a:xfrm>
           <a:prstGeom prst="rect">
             <a:avLst/>
@@ -5274,32 +6580,21 @@
             </a:pPr>
             <a:r>
               <a:rPr lang="zh-CN" altLang="en-US" sz="2200"/>
-              <a:t>背景：评估后认为效果不好的可能原因是训练集代码质量一般。猜测</a:t>
+              <a:t>背景：认为之前的问答对设计不太合理，希望产生一批针对于推理模型带</a:t>
             </a:r>
             <a:r>
               <a:rPr lang="en-US" altLang="zh-CN" sz="2200"/>
-              <a:t>claude</a:t>
+              <a:t>think</a:t>
             </a:r>
             <a:r>
               <a:rPr lang="zh-CN" altLang="en-US" sz="2200"/>
-              <a:t>生产的</a:t>
-            </a:r>
-            <a:r>
-              <a:rPr lang="en-US" altLang="zh-CN" sz="2200"/>
-              <a:t>code</a:t>
+              <a:t>的</a:t>
             </a:r>
             <a:r>
               <a:rPr lang="zh-CN" altLang="en-US" sz="2200"/>
-              <a:t>数据和</a:t>
-            </a:r>
-            <a:r>
-              <a:rPr lang="en-US" altLang="zh-CN" sz="2200"/>
-              <a:t>cot</a:t>
-            </a:r>
-            <a:r>
-              <a:rPr lang="zh-CN" altLang="en-US" sz="2200"/>
-              <a:t>数据会更好。尝试生产一批同规模做对比试验。</a:t>
-            </a:r>
+              <a:t>问答对。</a:t>
+            </a:r>
+            <a:endParaRPr lang="zh-CN" altLang="en-US" sz="2200"/>
           </a:p>
           <a:p>
             <a:pPr>
@@ -5307,6 +6602,106 @@
                 <a:spcPct val="150000"/>
               </a:lnSpc>
             </a:pPr>
+            <a:r>
+              <a:rPr lang="zh-CN" altLang="en-US" sz="2200"/>
+              <a:t>方法：做了三类【</a:t>
+            </a:r>
+            <a:r>
+              <a:rPr lang="en-US" altLang="zh-CN" sz="2200"/>
+              <a:t>reduced_fomated</a:t>
+            </a:r>
+            <a:r>
+              <a:rPr lang="zh-CN" altLang="en-US" sz="2200"/>
+              <a:t>做</a:t>
+            </a:r>
+            <a:r>
+              <a:rPr lang="en-US" altLang="zh-CN" sz="2200"/>
+              <a:t>think</a:t>
+            </a:r>
+            <a:r>
+              <a:rPr lang="zh-CN" altLang="en-US" sz="2200"/>
+              <a:t>，</a:t>
+            </a:r>
+            <a:r>
+              <a:rPr lang="en-US" altLang="zh-CN" sz="2200"/>
+              <a:t>reduced_natural</a:t>
+            </a:r>
+            <a:r>
+              <a:rPr lang="zh-CN" altLang="en-US" sz="2200"/>
+              <a:t>做</a:t>
+            </a:r>
+            <a:r>
+              <a:rPr lang="en-US" altLang="zh-CN" sz="2200"/>
+              <a:t>response</a:t>
+            </a:r>
+            <a:r>
+              <a:rPr lang="zh-CN" altLang="en-US" sz="2200"/>
+              <a:t>】、【</a:t>
+            </a:r>
+            <a:r>
+              <a:rPr lang="en-US" altLang="zh-CN" sz="2200"/>
+              <a:t>reduced_formated</a:t>
+            </a:r>
+            <a:r>
+              <a:rPr lang="zh-CN" altLang="en-US" sz="2200"/>
+              <a:t>做</a:t>
+            </a:r>
+            <a:r>
+              <a:rPr lang="en-US" altLang="zh-CN" sz="2200"/>
+              <a:t>think</a:t>
+            </a:r>
+            <a:r>
+              <a:rPr lang="zh-CN" altLang="en-US" sz="2200"/>
+              <a:t>，</a:t>
+            </a:r>
+            <a:r>
+              <a:rPr lang="en-US" altLang="zh-CN" sz="2200"/>
+              <a:t>ai</a:t>
+            </a:r>
+            <a:r>
+              <a:rPr lang="zh-CN" altLang="en-US" sz="2200"/>
+              <a:t>依据此做</a:t>
+            </a:r>
+            <a:r>
+              <a:rPr lang="en-US" altLang="zh-CN" sz="2200"/>
+              <a:t>response</a:t>
+            </a:r>
+            <a:r>
+              <a:rPr lang="zh-CN" altLang="en-US" sz="2200"/>
+              <a:t>】、【</a:t>
+            </a:r>
+            <a:r>
+              <a:rPr lang="en-US" altLang="zh-CN" sz="2200"/>
+              <a:t>reduced_natural</a:t>
+            </a:r>
+            <a:r>
+              <a:rPr lang="zh-CN" altLang="en-US" sz="2200"/>
+              <a:t>做</a:t>
+            </a:r>
+            <a:r>
+              <a:rPr lang="en-US" altLang="zh-CN" sz="2200"/>
+              <a:t>think</a:t>
+            </a:r>
+            <a:r>
+              <a:rPr lang="zh-CN" altLang="en-US" sz="2200"/>
+              <a:t>，</a:t>
+            </a:r>
+            <a:r>
+              <a:rPr lang="en-US" altLang="zh-CN" sz="2200"/>
+              <a:t>ai</a:t>
+            </a:r>
+            <a:r>
+              <a:rPr lang="zh-CN" altLang="en-US" sz="2200"/>
+              <a:t>依据此做</a:t>
+            </a:r>
+            <a:r>
+              <a:rPr lang="en-US" altLang="zh-CN" sz="2200"/>
+              <a:t>response</a:t>
+            </a:r>
+            <a:r>
+              <a:rPr lang="zh-CN" altLang="en-US" sz="2200"/>
+              <a:t>】</a:t>
+            </a:r>
             <a:endParaRPr lang="zh-CN" altLang="en-US" sz="2200"/>
           </a:p>
           <a:p>
@@ -5317,122 +6712,17 @@
             </a:pPr>
             <a:r>
               <a:rPr lang="zh-CN" altLang="en-US" sz="2200"/>
-              <a:t>进展：已经生产完两类数据，剩余预期周五完成</a:t>
-            </a:r>
-          </a:p>
-          <a:p>
-            <a:pPr>
-              <a:lnSpc>
-                <a:spcPct val="150000"/>
-              </a:lnSpc>
-            </a:pPr>
-            <a:endParaRPr lang="zh-CN" altLang="en-US" sz="2200"/>
-          </a:p>
-          <a:p>
-            <a:pPr>
-              <a:lnSpc>
-                <a:spcPct val="150000"/>
-              </a:lnSpc>
-            </a:pPr>
-            <a:r>
-              <a:rPr lang="en-US" altLang="zh-CN" sz="2200"/>
-              <a:t>insight</a:t>
-            </a:r>
-            <a:r>
-              <a:rPr lang="zh-CN" altLang="en-US" sz="2200"/>
-              <a:t>：价格上</a:t>
-            </a:r>
-            <a:r>
-              <a:rPr lang="en-US" altLang="zh-CN" sz="2200"/>
-              <a:t> claude3.7 </a:t>
-            </a:r>
-            <a:r>
-              <a:rPr lang="zh-CN" altLang="en-US" sz="2200"/>
-              <a:t>一条数据大概</a:t>
-            </a:r>
-            <a:r>
-              <a:rPr lang="en-US" altLang="zh-CN" sz="2200"/>
-              <a:t> </a:t>
-            </a:r>
-            <a:r>
-              <a:rPr lang="zh-CN" altLang="en-US" sz="2200"/>
-              <a:t>【生产】</a:t>
-            </a:r>
-            <a:r>
-              <a:rPr lang="en-US" altLang="zh-CN" sz="2200"/>
-              <a:t>0.15</a:t>
-            </a:r>
-            <a:r>
-              <a:rPr lang="zh-CN" altLang="en-US" sz="2200"/>
-              <a:t>元【</a:t>
-            </a:r>
-            <a:r>
-              <a:rPr lang="en-US" altLang="zh-CN" sz="2200"/>
-              <a:t>cot</a:t>
-            </a:r>
-            <a:r>
-              <a:rPr lang="zh-CN" altLang="en-US" sz="2200"/>
-              <a:t>】</a:t>
-            </a:r>
-            <a:r>
-              <a:rPr lang="en-US" altLang="zh-CN" sz="2200"/>
-              <a:t>0.19</a:t>
-            </a:r>
-            <a:r>
-              <a:rPr lang="zh-CN" altLang="en-US" sz="2200"/>
-              <a:t>元</a:t>
-            </a:r>
-          </a:p>
-          <a:p>
-            <a:pPr>
-              <a:lnSpc>
-                <a:spcPct val="150000"/>
-              </a:lnSpc>
-            </a:pPr>
-            <a:r>
-              <a:rPr lang="zh-CN" altLang="en-US" sz="2200"/>
-              <a:t>对比来看价格是</a:t>
-            </a:r>
-            <a:r>
-              <a:rPr lang="en-US" altLang="zh-CN" sz="2200"/>
-              <a:t> ds v3.2 </a:t>
-            </a:r>
-            <a:r>
-              <a:rPr lang="zh-CN" altLang="en-US" sz="2200"/>
-              <a:t>一条数据大概</a:t>
-            </a:r>
-            <a:r>
-              <a:rPr lang="en-US" altLang="zh-CN" sz="2200"/>
-              <a:t> </a:t>
-            </a:r>
-            <a:r>
-              <a:rPr lang="zh-CN" altLang="en-US" sz="2200"/>
-              <a:t>【生产】</a:t>
-            </a:r>
-            <a:r>
-              <a:rPr lang="en-US" altLang="zh-CN" sz="2200"/>
-              <a:t>+ 3</a:t>
-            </a:r>
-            <a:r>
-              <a:rPr lang="zh-CN" altLang="en-US" sz="2200"/>
-              <a:t>个【</a:t>
-            </a:r>
-            <a:r>
-              <a:rPr lang="en-US" altLang="zh-CN" sz="2200"/>
-              <a:t>cot</a:t>
-            </a:r>
-            <a:r>
-              <a:rPr lang="zh-CN" altLang="en-US" sz="2200"/>
-              <a:t>】</a:t>
-            </a:r>
-            <a:r>
-              <a:rPr lang="en-US" altLang="zh-CN" sz="2200"/>
-              <a:t> 0.049</a:t>
-            </a:r>
-            <a:r>
-              <a:rPr lang="zh-CN" altLang="en-US" sz="2200"/>
-              <a:t>元</a:t>
-            </a:r>
+              <a:t>进展：已经全部生产完成</a:t>
+            </a:r>
+            <a:r>
+              <a:rPr lang="zh-CN" sz="2200"/>
+              <a:t>，投入实验</a:t>
+            </a:r>
+            <a:r>
+              <a:rPr lang="zh-CN" sz="2200"/>
+              <a:t>中</a:t>
+            </a:r>
+            <a:endParaRPr lang="zh-CN" sz="2200"/>
           </a:p>
         </p:txBody>
       </p:sp>
@@ -5444,8 +6734,8 @@
         </p:nvSpPr>
         <p:spPr>
           <a:xfrm>
-            <a:off x="729615" y="5388610"/>
-            <a:ext cx="2300605" cy="1033780"/>
+            <a:off x="344805" y="4651375"/>
+            <a:ext cx="1738630" cy="1033780"/>
           </a:xfrm>
           <a:prstGeom prst="rightArrow">
             <a:avLst/>
@@ -5484,14 +6774,14 @@
       </p:sp>
       <p:sp>
         <p:nvSpPr>
-          <p:cNvPr id="10" name="文本框 9"/>
+          <p:cNvPr id="3" name="文本框 2"/>
           <p:cNvSpPr txBox="1"/>
           <p:nvPr/>
         </p:nvSpPr>
         <p:spPr>
           <a:xfrm>
-            <a:off x="3355975" y="5296535"/>
-            <a:ext cx="6344920" cy="460375"/>
+            <a:off x="2286635" y="5664835"/>
+            <a:ext cx="9500870" cy="460375"/>
           </a:xfrm>
           <a:prstGeom prst="rect">
             <a:avLst/>
@@ -5514,21 +6804,24 @@
               <a:rPr lang="en-US" altLang="zh-CN" sz="2400" dirty="0">
                 <a:sym typeface="+mn-ea"/>
               </a:rPr>
-              <a:t>TreecEva_data_claude_simple_ai_cot</a:t>
-            </a:r>
-          </a:p>
-        </p:txBody>
-      </p:sp>
-      <p:sp>
-        <p:nvSpPr>
-          <p:cNvPr id="3" name="文本框 2"/>
+              <a:t>Think_deepseek_TreecEva_data_reduced_natural_aigenerate_cot</a:t>
+            </a:r>
+            <a:endParaRPr lang="en-US" altLang="zh-CN" sz="2400" dirty="0">
+              <a:sym typeface="+mn-ea"/>
+            </a:endParaRPr>
+          </a:p>
+        </p:txBody>
+      </p:sp>
+      <p:sp>
+        <p:nvSpPr>
+          <p:cNvPr id="5" name="文本框 4"/>
           <p:cNvSpPr txBox="1"/>
           <p:nvPr/>
         </p:nvSpPr>
         <p:spPr>
           <a:xfrm>
-            <a:off x="3355975" y="5962015"/>
-            <a:ext cx="6344920" cy="460375"/>
+            <a:off x="2286635" y="4333875"/>
+            <a:ext cx="9500870" cy="460375"/>
           </a:xfrm>
           <a:prstGeom prst="rect">
             <a:avLst/>
@@ -5551,787 +6844,54 @@
               <a:rPr lang="en-US" altLang="zh-CN" sz="2400" dirty="0">
                 <a:sym typeface="+mn-ea"/>
               </a:rPr>
-              <a:t>TreecEva_data_claude_reduced_formated_cot</a:t>
-            </a:r>
-          </a:p>
-        </p:txBody>
-      </p:sp>
-    </p:spTree>
-  </p:cSld>
-  <p:clrMapOvr>
-    <a:masterClrMapping/>
-  </p:clrMapOvr>
-</p:sld>
-</file>
-
-<file path=ppt/slides/slide5.xml><?xml version="1.0" encoding="utf-8"?>
-<p:sld xmlns:a="http://schemas.openxmlformats.org/drawingml/2006/main" xmlns:r="http://schemas.openxmlformats.org/officeDocument/2006/relationships" xmlns:p="http://schemas.openxmlformats.org/presentationml/2006/main">
-  <p:cSld>
-    <p:spTree>
-      <p:nvGrpSpPr>
-        <p:cNvPr id="1" name=""/>
-        <p:cNvGrpSpPr/>
-        <p:nvPr/>
-      </p:nvGrpSpPr>
-      <p:grpSpPr>
-        <a:xfrm>
-          <a:off x="0" y="0"/>
-          <a:ext cx="0" cy="0"/>
-          <a:chOff x="0" y="0"/>
-          <a:chExt cx="0" cy="0"/>
-        </a:xfrm>
-      </p:grpSpPr>
-      <p:sp>
-        <p:nvSpPr>
-          <p:cNvPr id="2" name="文本框 1"/>
+              <a:t>Think_deepseek_TreecEva_data_reduced_formated_natural_merge_cot</a:t>
+            </a:r>
+            <a:endParaRPr lang="en-US" altLang="zh-CN" sz="2400" dirty="0">
+              <a:sym typeface="+mn-ea"/>
+            </a:endParaRPr>
+          </a:p>
+        </p:txBody>
+      </p:sp>
+      <p:sp>
+        <p:nvSpPr>
+          <p:cNvPr id="7" name="文本框 6"/>
           <p:cNvSpPr txBox="1"/>
           <p:nvPr/>
         </p:nvSpPr>
         <p:spPr>
           <a:xfrm>
-            <a:off x="344805" y="302895"/>
-            <a:ext cx="10258425" cy="460375"/>
+            <a:off x="2286000" y="4999355"/>
+            <a:ext cx="9502140" cy="460375"/>
           </a:xfrm>
           <a:prstGeom prst="rect">
             <a:avLst/>
           </a:prstGeom>
           <a:noFill/>
+          <a:ln>
+            <a:solidFill>
+              <a:schemeClr val="accent1"/>
+            </a:solidFill>
+          </a:ln>
         </p:spPr>
         <p:txBody>
-          <a:bodyPr wrap="square" rtlCol="0">
+          <a:bodyPr wrap="square" rtlCol="0" anchor="t">
             <a:spAutoFit/>
           </a:bodyPr>
           <a:lstStyle/>
           <a:p>
-            <a:r>
-              <a:rPr lang="zh-CN" altLang="en-US" sz="2400" dirty="0"/>
-              <a:t>进展分享三：</a:t>
-            </a:r>
-            <a:r>
-              <a:rPr lang="zh-CN" altLang="en-US" sz="2400" dirty="0">
-                <a:sym typeface="+mn-ea"/>
-              </a:rPr>
-              <a:t>对三个模型在</a:t>
-            </a:r>
+            <a:pPr algn="ctr"/>
             <a:r>
               <a:rPr lang="en-US" altLang="zh-CN" sz="2400" dirty="0">
                 <a:sym typeface="+mn-ea"/>
               </a:rPr>
-              <a:t>4</a:t>
-            </a:r>
-            <a:r>
-              <a:rPr lang="zh-CN" altLang="en-US" sz="2400" dirty="0">
-                <a:sym typeface="+mn-ea"/>
-              </a:rPr>
-              <a:t>个数据集上进行训练。再进行评估</a:t>
-            </a:r>
-          </a:p>
-        </p:txBody>
-      </p:sp>
-      <p:sp>
-        <p:nvSpPr>
-          <p:cNvPr id="5" name="文本框 4"/>
-          <p:cNvSpPr txBox="1"/>
-          <p:nvPr/>
-        </p:nvSpPr>
-        <p:spPr>
-          <a:xfrm>
-            <a:off x="186690" y="862965"/>
-            <a:ext cx="11818620" cy="2630170"/>
-          </a:xfrm>
-          <a:prstGeom prst="rect">
-            <a:avLst/>
-          </a:prstGeom>
-          <a:noFill/>
-        </p:spPr>
-        <p:txBody>
-          <a:bodyPr wrap="square">
-            <a:spAutoFit/>
-          </a:bodyPr>
-          <a:lstStyle/>
-          <a:p>
-            <a:pPr indent="0">
-              <a:lnSpc>
-                <a:spcPct val="150000"/>
-              </a:lnSpc>
-              <a:buNone/>
-            </a:pPr>
-            <a:r>
-              <a:rPr lang="zh-CN" altLang="en-US" sz="2200" dirty="0">
-                <a:sym typeface="+mn-ea"/>
-              </a:rPr>
-              <a:t>表格展示了三种模型在四类</a:t>
-            </a:r>
-            <a:r>
-              <a:rPr lang="en-US" altLang="zh-CN" sz="2200" dirty="0">
-                <a:sym typeface="+mn-ea"/>
-              </a:rPr>
-              <a:t>cot</a:t>
-            </a:r>
-            <a:r>
-              <a:rPr lang="zh-CN" altLang="en-US" sz="2200" dirty="0">
-                <a:sym typeface="+mn-ea"/>
-              </a:rPr>
-              <a:t>数据集上对于输出预测任务的性能</a:t>
-            </a:r>
-            <a:r>
-              <a:rPr lang="zh-CN" altLang="en-US" sz="2200" b="1" dirty="0">
-                <a:solidFill>
-                  <a:srgbClr val="FF0000"/>
-                </a:solidFill>
-                <a:effectLst>
-                  <a:outerShdw blurRad="38100" dist="38100" dir="2700000" algn="tl">
-                    <a:srgbClr val="000000">
-                      <a:alpha val="43137"/>
-                    </a:srgbClr>
-                  </a:outerShdw>
-                </a:effectLst>
-                <a:sym typeface="+mn-ea"/>
-              </a:rPr>
-              <a:t>提升</a:t>
-            </a:r>
-            <a:r>
-              <a:rPr lang="zh-CN" altLang="en-US" sz="2200" dirty="0">
-                <a:sym typeface="+mn-ea"/>
-              </a:rPr>
-              <a:t>，结论如下</a:t>
-            </a:r>
-          </a:p>
-          <a:p>
-            <a:pPr indent="0">
-              <a:lnSpc>
-                <a:spcPct val="150000"/>
-              </a:lnSpc>
-              <a:buNone/>
-            </a:pPr>
-            <a:r>
-              <a:rPr lang="en-US" altLang="zh-CN" sz="2200" dirty="0">
-                <a:sym typeface="+mn-ea"/>
-              </a:rPr>
-              <a:t>1. </a:t>
-            </a:r>
-            <a:r>
-              <a:rPr lang="zh-CN" altLang="en-US" sz="2200" dirty="0">
-                <a:sym typeface="+mn-ea"/>
-              </a:rPr>
-              <a:t>实验结果发现</a:t>
-            </a:r>
-            <a:r>
-              <a:rPr lang="en-US" altLang="zh-CN" sz="2200" dirty="0">
-                <a:sym typeface="+mn-ea"/>
-              </a:rPr>
-              <a:t>deepseek-llama</a:t>
-            </a:r>
-            <a:r>
-              <a:rPr lang="zh-CN" altLang="en-US" sz="2200" dirty="0">
-                <a:sym typeface="+mn-ea"/>
-              </a:rPr>
-              <a:t>的模型学</a:t>
-            </a:r>
-            <a:r>
-              <a:rPr lang="en-US" altLang="zh-CN" sz="2200" dirty="0">
-                <a:sym typeface="+mn-ea"/>
-              </a:rPr>
-              <a:t>simpleai</a:t>
-            </a:r>
-            <a:r>
-              <a:rPr lang="zh-CN" altLang="en-US" sz="2200" dirty="0">
-                <a:sym typeface="+mn-ea"/>
-              </a:rPr>
-              <a:t>提升最高；</a:t>
-            </a:r>
-            <a:r>
-              <a:rPr lang="en-US" altLang="zh-CN" sz="2200" dirty="0">
-                <a:sym typeface="+mn-ea"/>
-              </a:rPr>
-              <a:t>qwentrace</a:t>
-            </a:r>
-            <a:r>
-              <a:rPr lang="zh-CN" altLang="en-US" sz="2200" dirty="0">
-                <a:sym typeface="+mn-ea"/>
-              </a:rPr>
-              <a:t>和剪枝类型的数据集提升比</a:t>
-            </a:r>
-            <a:r>
-              <a:rPr lang="en-US" altLang="zh-CN" sz="2200" dirty="0">
-                <a:sym typeface="+mn-ea"/>
-              </a:rPr>
-              <a:t>simpleai</a:t>
-            </a:r>
-            <a:r>
-              <a:rPr lang="zh-CN" altLang="en-US" sz="2200" dirty="0">
-                <a:sym typeface="+mn-ea"/>
-              </a:rPr>
-              <a:t>高</a:t>
-            </a:r>
-            <a:endParaRPr lang="zh-CN" altLang="en-US" sz="2200" b="0" dirty="0">
-              <a:solidFill>
-                <a:schemeClr val="tx1"/>
-              </a:solidFill>
+              <a:t>Think_deepseek_TreecEva_data_reduced_fomated_aigenerate_cot</a:t>
+            </a:r>
+            <a:endParaRPr lang="en-US" altLang="zh-CN" sz="2400" dirty="0">
+              <a:sym typeface="+mn-ea"/>
             </a:endParaRPr>
           </a:p>
-          <a:p>
-            <a:pPr indent="0">
-              <a:lnSpc>
-                <a:spcPct val="150000"/>
-              </a:lnSpc>
-              <a:buNone/>
-            </a:pPr>
-            <a:r>
-              <a:rPr lang="en-US" altLang="zh-CN" sz="2200" dirty="0">
-                <a:sym typeface="+mn-ea"/>
-              </a:rPr>
-              <a:t>2. </a:t>
-            </a:r>
-            <a:r>
-              <a:rPr lang="zh-CN" altLang="en-US" sz="2200" dirty="0">
-                <a:sym typeface="+mn-ea"/>
-              </a:rPr>
-              <a:t>单纯的格式化</a:t>
-            </a:r>
-            <a:r>
-              <a:rPr lang="en-US" altLang="zh-CN" sz="2200" dirty="0">
-                <a:sym typeface="+mn-ea"/>
-              </a:rPr>
-              <a:t>cot</a:t>
-            </a:r>
-            <a:r>
-              <a:rPr lang="zh-CN" altLang="en-US" sz="2200" dirty="0">
-                <a:sym typeface="+mn-ea"/>
-              </a:rPr>
-              <a:t>过度依赖模板，学习难度大，会造成指令跟随能力下降</a:t>
-            </a:r>
-          </a:p>
-          <a:p>
-            <a:pPr indent="0">
-              <a:lnSpc>
-                <a:spcPct val="150000"/>
-              </a:lnSpc>
-              <a:buNone/>
-            </a:pPr>
-            <a:r>
-              <a:rPr lang="en-US" altLang="zh-CN" sz="2200" dirty="0">
-                <a:sym typeface="+mn-ea"/>
-              </a:rPr>
-              <a:t>3. </a:t>
-            </a:r>
-            <a:r>
-              <a:rPr lang="zh-CN" altLang="en-US" sz="2200" dirty="0">
-                <a:sym typeface="+mn-ea"/>
-              </a:rPr>
-              <a:t>猜测是因为数据集是</a:t>
-            </a:r>
-            <a:r>
-              <a:rPr lang="en-US" altLang="zh-CN" sz="2200" dirty="0">
-                <a:sym typeface="+mn-ea"/>
-              </a:rPr>
-              <a:t>deepseek v3.2</a:t>
-            </a:r>
-            <a:r>
-              <a:rPr lang="zh-CN" altLang="en-US" sz="2200" dirty="0">
-                <a:sym typeface="+mn-ea"/>
-              </a:rPr>
-              <a:t>生产的，所以</a:t>
-            </a:r>
-            <a:r>
-              <a:rPr lang="en-US" altLang="zh-CN" sz="2200" dirty="0">
-                <a:sym typeface="+mn-ea"/>
-              </a:rPr>
-              <a:t>14.7</a:t>
-            </a:r>
-            <a:r>
-              <a:rPr lang="zh-CN" altLang="en-US" sz="2200" dirty="0">
-                <a:sym typeface="+mn-ea"/>
-              </a:rPr>
-              <a:t>这里置信度不高</a:t>
-            </a:r>
-          </a:p>
-        </p:txBody>
-      </p:sp>
-      <p:graphicFrame>
-        <p:nvGraphicFramePr>
-          <p:cNvPr id="4" name="内容占位符 3"/>
-          <p:cNvGraphicFramePr>
-            <a:graphicFrameLocks noGrp="1"/>
-          </p:cNvGraphicFramePr>
-          <p:nvPr>
-            <p:ph idx="1"/>
-            <p:custDataLst>
-              <p:tags r:id="rId1"/>
-            </p:custDataLst>
-          </p:nvPr>
-        </p:nvGraphicFramePr>
-        <p:xfrm>
-          <a:off x="342265" y="3592195"/>
-          <a:ext cx="11242675" cy="2922270"/>
-        </p:xfrm>
-        <a:graphic>
-          <a:graphicData uri="http://schemas.openxmlformats.org/drawingml/2006/table">
-            <a:tbl>
-              <a:tblPr firstRow="1" bandRow="1">
-                <a:tableStyleId>{5C22544A-7EE6-4342-B048-85BDC9FD1C3A}</a:tableStyleId>
-              </a:tblPr>
-              <a:tblGrid>
-                <a:gridCol w="2248535">
-                  <a:extLst>
-                    <a:ext uri="{9D8B030D-6E8A-4147-A177-3AD203B41FA5}">
-                      <a16:colId xmlns:a16="http://schemas.microsoft.com/office/drawing/2014/main" val="20000"/>
-                    </a:ext>
-                  </a:extLst>
-                </a:gridCol>
-                <a:gridCol w="2248535">
-                  <a:extLst>
-                    <a:ext uri="{9D8B030D-6E8A-4147-A177-3AD203B41FA5}">
-                      <a16:colId xmlns:a16="http://schemas.microsoft.com/office/drawing/2014/main" val="20001"/>
-                    </a:ext>
-                  </a:extLst>
-                </a:gridCol>
-                <a:gridCol w="2248535">
-                  <a:extLst>
-                    <a:ext uri="{9D8B030D-6E8A-4147-A177-3AD203B41FA5}">
-                      <a16:colId xmlns:a16="http://schemas.microsoft.com/office/drawing/2014/main" val="20002"/>
-                    </a:ext>
-                  </a:extLst>
-                </a:gridCol>
-                <a:gridCol w="2248535">
-                  <a:extLst>
-                    <a:ext uri="{9D8B030D-6E8A-4147-A177-3AD203B41FA5}">
-                      <a16:colId xmlns:a16="http://schemas.microsoft.com/office/drawing/2014/main" val="20003"/>
-                    </a:ext>
-                  </a:extLst>
-                </a:gridCol>
-                <a:gridCol w="2248535">
-                  <a:extLst>
-                    <a:ext uri="{9D8B030D-6E8A-4147-A177-3AD203B41FA5}">
-                      <a16:colId xmlns:a16="http://schemas.microsoft.com/office/drawing/2014/main" val="20004"/>
-                    </a:ext>
-                  </a:extLst>
-                </a:gridCol>
-              </a:tblGrid>
-              <a:tr h="781685">
-                <a:tc>
-                  <a:txBody>
-                    <a:bodyPr/>
-                    <a:lstStyle/>
-                    <a:p>
-                      <a:pPr algn="ctr">
-                        <a:buNone/>
-                      </a:pPr>
-                      <a:r>
-                        <a:rPr lang="en-US" altLang="zh-CN" sz="2000">
-                          <a:latin typeface="Times New Roman" panose="02020603050405020304" charset="0"/>
-                          <a:cs typeface="Times New Roman" panose="02020603050405020304" charset="0"/>
-                        </a:rPr>
-                        <a:t>MODEL</a:t>
-                      </a:r>
-                    </a:p>
-                  </a:txBody>
-                  <a:tcPr anchor="ctr"/>
-                </a:tc>
-                <a:tc>
-                  <a:txBody>
-                    <a:bodyPr/>
-                    <a:lstStyle/>
-                    <a:p>
-                      <a:pPr algn="ctr">
-                        <a:buNone/>
-                      </a:pPr>
-                      <a:r>
-                        <a:rPr lang="en-US" altLang="zh-CN" sz="2000">
-                          <a:latin typeface="Times New Roman" panose="02020603050405020304" charset="0"/>
-                          <a:cs typeface="Times New Roman" panose="02020603050405020304" charset="0"/>
-                        </a:rPr>
-                        <a:t>simple_ai_cot</a:t>
-                      </a:r>
-                    </a:p>
-                  </a:txBody>
-                  <a:tcPr anchor="ctr"/>
-                </a:tc>
-                <a:tc>
-                  <a:txBody>
-                    <a:bodyPr/>
-                    <a:lstStyle/>
-                    <a:p>
-                      <a:pPr algn="ctr">
-                        <a:buNone/>
-                      </a:pPr>
-                      <a:r>
-                        <a:rPr lang="en-US" altLang="zh-CN" sz="2000">
-                          <a:latin typeface="Times New Roman" panose="02020603050405020304" charset="0"/>
-                          <a:cs typeface="Times New Roman" panose="02020603050405020304" charset="0"/>
-                        </a:rPr>
-                        <a:t>reduced_formated_cot</a:t>
-                      </a:r>
-                    </a:p>
-                  </a:txBody>
-                  <a:tcPr anchor="ctr"/>
-                </a:tc>
-                <a:tc>
-                  <a:txBody>
-                    <a:bodyPr/>
-                    <a:lstStyle/>
-                    <a:p>
-                      <a:pPr algn="ctr">
-                        <a:buNone/>
-                      </a:pPr>
-                      <a:r>
-                        <a:rPr lang="en-US" altLang="zh-CN" sz="2000">
-                          <a:latin typeface="Times New Roman" panose="02020603050405020304" charset="0"/>
-                          <a:cs typeface="Times New Roman" panose="02020603050405020304" charset="0"/>
-                        </a:rPr>
-                        <a:t>before_reduced_natural_cot</a:t>
-                      </a:r>
-                    </a:p>
-                  </a:txBody>
-                  <a:tcPr anchor="ctr"/>
-                </a:tc>
-                <a:tc>
-                  <a:txBody>
-                    <a:bodyPr/>
-                    <a:lstStyle/>
-                    <a:p>
-                      <a:pPr algn="ctr">
-                        <a:buNone/>
-                      </a:pPr>
-                      <a:r>
-                        <a:rPr lang="en-US" altLang="zh-CN" sz="2000">
-                          <a:latin typeface="Times New Roman" panose="02020603050405020304" charset="0"/>
-                          <a:cs typeface="Times New Roman" panose="02020603050405020304" charset="0"/>
-                        </a:rPr>
-                        <a:t>reduced_natural_cot</a:t>
-                      </a:r>
-                    </a:p>
-                  </a:txBody>
-                  <a:tcPr anchor="ctr"/>
-                </a:tc>
-                <a:extLst>
-                  <a:ext uri="{0D108BD9-81ED-4DB2-BD59-A6C34878D82A}">
-                    <a16:rowId xmlns:a16="http://schemas.microsoft.com/office/drawing/2014/main" val="10000"/>
-                  </a:ext>
-                </a:extLst>
-              </a:tr>
-              <a:tr h="694690">
-                <a:tc>
-                  <a:txBody>
-                    <a:bodyPr/>
-                    <a:lstStyle/>
-                    <a:p>
-                      <a:pPr algn="ctr" fontAlgn="ctr"/>
-                      <a:r>
-                        <a:rPr lang="en-US" altLang="zh-CN" sz="1600" b="0" i="0">
-                          <a:solidFill>
-                            <a:srgbClr val="000000"/>
-                          </a:solidFill>
-                          <a:latin typeface="宋体" panose="02010600030101010101" pitchFamily="2" charset="-122"/>
-                          <a:ea typeface="宋体" panose="02010600030101010101" pitchFamily="2" charset="-122"/>
-                        </a:rPr>
-                        <a:t>Qwen2.5-7B-Instruct</a:t>
-                      </a:r>
-                    </a:p>
-                  </a:txBody>
-                  <a:tcPr marL="9842" marR="9842" marT="9842" marB="0" anchor="ctr"/>
-                </a:tc>
-                <a:tc>
-                  <a:txBody>
-                    <a:bodyPr/>
-                    <a:lstStyle/>
-                    <a:p>
-                      <a:pPr algn="ctr">
-                        <a:buNone/>
-                      </a:pPr>
-                      <a:r>
-                        <a:rPr lang="en-US" altLang="zh-CN" sz="2000">
-                          <a:latin typeface="Times New Roman" panose="02020603050405020304" charset="0"/>
-                          <a:cs typeface="Times New Roman" panose="02020603050405020304" charset="0"/>
-                        </a:rPr>
-                        <a:t>+1.3</a:t>
-                      </a:r>
-                    </a:p>
-                  </a:txBody>
-                  <a:tcPr anchor="ctr"/>
-                </a:tc>
-                <a:tc>
-                  <a:txBody>
-                    <a:bodyPr/>
-                    <a:lstStyle/>
-                    <a:p>
-                      <a:pPr algn="ctr">
-                        <a:buNone/>
-                      </a:pPr>
-                      <a:r>
-                        <a:rPr lang="en-US" altLang="zh-CN" sz="2000">
-                          <a:latin typeface="Times New Roman" panose="02020603050405020304" charset="0"/>
-                          <a:cs typeface="Times New Roman" panose="02020603050405020304" charset="0"/>
-                        </a:rPr>
-                        <a:t>+1</a:t>
-                      </a:r>
-                    </a:p>
-                  </a:txBody>
-                  <a:tcPr anchor="ctr"/>
-                </a:tc>
-                <a:tc>
-                  <a:txBody>
-                    <a:bodyPr/>
-                    <a:lstStyle/>
-                    <a:p>
-                      <a:pPr algn="ctr">
-                        <a:buNone/>
-                      </a:pPr>
-                      <a:r>
-                        <a:rPr lang="en-US" altLang="zh-CN" sz="2000" b="1">
-                          <a:latin typeface="Times New Roman" panose="02020603050405020304" charset="0"/>
-                          <a:cs typeface="Times New Roman" panose="02020603050405020304" charset="0"/>
-                        </a:rPr>
-                        <a:t>+2.25</a:t>
-                      </a:r>
-                    </a:p>
-                  </a:txBody>
-                  <a:tcPr anchor="ctr"/>
-                </a:tc>
-                <a:tc>
-                  <a:txBody>
-                    <a:bodyPr/>
-                    <a:lstStyle/>
-                    <a:p>
-                      <a:pPr algn="ctr">
-                        <a:buNone/>
-                      </a:pPr>
-                      <a:r>
-                        <a:rPr lang="en-US" altLang="zh-CN" sz="2000">
-                          <a:latin typeface="Times New Roman" panose="02020603050405020304" charset="0"/>
-                          <a:cs typeface="Times New Roman" panose="02020603050405020304" charset="0"/>
-                        </a:rPr>
-                        <a:t>+1.9</a:t>
-                      </a:r>
-                    </a:p>
-                  </a:txBody>
-                  <a:tcPr anchor="ctr"/>
-                </a:tc>
-                <a:extLst>
-                  <a:ext uri="{0D108BD9-81ED-4DB2-BD59-A6C34878D82A}">
-                    <a16:rowId xmlns:a16="http://schemas.microsoft.com/office/drawing/2014/main" val="10001"/>
-                  </a:ext>
-                </a:extLst>
-              </a:tr>
-              <a:tr h="694055">
-                <a:tc>
-                  <a:txBody>
-                    <a:bodyPr/>
-                    <a:lstStyle/>
-                    <a:p>
-                      <a:pPr algn="ctr" fontAlgn="ctr"/>
-                      <a:r>
-                        <a:rPr lang="en-US" altLang="zh-CN" sz="1600" b="0" i="0">
-                          <a:solidFill>
-                            <a:srgbClr val="000000"/>
-                          </a:solidFill>
-                          <a:latin typeface="宋体" panose="02010600030101010101" pitchFamily="2" charset="-122"/>
-                          <a:ea typeface="宋体" panose="02010600030101010101" pitchFamily="2" charset="-122"/>
-                        </a:rPr>
-                        <a:t>Qwen2.5-3B-Instruct</a:t>
-                      </a:r>
-                    </a:p>
-                  </a:txBody>
-                  <a:tcPr marL="9842" marR="9842" marT="9842" marB="0" anchor="ctr"/>
-                </a:tc>
-                <a:tc>
-                  <a:txBody>
-                    <a:bodyPr/>
-                    <a:lstStyle/>
-                    <a:p>
-                      <a:pPr algn="ctr">
-                        <a:buNone/>
-                      </a:pPr>
-                      <a:r>
-                        <a:rPr lang="en-US" altLang="zh-CN" sz="2000">
-                          <a:latin typeface="Times New Roman" panose="02020603050405020304" charset="0"/>
-                          <a:cs typeface="Times New Roman" panose="02020603050405020304" charset="0"/>
-                        </a:rPr>
-                        <a:t>+2.3</a:t>
-                      </a:r>
-                    </a:p>
-                  </a:txBody>
-                  <a:tcPr anchor="ctr"/>
-                </a:tc>
-                <a:tc>
-                  <a:txBody>
-                    <a:bodyPr/>
-                    <a:lstStyle/>
-                    <a:p>
-                      <a:pPr algn="ctr">
-                        <a:buNone/>
-                      </a:pPr>
-                      <a:r>
-                        <a:rPr lang="en-US" altLang="zh-CN" sz="2000" b="0">
-                          <a:latin typeface="Times New Roman" panose="02020603050405020304" charset="0"/>
-                          <a:cs typeface="Times New Roman" panose="02020603050405020304" charset="0"/>
-                        </a:rPr>
-                        <a:t>+2.45</a:t>
-                      </a:r>
-                    </a:p>
-                  </a:txBody>
-                  <a:tcPr anchor="ctr"/>
-                </a:tc>
-                <a:tc>
-                  <a:txBody>
-                    <a:bodyPr/>
-                    <a:lstStyle/>
-                    <a:p>
-                      <a:pPr algn="ctr">
-                        <a:buNone/>
-                      </a:pPr>
-                      <a:r>
-                        <a:rPr lang="en-US" altLang="zh-CN" sz="2000" b="1">
-                          <a:latin typeface="Times New Roman" panose="02020603050405020304" charset="0"/>
-                          <a:cs typeface="Times New Roman" panose="02020603050405020304" charset="0"/>
-                        </a:rPr>
-                        <a:t>+3.2</a:t>
-                      </a:r>
-                    </a:p>
-                  </a:txBody>
-                  <a:tcPr anchor="ctr"/>
-                </a:tc>
-                <a:tc>
-                  <a:txBody>
-                    <a:bodyPr/>
-                    <a:lstStyle/>
-                    <a:p>
-                      <a:pPr algn="ctr">
-                        <a:buNone/>
-                      </a:pPr>
-                      <a:r>
-                        <a:rPr lang="en-US" altLang="zh-CN" sz="2000">
-                          <a:latin typeface="Times New Roman" panose="02020603050405020304" charset="0"/>
-                          <a:cs typeface="Times New Roman" panose="02020603050405020304" charset="0"/>
-                        </a:rPr>
-                        <a:t>+2.35</a:t>
-                      </a:r>
-                    </a:p>
-                  </a:txBody>
-                  <a:tcPr anchor="ctr"/>
-                </a:tc>
-                <a:extLst>
-                  <a:ext uri="{0D108BD9-81ED-4DB2-BD59-A6C34878D82A}">
-                    <a16:rowId xmlns:a16="http://schemas.microsoft.com/office/drawing/2014/main" val="10002"/>
-                  </a:ext>
-                </a:extLst>
-              </a:tr>
-              <a:tr h="751840">
-                <a:tc>
-                  <a:txBody>
-                    <a:bodyPr/>
-                    <a:lstStyle/>
-                    <a:p>
-                      <a:pPr algn="ctr" fontAlgn="ctr"/>
-                      <a:r>
-                        <a:rPr lang="en-US" altLang="zh-CN" sz="1600">
-                          <a:solidFill>
-                            <a:srgbClr val="000000"/>
-                          </a:solidFill>
-                          <a:latin typeface="宋体" panose="02010600030101010101" pitchFamily="2" charset="-122"/>
-                          <a:ea typeface="宋体" panose="02010600030101010101" pitchFamily="2" charset="-122"/>
-                          <a:sym typeface="+mn-ea"/>
-                        </a:rPr>
-                        <a:t>DeepSeek-R1-Distill-Llama-8B</a:t>
-                      </a:r>
-                      <a:endParaRPr lang="en-US" altLang="zh-CN" sz="1600" b="0" i="0">
-                        <a:solidFill>
-                          <a:srgbClr val="000000"/>
-                        </a:solidFill>
-                        <a:latin typeface="宋体" panose="02010600030101010101" pitchFamily="2" charset="-122"/>
-                        <a:ea typeface="宋体" panose="02010600030101010101" pitchFamily="2" charset="-122"/>
-                        <a:sym typeface="+mn-ea"/>
-                      </a:endParaRPr>
-                    </a:p>
-                  </a:txBody>
-                  <a:tcPr marL="9842" marR="9842" marT="9842" marB="0" anchor="ctr"/>
-                </a:tc>
-                <a:tc>
-                  <a:txBody>
-                    <a:bodyPr/>
-                    <a:lstStyle/>
-                    <a:p>
-                      <a:pPr algn="ctr">
-                        <a:buNone/>
-                      </a:pPr>
-                      <a:r>
-                        <a:rPr lang="en-US" altLang="zh-CN" sz="2000" b="1">
-                          <a:latin typeface="Times New Roman" panose="02020603050405020304" charset="0"/>
-                          <a:cs typeface="Times New Roman" panose="02020603050405020304" charset="0"/>
-                        </a:rPr>
-                        <a:t>+14.7</a:t>
-                      </a:r>
-                    </a:p>
-                  </a:txBody>
-                  <a:tcPr anchor="ctr"/>
-                </a:tc>
-                <a:tc>
-                  <a:txBody>
-                    <a:bodyPr/>
-                    <a:lstStyle/>
-                    <a:p>
-                      <a:pPr algn="ctr">
-                        <a:buNone/>
-                      </a:pPr>
-                      <a:r>
-                        <a:rPr lang="en-US" altLang="zh-CN" sz="2000">
-                          <a:latin typeface="Times New Roman" panose="02020603050405020304" charset="0"/>
-                          <a:cs typeface="Times New Roman" panose="02020603050405020304" charset="0"/>
-                        </a:rPr>
-                        <a:t>+4.25</a:t>
-                      </a:r>
-                    </a:p>
-                  </a:txBody>
-                  <a:tcPr anchor="ctr"/>
-                </a:tc>
-                <a:tc>
-                  <a:txBody>
-                    <a:bodyPr/>
-                    <a:lstStyle/>
-                    <a:p>
-                      <a:pPr algn="ctr">
-                        <a:buNone/>
-                      </a:pPr>
-                      <a:r>
-                        <a:rPr lang="en-US" altLang="zh-CN" sz="2000">
-                          <a:latin typeface="Times New Roman" panose="02020603050405020304" charset="0"/>
-                          <a:cs typeface="Times New Roman" panose="02020603050405020304" charset="0"/>
-                        </a:rPr>
-                        <a:t>+4.7</a:t>
-                      </a:r>
-                    </a:p>
-                  </a:txBody>
-                  <a:tcPr anchor="ctr"/>
-                </a:tc>
-                <a:tc>
-                  <a:txBody>
-                    <a:bodyPr/>
-                    <a:lstStyle/>
-                    <a:p>
-                      <a:pPr algn="ctr">
-                        <a:buNone/>
-                      </a:pPr>
-                      <a:r>
-                        <a:rPr lang="en-US" altLang="zh-CN" sz="2000">
-                          <a:latin typeface="Times New Roman" panose="02020603050405020304" charset="0"/>
-                          <a:cs typeface="Times New Roman" panose="02020603050405020304" charset="0"/>
-                        </a:rPr>
-                        <a:t>+6.3</a:t>
-                      </a:r>
-                    </a:p>
-                  </a:txBody>
-                  <a:tcPr anchor="ctr"/>
-                </a:tc>
-                <a:extLst>
-                  <a:ext uri="{0D108BD9-81ED-4DB2-BD59-A6C34878D82A}">
-                    <a16:rowId xmlns:a16="http://schemas.microsoft.com/office/drawing/2014/main" val="10003"/>
-                  </a:ext>
-                </a:extLst>
-              </a:tr>
-            </a:tbl>
-          </a:graphicData>
-        </a:graphic>
-      </p:graphicFrame>
+        </p:txBody>
+      </p:sp>
     </p:spTree>
   </p:cSld>
   <p:clrMapOvr>
@@ -6359,14 +6919,14 @@
       </p:grpSpPr>
       <p:sp>
         <p:nvSpPr>
-          <p:cNvPr id="2" name="文本框 1"/>
+          <p:cNvPr id="4" name="文本框 3"/>
           <p:cNvSpPr txBox="1"/>
           <p:nvPr/>
         </p:nvSpPr>
         <p:spPr>
           <a:xfrm>
             <a:off x="344805" y="302895"/>
-            <a:ext cx="10258425" cy="460375"/>
+            <a:ext cx="10500995" cy="460375"/>
           </a:xfrm>
           <a:prstGeom prst="rect">
             <a:avLst/>
@@ -6379,60 +6939,134 @@
           </a:bodyPr>
           <a:lstStyle/>
           <a:p>
-            <a:r>
-              <a:rPr lang="zh-CN" altLang="en-US" sz="2400" dirty="0"/>
-              <a:t>进展分享三：</a:t>
-            </a:r>
+            <a:pPr algn="l"/>
             <a:r>
               <a:rPr lang="zh-CN" altLang="en-US" sz="2400" dirty="0">
-                <a:sym typeface="+mn-ea"/>
-              </a:rPr>
-              <a:t>对三个模型在</a:t>
-            </a:r>
-            <a:r>
-              <a:rPr lang="en-US" altLang="zh-CN" sz="2400" dirty="0">
-                <a:sym typeface="+mn-ea"/>
-              </a:rPr>
-              <a:t>4</a:t>
+                <a:solidFill>
+                  <a:schemeClr val="tx1"/>
+                </a:solidFill>
+              </a:rPr>
+              <a:t>进展三：训练集</a:t>
             </a:r>
             <a:r>
               <a:rPr lang="zh-CN" altLang="en-US" sz="2400" dirty="0">
-                <a:sym typeface="+mn-ea"/>
-              </a:rPr>
-              <a:t>个数据集上进行训练。再进行评估</a:t>
-            </a:r>
-          </a:p>
-        </p:txBody>
-      </p:sp>
-      <p:pic>
-        <p:nvPicPr>
-          <p:cNvPr id="6" name="图片 5"/>
-          <p:cNvPicPr>
-            <a:picLocks noChangeAspect="1"/>
-          </p:cNvPicPr>
+                <a:solidFill>
+                  <a:schemeClr val="tx1"/>
+                </a:solidFill>
+              </a:rPr>
+              <a:t>扩量</a:t>
+            </a:r>
+            <a:endParaRPr lang="zh-CN" altLang="en-US" sz="2400" dirty="0">
+              <a:solidFill>
+                <a:schemeClr val="tx1"/>
+              </a:solidFill>
+            </a:endParaRPr>
+          </a:p>
+        </p:txBody>
+      </p:sp>
+      <p:sp>
+        <p:nvSpPr>
+          <p:cNvPr id="2" name="文本框 1"/>
+          <p:cNvSpPr txBox="1"/>
           <p:nvPr/>
-        </p:nvPicPr>
-        <p:blipFill>
-          <a:blip r:embed="rId2"/>
-          <a:stretch>
-            <a:fillRect/>
-          </a:stretch>
-        </p:blipFill>
+        </p:nvSpPr>
         <p:spPr>
           <a:xfrm>
-            <a:off x="344805" y="1492885"/>
-            <a:ext cx="11382375" cy="3505200"/>
+            <a:off x="344805" y="1233170"/>
+            <a:ext cx="11587480" cy="2122805"/>
           </a:xfrm>
           <a:prstGeom prst="rect">
             <a:avLst/>
           </a:prstGeom>
-          <a:ln>
-            <a:solidFill>
-              <a:schemeClr val="accent1"/>
-            </a:solidFill>
-          </a:ln>
+          <a:noFill/>
         </p:spPr>
-      </p:pic>
+        <p:txBody>
+          <a:bodyPr wrap="square" rtlCol="0">
+            <a:spAutoFit/>
+          </a:bodyPr>
+          <a:lstStyle/>
+          <a:p>
+            <a:pPr>
+              <a:lnSpc>
+                <a:spcPct val="150000"/>
+              </a:lnSpc>
+            </a:pPr>
+            <a:r>
+              <a:rPr lang="zh-CN" altLang="en-US" sz="2200"/>
+              <a:t>背景：相较于</a:t>
+            </a:r>
+            <a:r>
+              <a:rPr lang="en-US" altLang="zh-CN" sz="2200"/>
+              <a:t>codeIO</a:t>
+            </a:r>
+            <a:r>
+              <a:rPr lang="zh-CN" altLang="en-US" sz="2200"/>
+              <a:t>与</a:t>
+            </a:r>
+            <a:r>
+              <a:rPr lang="en-US" altLang="zh-CN" sz="2200"/>
+              <a:t>Jung</a:t>
+            </a:r>
+            <a:r>
+              <a:rPr lang="zh-CN" altLang="en-US" sz="2200"/>
+              <a:t>我们数据量较少，他们一个</a:t>
+            </a:r>
+            <a:r>
+              <a:rPr lang="en-US" altLang="zh-CN" sz="2200"/>
+              <a:t>350w</a:t>
+            </a:r>
+            <a:r>
+              <a:rPr lang="zh-CN" altLang="en-US" sz="2200"/>
+              <a:t>一个</a:t>
+            </a:r>
+            <a:r>
+              <a:rPr lang="en-US" altLang="zh-CN" sz="2200"/>
+              <a:t>1w</a:t>
+            </a:r>
+            <a:r>
+              <a:rPr lang="zh-CN" altLang="en-US" sz="2200"/>
+              <a:t>多。认为我们也可以尝试扩量，扩到约</a:t>
+            </a:r>
+            <a:r>
+              <a:rPr lang="en-US" altLang="zh-CN" sz="2200"/>
+              <a:t>1-2w</a:t>
+            </a:r>
+            <a:endParaRPr lang="en-US" altLang="zh-CN" sz="2200"/>
+          </a:p>
+          <a:p>
+            <a:pPr>
+              <a:lnSpc>
+                <a:spcPct val="150000"/>
+              </a:lnSpc>
+            </a:pPr>
+            <a:endParaRPr lang="zh-CN" altLang="en-US" sz="2200"/>
+          </a:p>
+          <a:p>
+            <a:pPr>
+              <a:lnSpc>
+                <a:spcPct val="150000"/>
+              </a:lnSpc>
+            </a:pPr>
+            <a:r>
+              <a:rPr lang="zh-CN" altLang="en-US" sz="2200"/>
+              <a:t>进展：已经扩到</a:t>
+            </a:r>
+            <a:r>
+              <a:rPr lang="en-US" altLang="zh-CN" sz="2200"/>
+              <a:t>4k5</a:t>
+            </a:r>
+            <a:r>
+              <a:rPr lang="zh-CN" altLang="en-US" sz="2200"/>
+              <a:t>，正在持续扩量</a:t>
+            </a:r>
+            <a:r>
+              <a:rPr lang="zh-CN" altLang="en-US" sz="2200"/>
+              <a:t>中</a:t>
+            </a:r>
+            <a:endParaRPr lang="zh-CN" altLang="en-US" sz="2200"/>
+          </a:p>
+        </p:txBody>
+      </p:sp>
     </p:spTree>
   </p:cSld>
   <p:clrMapOvr>
@@ -6460,14 +7094,14 @@
       </p:grpSpPr>
       <p:sp>
         <p:nvSpPr>
-          <p:cNvPr id="2" name="文本框 1"/>
+          <p:cNvPr id="4" name="文本框 3"/>
           <p:cNvSpPr txBox="1"/>
           <p:nvPr/>
         </p:nvSpPr>
         <p:spPr>
           <a:xfrm>
             <a:off x="344805" y="302895"/>
-            <a:ext cx="10258425" cy="460375"/>
+            <a:ext cx="10500995" cy="460375"/>
           </a:xfrm>
           <a:prstGeom prst="rect">
             <a:avLst/>
@@ -6480,60 +7114,538 @@
           </a:bodyPr>
           <a:lstStyle/>
           <a:p>
-            <a:r>
-              <a:rPr lang="zh-CN" altLang="en-US" sz="2400" dirty="0"/>
-              <a:t>进展分享三：</a:t>
-            </a:r>
+            <a:pPr algn="l"/>
             <a:r>
               <a:rPr lang="zh-CN" altLang="en-US" sz="2400" dirty="0">
-                <a:sym typeface="+mn-ea"/>
-              </a:rPr>
-              <a:t>对三个模型在</a:t>
-            </a:r>
-            <a:r>
-              <a:rPr lang="en-US" altLang="zh-CN" sz="2400" dirty="0">
-                <a:sym typeface="+mn-ea"/>
-              </a:rPr>
-              <a:t>4</a:t>
+                <a:solidFill>
+                  <a:schemeClr val="tx1"/>
+                </a:solidFill>
+              </a:rPr>
+              <a:t>训练集</a:t>
             </a:r>
             <a:r>
               <a:rPr lang="zh-CN" altLang="en-US" sz="2400" dirty="0">
-                <a:sym typeface="+mn-ea"/>
-              </a:rPr>
-              <a:t>个数据集上进行训练。再进行评估</a:t>
-            </a:r>
-          </a:p>
-        </p:txBody>
-      </p:sp>
-      <p:pic>
-        <p:nvPicPr>
-          <p:cNvPr id="3" name="图片 2"/>
-          <p:cNvPicPr>
-            <a:picLocks noChangeAspect="1"/>
-          </p:cNvPicPr>
+                <a:solidFill>
+                  <a:schemeClr val="tx1"/>
+                </a:solidFill>
+              </a:rPr>
+              <a:t>总览</a:t>
+            </a:r>
+            <a:endParaRPr lang="zh-CN" altLang="en-US" sz="2400" dirty="0">
+              <a:solidFill>
+                <a:schemeClr val="tx1"/>
+              </a:solidFill>
+            </a:endParaRPr>
+          </a:p>
+        </p:txBody>
+      </p:sp>
+      <p:sp>
+        <p:nvSpPr>
+          <p:cNvPr id="3" name="矩形 2"/>
+          <p:cNvSpPr/>
           <p:nvPr/>
-        </p:nvPicPr>
-        <p:blipFill>
-          <a:blip r:embed="rId2"/>
-          <a:stretch>
-            <a:fillRect/>
-          </a:stretch>
-        </p:blipFill>
+        </p:nvSpPr>
         <p:spPr>
           <a:xfrm>
-            <a:off x="344805" y="1948180"/>
-            <a:ext cx="11458575" cy="2876550"/>
+            <a:off x="1219835" y="1465580"/>
+            <a:ext cx="1831975" cy="3156585"/>
           </a:xfrm>
           <a:prstGeom prst="rect">
             <a:avLst/>
           </a:prstGeom>
-          <a:ln>
-            <a:solidFill>
-              <a:schemeClr val="accent1"/>
-            </a:solidFill>
-          </a:ln>
+          <a:solidFill>
+            <a:schemeClr val="bg2">
+              <a:lumMod val="75000"/>
+            </a:schemeClr>
+          </a:solidFill>
         </p:spPr>
-      </p:pic>
+        <p:style>
+          <a:lnRef idx="2">
+            <a:schemeClr val="accent1">
+              <a:lumMod val="75000"/>
+            </a:schemeClr>
+          </a:lnRef>
+          <a:fillRef idx="1">
+            <a:schemeClr val="accent1"/>
+          </a:fillRef>
+          <a:effectRef idx="0">
+            <a:srgbClr val="FFFFFF"/>
+          </a:effectRef>
+          <a:fontRef idx="minor">
+            <a:schemeClr val="lt1"/>
+          </a:fontRef>
+        </p:style>
+        <p:txBody>
+          <a:bodyPr rtlCol="0" anchor="ctr"/>
+          <a:p>
+            <a:pPr algn="ctr"/>
+            <a:endParaRPr lang="zh-CN" altLang="en-US"/>
+          </a:p>
+        </p:txBody>
+      </p:sp>
+      <p:sp>
+        <p:nvSpPr>
+          <p:cNvPr id="5" name="矩形 4"/>
+          <p:cNvSpPr/>
+          <p:nvPr/>
+        </p:nvSpPr>
+        <p:spPr>
+          <a:xfrm>
+            <a:off x="3606165" y="1465580"/>
+            <a:ext cx="1831975" cy="3156585"/>
+          </a:xfrm>
+          <a:prstGeom prst="rect">
+            <a:avLst/>
+          </a:prstGeom>
+          <a:solidFill>
+            <a:schemeClr val="bg2">
+              <a:lumMod val="75000"/>
+            </a:schemeClr>
+          </a:solidFill>
+        </p:spPr>
+        <p:style>
+          <a:lnRef idx="2">
+            <a:schemeClr val="accent1">
+              <a:lumMod val="75000"/>
+            </a:schemeClr>
+          </a:lnRef>
+          <a:fillRef idx="1">
+            <a:schemeClr val="accent1"/>
+          </a:fillRef>
+          <a:effectRef idx="0">
+            <a:srgbClr val="FFFFFF"/>
+          </a:effectRef>
+          <a:fontRef idx="minor">
+            <a:schemeClr val="lt1"/>
+          </a:fontRef>
+        </p:style>
+        <p:txBody>
+          <a:bodyPr rtlCol="0" anchor="ctr"/>
+          <a:p>
+            <a:pPr algn="ctr"/>
+            <a:endParaRPr lang="zh-CN" altLang="en-US"/>
+          </a:p>
+        </p:txBody>
+      </p:sp>
+      <p:sp>
+        <p:nvSpPr>
+          <p:cNvPr id="6" name="文本框 5"/>
+          <p:cNvSpPr txBox="1"/>
+          <p:nvPr/>
+        </p:nvSpPr>
+        <p:spPr>
+          <a:xfrm>
+            <a:off x="1749425" y="2259330"/>
+            <a:ext cx="662940" cy="1568450"/>
+          </a:xfrm>
+          <a:prstGeom prst="rect">
+            <a:avLst/>
+          </a:prstGeom>
+          <a:noFill/>
+        </p:spPr>
+        <p:txBody>
+          <a:bodyPr wrap="square" rtlCol="0">
+            <a:spAutoFit/>
+          </a:bodyPr>
+          <a:p>
+            <a:r>
+              <a:rPr lang="zh-CN" altLang="en-US" sz="4800"/>
+              <a:t>方法</a:t>
+            </a:r>
+            <a:endParaRPr lang="zh-CN" altLang="en-US" sz="4800"/>
+          </a:p>
+        </p:txBody>
+      </p:sp>
+      <p:sp>
+        <p:nvSpPr>
+          <p:cNvPr id="7" name="文本框 6"/>
+          <p:cNvSpPr txBox="1"/>
+          <p:nvPr/>
+        </p:nvSpPr>
+        <p:spPr>
+          <a:xfrm>
+            <a:off x="4053840" y="2444115"/>
+            <a:ext cx="937260" cy="1198880"/>
+          </a:xfrm>
+          <a:prstGeom prst="rect">
+            <a:avLst/>
+          </a:prstGeom>
+          <a:noFill/>
+        </p:spPr>
+        <p:txBody>
+          <a:bodyPr wrap="square" rtlCol="0">
+            <a:spAutoFit/>
+          </a:bodyPr>
+          <a:p>
+            <a:pPr algn="ctr"/>
+            <a:r>
+              <a:rPr lang="en-US" altLang="zh-CN" sz="3600">
+                <a:latin typeface="Arial" panose="020B0604020202020204" pitchFamily="34" charset="0"/>
+                <a:cs typeface="Arial" panose="020B0604020202020204" pitchFamily="34" charset="0"/>
+              </a:rPr>
+              <a:t>AI</a:t>
+            </a:r>
+            <a:endParaRPr lang="en-US" altLang="zh-CN" sz="3600">
+              <a:latin typeface="Arial" panose="020B0604020202020204" pitchFamily="34" charset="0"/>
+              <a:cs typeface="Arial" panose="020B0604020202020204" pitchFamily="34" charset="0"/>
+            </a:endParaRPr>
+          </a:p>
+          <a:p>
+            <a:pPr algn="ctr"/>
+            <a:r>
+              <a:rPr lang="en-US" altLang="zh-CN" sz="3600">
+                <a:latin typeface="Arial" panose="020B0604020202020204" pitchFamily="34" charset="0"/>
+                <a:cs typeface="Arial" panose="020B0604020202020204" pitchFamily="34" charset="0"/>
+              </a:rPr>
+              <a:t>API</a:t>
+            </a:r>
+            <a:endParaRPr lang="en-US" altLang="zh-CN" sz="3600">
+              <a:latin typeface="Arial" panose="020B0604020202020204" pitchFamily="34" charset="0"/>
+              <a:cs typeface="Arial" panose="020B0604020202020204" pitchFamily="34" charset="0"/>
+            </a:endParaRPr>
+          </a:p>
+        </p:txBody>
+      </p:sp>
+      <p:sp>
+        <p:nvSpPr>
+          <p:cNvPr id="8" name="矩形 7"/>
+          <p:cNvSpPr/>
+          <p:nvPr/>
+        </p:nvSpPr>
+        <p:spPr>
+          <a:xfrm>
+            <a:off x="6102985" y="1465580"/>
+            <a:ext cx="1831975" cy="3156585"/>
+          </a:xfrm>
+          <a:prstGeom prst="rect">
+            <a:avLst/>
+          </a:prstGeom>
+          <a:solidFill>
+            <a:schemeClr val="bg2">
+              <a:lumMod val="75000"/>
+            </a:schemeClr>
+          </a:solidFill>
+        </p:spPr>
+        <p:style>
+          <a:lnRef idx="2">
+            <a:schemeClr val="accent1">
+              <a:lumMod val="75000"/>
+            </a:schemeClr>
+          </a:lnRef>
+          <a:fillRef idx="1">
+            <a:schemeClr val="accent1"/>
+          </a:fillRef>
+          <a:effectRef idx="0">
+            <a:srgbClr val="FFFFFF"/>
+          </a:effectRef>
+          <a:fontRef idx="minor">
+            <a:schemeClr val="lt1"/>
+          </a:fontRef>
+        </p:style>
+        <p:txBody>
+          <a:bodyPr rtlCol="0" anchor="ctr"/>
+          <a:p>
+            <a:pPr algn="ctr"/>
+            <a:endParaRPr lang="zh-CN" altLang="en-US"/>
+          </a:p>
+        </p:txBody>
+      </p:sp>
+      <p:sp>
+        <p:nvSpPr>
+          <p:cNvPr id="9" name="文本框 8"/>
+          <p:cNvSpPr txBox="1"/>
+          <p:nvPr/>
+        </p:nvSpPr>
+        <p:spPr>
+          <a:xfrm>
+            <a:off x="6631940" y="2259330"/>
+            <a:ext cx="662940" cy="1568450"/>
+          </a:xfrm>
+          <a:prstGeom prst="rect">
+            <a:avLst/>
+          </a:prstGeom>
+          <a:noFill/>
+        </p:spPr>
+        <p:txBody>
+          <a:bodyPr wrap="square" rtlCol="0">
+            <a:spAutoFit/>
+          </a:bodyPr>
+          <a:p>
+            <a:r>
+              <a:rPr lang="zh-CN" altLang="en-US" sz="4800"/>
+              <a:t>推理</a:t>
+            </a:r>
+            <a:endParaRPr lang="zh-CN" altLang="en-US" sz="4800"/>
+          </a:p>
+        </p:txBody>
+      </p:sp>
+      <p:sp>
+        <p:nvSpPr>
+          <p:cNvPr id="10" name="矩形 9"/>
+          <p:cNvSpPr/>
+          <p:nvPr/>
+        </p:nvSpPr>
+        <p:spPr>
+          <a:xfrm>
+            <a:off x="8489315" y="1465580"/>
+            <a:ext cx="1831975" cy="3156585"/>
+          </a:xfrm>
+          <a:prstGeom prst="rect">
+            <a:avLst/>
+          </a:prstGeom>
+          <a:solidFill>
+            <a:schemeClr val="bg2">
+              <a:lumMod val="75000"/>
+            </a:schemeClr>
+          </a:solidFill>
+        </p:spPr>
+        <p:style>
+          <a:lnRef idx="2">
+            <a:schemeClr val="accent1">
+              <a:lumMod val="75000"/>
+            </a:schemeClr>
+          </a:lnRef>
+          <a:fillRef idx="1">
+            <a:schemeClr val="accent1"/>
+          </a:fillRef>
+          <a:effectRef idx="0">
+            <a:srgbClr val="FFFFFF"/>
+          </a:effectRef>
+          <a:fontRef idx="minor">
+            <a:schemeClr val="lt1"/>
+          </a:fontRef>
+        </p:style>
+        <p:txBody>
+          <a:bodyPr rtlCol="0" anchor="ctr"/>
+          <a:p>
+            <a:pPr algn="ctr"/>
+            <a:endParaRPr lang="zh-CN" altLang="en-US"/>
+          </a:p>
+        </p:txBody>
+      </p:sp>
+      <p:sp>
+        <p:nvSpPr>
+          <p:cNvPr id="11" name="文本框 10"/>
+          <p:cNvSpPr txBox="1"/>
+          <p:nvPr/>
+        </p:nvSpPr>
+        <p:spPr>
+          <a:xfrm>
+            <a:off x="9046845" y="2259330"/>
+            <a:ext cx="662940" cy="1568450"/>
+          </a:xfrm>
+          <a:prstGeom prst="rect">
+            <a:avLst/>
+          </a:prstGeom>
+          <a:noFill/>
+        </p:spPr>
+        <p:txBody>
+          <a:bodyPr wrap="square" rtlCol="0">
+            <a:spAutoFit/>
+          </a:bodyPr>
+          <a:p>
+            <a:r>
+              <a:rPr lang="zh-CN" altLang="en-US" sz="4800"/>
+              <a:t>规模</a:t>
+            </a:r>
+            <a:endParaRPr lang="zh-CN" altLang="en-US" sz="4800"/>
+          </a:p>
+        </p:txBody>
+      </p:sp>
+      <p:sp>
+        <p:nvSpPr>
+          <p:cNvPr id="12" name="文本框 11"/>
+          <p:cNvSpPr txBox="1"/>
+          <p:nvPr/>
+        </p:nvSpPr>
+        <p:spPr>
+          <a:xfrm>
+            <a:off x="766445" y="4854575"/>
+            <a:ext cx="4064000" cy="1568450"/>
+          </a:xfrm>
+          <a:prstGeom prst="rect">
+            <a:avLst/>
+          </a:prstGeom>
+          <a:noFill/>
+        </p:spPr>
+        <p:txBody>
+          <a:bodyPr wrap="square" rtlCol="0">
+            <a:spAutoFit/>
+          </a:bodyPr>
+          <a:p>
+            <a:r>
+              <a:rPr lang="en-US" altLang="zh-CN" sz="2400"/>
+              <a:t>1. simple AI</a:t>
+            </a:r>
+            <a:endParaRPr lang="en-US" altLang="zh-CN" sz="2400"/>
+          </a:p>
+          <a:p>
+            <a:r>
+              <a:rPr lang="en-US" altLang="zh-CN" sz="2400"/>
+              <a:t>2. trace natural</a:t>
+            </a:r>
+            <a:endParaRPr lang="en-US" altLang="zh-CN" sz="2400"/>
+          </a:p>
+          <a:p>
+            <a:r>
+              <a:rPr lang="en-US" altLang="zh-CN" sz="2400"/>
+              <a:t>3. reduced fomated</a:t>
+            </a:r>
+            <a:endParaRPr lang="en-US" altLang="zh-CN" sz="2400"/>
+          </a:p>
+          <a:p>
+            <a:r>
+              <a:rPr lang="en-US" altLang="zh-CN" sz="2400"/>
+              <a:t>4. reduced natural</a:t>
+            </a:r>
+            <a:endParaRPr lang="en-US" altLang="zh-CN" sz="2400"/>
+          </a:p>
+        </p:txBody>
+      </p:sp>
+      <p:sp>
+        <p:nvSpPr>
+          <p:cNvPr id="13" name="文本框 12"/>
+          <p:cNvSpPr txBox="1"/>
+          <p:nvPr/>
+        </p:nvSpPr>
+        <p:spPr>
+          <a:xfrm>
+            <a:off x="3606165" y="4940300"/>
+            <a:ext cx="2110105" cy="829945"/>
+          </a:xfrm>
+          <a:prstGeom prst="rect">
+            <a:avLst/>
+          </a:prstGeom>
+          <a:noFill/>
+        </p:spPr>
+        <p:txBody>
+          <a:bodyPr wrap="square" rtlCol="0">
+            <a:spAutoFit/>
+          </a:bodyPr>
+          <a:p>
+            <a:r>
+              <a:rPr lang="en-US" altLang="zh-CN" sz="2400"/>
+              <a:t>deepseek </a:t>
+            </a:r>
+            <a:r>
+              <a:rPr lang="en-US" altLang="zh-CN" sz="2400"/>
+              <a:t>V3.2</a:t>
+            </a:r>
+            <a:endParaRPr lang="en-US" altLang="zh-CN" sz="2400"/>
+          </a:p>
+          <a:p>
+            <a:r>
+              <a:rPr lang="en-US" altLang="zh-CN" sz="2400"/>
+              <a:t>claude V3.7</a:t>
+            </a:r>
+            <a:endParaRPr lang="en-US" altLang="zh-CN" sz="2400"/>
+          </a:p>
+        </p:txBody>
+      </p:sp>
+      <p:sp>
+        <p:nvSpPr>
+          <p:cNvPr id="14" name="文本框 13"/>
+          <p:cNvSpPr txBox="1"/>
+          <p:nvPr/>
+        </p:nvSpPr>
+        <p:spPr>
+          <a:xfrm>
+            <a:off x="5963920" y="4940300"/>
+            <a:ext cx="2110105" cy="829945"/>
+          </a:xfrm>
+          <a:prstGeom prst="rect">
+            <a:avLst/>
+          </a:prstGeom>
+          <a:noFill/>
+        </p:spPr>
+        <p:txBody>
+          <a:bodyPr wrap="square" rtlCol="0">
+            <a:spAutoFit/>
+          </a:bodyPr>
+          <a:p>
+            <a:r>
+              <a:rPr lang="zh-CN" altLang="en-US" sz="2400"/>
+              <a:t>带</a:t>
+            </a:r>
+            <a:r>
+              <a:rPr lang="en-US" altLang="zh-CN" sz="2400"/>
+              <a:t>think</a:t>
+            </a:r>
+            <a:r>
+              <a:rPr lang="zh-CN" altLang="en-US" sz="2400"/>
+              <a:t>标签</a:t>
+            </a:r>
+            <a:endParaRPr lang="zh-CN" altLang="en-US" sz="2400"/>
+          </a:p>
+          <a:p>
+            <a:r>
+              <a:rPr lang="zh-CN" altLang="en-US" sz="2400"/>
+              <a:t>不带</a:t>
+            </a:r>
+            <a:r>
+              <a:rPr lang="en-US" altLang="zh-CN" sz="2400"/>
+              <a:t>think</a:t>
+            </a:r>
+            <a:r>
+              <a:rPr lang="zh-CN" altLang="en-US" sz="2400"/>
+              <a:t>标签</a:t>
+            </a:r>
+            <a:endParaRPr lang="zh-CN" altLang="en-US" sz="2400"/>
+          </a:p>
+        </p:txBody>
+      </p:sp>
+      <p:sp>
+        <p:nvSpPr>
+          <p:cNvPr id="15" name="文本框 14"/>
+          <p:cNvSpPr txBox="1"/>
+          <p:nvPr/>
+        </p:nvSpPr>
+        <p:spPr>
+          <a:xfrm>
+            <a:off x="8431530" y="4940300"/>
+            <a:ext cx="2744470" cy="829945"/>
+          </a:xfrm>
+          <a:prstGeom prst="rect">
+            <a:avLst/>
+          </a:prstGeom>
+          <a:noFill/>
+        </p:spPr>
+        <p:txBody>
+          <a:bodyPr wrap="square" rtlCol="0">
+            <a:spAutoFit/>
+          </a:bodyPr>
+          <a:p>
+            <a:r>
+              <a:rPr lang="en-US" sz="2400"/>
+              <a:t>1000</a:t>
+            </a:r>
+            <a:r>
+              <a:rPr lang="zh-CN" altLang="en-US" sz="2400"/>
+              <a:t>数据量</a:t>
+            </a:r>
+            <a:r>
+              <a:rPr lang="zh-CN" altLang="en-US" sz="2400"/>
+              <a:t>规模</a:t>
+            </a:r>
+            <a:endParaRPr lang="zh-CN" altLang="en-US" sz="2400"/>
+          </a:p>
+          <a:p>
+            <a:r>
+              <a:rPr lang="en-US" altLang="zh-CN" sz="2400"/>
+              <a:t>10000</a:t>
+            </a:r>
+            <a:r>
+              <a:rPr lang="zh-CN" altLang="en-US" sz="2400"/>
+              <a:t>数据量</a:t>
+            </a:r>
+            <a:r>
+              <a:rPr lang="zh-CN" altLang="en-US" sz="2400"/>
+              <a:t>规模</a:t>
+            </a:r>
+            <a:endParaRPr lang="zh-CN" altLang="en-US" sz="2400"/>
+          </a:p>
+        </p:txBody>
+      </p:sp>
     </p:spTree>
   </p:cSld>
   <p:clrMapOvr>
@@ -6583,58 +7695,1547 @@
           <a:p>
             <a:r>
               <a:rPr lang="zh-CN" altLang="en-US" sz="2400" dirty="0"/>
-              <a:t>进展分享三：</a:t>
-            </a:r>
-            <a:r>
-              <a:rPr lang="zh-CN" altLang="en-US" sz="2400" dirty="0">
-                <a:sym typeface="+mn-ea"/>
-              </a:rPr>
-              <a:t>对三个模型在</a:t>
-            </a:r>
-            <a:r>
-              <a:rPr lang="en-US" altLang="zh-CN" sz="2400" dirty="0">
-                <a:sym typeface="+mn-ea"/>
-              </a:rPr>
-              <a:t>4</a:t>
-            </a:r>
-            <a:r>
-              <a:rPr lang="zh-CN" altLang="en-US" sz="2400" dirty="0">
-                <a:sym typeface="+mn-ea"/>
-              </a:rPr>
-              <a:t>个数据集上进行训练。再进行评估</a:t>
-            </a:r>
-          </a:p>
-        </p:txBody>
-      </p:sp>
-      <p:pic>
-        <p:nvPicPr>
-          <p:cNvPr id="3" name="图片 2"/>
-          <p:cNvPicPr>
-            <a:picLocks noChangeAspect="1"/>
-          </p:cNvPicPr>
+              <a:t>进展分享四：对</a:t>
+            </a:r>
+            <a:r>
+              <a:rPr lang="en-US" altLang="zh-CN" sz="2400" dirty="0"/>
+              <a:t>qwen3</a:t>
+            </a:r>
+            <a:r>
+              <a:rPr lang="zh-CN" altLang="en-US" sz="2400" dirty="0"/>
+              <a:t>、</a:t>
+            </a:r>
+            <a:r>
+              <a:rPr lang="en-US" altLang="zh-CN" sz="2400" dirty="0"/>
+              <a:t>7</a:t>
+            </a:r>
+            <a:r>
+              <a:rPr lang="zh-CN" altLang="en-US" sz="2400" dirty="0"/>
+              <a:t>、</a:t>
+            </a:r>
+            <a:r>
+              <a:rPr lang="en-US" altLang="zh-CN" sz="2400" dirty="0"/>
+              <a:t>32B</a:t>
+            </a:r>
+            <a:r>
+              <a:rPr lang="zh-CN" altLang="en-US" sz="2400" dirty="0"/>
+              <a:t>模型进行</a:t>
+            </a:r>
+            <a:r>
+              <a:rPr lang="en-US" altLang="zh-CN" sz="2400" dirty="0"/>
+              <a:t>lora</a:t>
+            </a:r>
+            <a:r>
+              <a:rPr lang="zh-CN" altLang="en-US" sz="2400" dirty="0"/>
+              <a:t>微调</a:t>
+            </a:r>
+            <a:endParaRPr lang="zh-CN" altLang="en-US" sz="2400" dirty="0"/>
+          </a:p>
+        </p:txBody>
+      </p:sp>
+      <p:graphicFrame>
+        <p:nvGraphicFramePr>
+          <p:cNvPr id="4" name="内容占位符 3"/>
+          <p:cNvGraphicFramePr>
+            <a:graphicFrameLocks noGrp="1"/>
+          </p:cNvGraphicFramePr>
+          <p:nvPr>
+            <p:ph idx="1"/>
+            <p:custDataLst>
+              <p:tags r:id="rId1"/>
+            </p:custDataLst>
+          </p:nvPr>
+        </p:nvGraphicFramePr>
+        <p:xfrm>
+          <a:off x="554355" y="2522855"/>
+          <a:ext cx="11366500" cy="3940810"/>
+        </p:xfrm>
+        <a:graphic>
+          <a:graphicData uri="http://schemas.openxmlformats.org/drawingml/2006/table">
+            <a:tbl>
+              <a:tblPr firstRow="1" bandRow="1">
+                <a:tableStyleId>{5C22544A-7EE6-4342-B048-85BDC9FD1C3A}</a:tableStyleId>
+              </a:tblPr>
+              <a:tblGrid>
+                <a:gridCol w="2273300"/>
+                <a:gridCol w="2273300"/>
+                <a:gridCol w="2273300"/>
+                <a:gridCol w="2273300"/>
+                <a:gridCol w="2273300"/>
+              </a:tblGrid>
+              <a:tr h="1054735">
+                <a:tc>
+                  <a:txBody>
+                    <a:bodyPr/>
+                    <a:lstStyle/>
+                    <a:p>
+                      <a:pPr algn="ctr">
+                        <a:buNone/>
+                      </a:pPr>
+                      <a:r>
+                        <a:rPr lang="en-US" altLang="zh-CN" sz="2000">
+                          <a:latin typeface="Times New Roman" panose="02020603050405020304" charset="0"/>
+                          <a:cs typeface="Times New Roman" panose="02020603050405020304" charset="0"/>
+                        </a:rPr>
+                        <a:t>MODEL</a:t>
+                      </a:r>
+                      <a:endParaRPr lang="en-US" altLang="zh-CN" sz="2000">
+                        <a:latin typeface="Times New Roman" panose="02020603050405020304" charset="0"/>
+                        <a:cs typeface="Times New Roman" panose="02020603050405020304" charset="0"/>
+                      </a:endParaRPr>
+                    </a:p>
+                  </a:txBody>
+                  <a:tcPr anchor="ctr"/>
+                </a:tc>
+                <a:tc>
+                  <a:txBody>
+                    <a:bodyPr/>
+                    <a:lstStyle/>
+                    <a:p>
+                      <a:pPr algn="ctr">
+                        <a:buNone/>
+                      </a:pPr>
+                      <a:r>
+                        <a:rPr lang="en-US" altLang="zh-CN" sz="2000">
+                          <a:latin typeface="Times New Roman" panose="02020603050405020304" charset="0"/>
+                          <a:cs typeface="Times New Roman" panose="02020603050405020304" charset="0"/>
+                        </a:rPr>
+                        <a:t>simple_ai_cot</a:t>
+                      </a:r>
+                      <a:endParaRPr lang="en-US" altLang="zh-CN" sz="2000">
+                        <a:latin typeface="Times New Roman" panose="02020603050405020304" charset="0"/>
+                        <a:cs typeface="Times New Roman" panose="02020603050405020304" charset="0"/>
+                      </a:endParaRPr>
+                    </a:p>
+                  </a:txBody>
+                  <a:tcPr anchor="ctr"/>
+                </a:tc>
+                <a:tc>
+                  <a:txBody>
+                    <a:bodyPr/>
+                    <a:lstStyle/>
+                    <a:p>
+                      <a:pPr algn="ctr">
+                        <a:buNone/>
+                      </a:pPr>
+                      <a:r>
+                        <a:rPr lang="en-US" altLang="zh-CN" sz="2000">
+                          <a:latin typeface="Times New Roman" panose="02020603050405020304" charset="0"/>
+                          <a:cs typeface="Times New Roman" panose="02020603050405020304" charset="0"/>
+                        </a:rPr>
+                        <a:t>reduced_formated_cot</a:t>
+                      </a:r>
+                      <a:endParaRPr lang="en-US" altLang="zh-CN" sz="2000">
+                        <a:latin typeface="Times New Roman" panose="02020603050405020304" charset="0"/>
+                        <a:cs typeface="Times New Roman" panose="02020603050405020304" charset="0"/>
+                      </a:endParaRPr>
+                    </a:p>
+                  </a:txBody>
+                  <a:tcPr anchor="ctr"/>
+                </a:tc>
+                <a:tc>
+                  <a:txBody>
+                    <a:bodyPr/>
+                    <a:lstStyle/>
+                    <a:p>
+                      <a:pPr algn="ctr">
+                        <a:buNone/>
+                      </a:pPr>
+                      <a:r>
+                        <a:rPr lang="en-US" altLang="zh-CN" sz="2000">
+                          <a:latin typeface="Times New Roman" panose="02020603050405020304" charset="0"/>
+                          <a:cs typeface="Times New Roman" panose="02020603050405020304" charset="0"/>
+                        </a:rPr>
+                        <a:t>before_reduced_natural_cot</a:t>
+                      </a:r>
+                      <a:endParaRPr lang="en-US" altLang="zh-CN" sz="2000">
+                        <a:latin typeface="Times New Roman" panose="02020603050405020304" charset="0"/>
+                        <a:cs typeface="Times New Roman" panose="02020603050405020304" charset="0"/>
+                      </a:endParaRPr>
+                    </a:p>
+                  </a:txBody>
+                  <a:tcPr anchor="ctr"/>
+                </a:tc>
+                <a:tc>
+                  <a:txBody>
+                    <a:bodyPr/>
+                    <a:lstStyle/>
+                    <a:p>
+                      <a:pPr algn="ctr">
+                        <a:buNone/>
+                      </a:pPr>
+                      <a:r>
+                        <a:rPr lang="en-US" altLang="zh-CN" sz="2000">
+                          <a:latin typeface="Times New Roman" panose="02020603050405020304" charset="0"/>
+                          <a:cs typeface="Times New Roman" panose="02020603050405020304" charset="0"/>
+                        </a:rPr>
+                        <a:t>reduced_natural_cot</a:t>
+                      </a:r>
+                      <a:endParaRPr lang="en-US" altLang="zh-CN" sz="2000">
+                        <a:latin typeface="Times New Roman" panose="02020603050405020304" charset="0"/>
+                        <a:cs typeface="Times New Roman" panose="02020603050405020304" charset="0"/>
+                      </a:endParaRPr>
+                    </a:p>
+                  </a:txBody>
+                  <a:tcPr anchor="ctr"/>
+                </a:tc>
+              </a:tr>
+              <a:tr h="935990">
+                <a:tc>
+                  <a:txBody>
+                    <a:bodyPr/>
+                    <a:lstStyle/>
+                    <a:p>
+                      <a:pPr algn="ctr" fontAlgn="ctr"/>
+                      <a:r>
+                        <a:rPr lang="en-US" altLang="zh-CN" sz="2000" b="0" i="0">
+                          <a:solidFill>
+                            <a:srgbClr val="000000"/>
+                          </a:solidFill>
+                          <a:latin typeface="宋体" panose="02010600030101010101" pitchFamily="2" charset="-122"/>
+                          <a:ea typeface="宋体" panose="02010600030101010101" pitchFamily="2" charset="-122"/>
+                        </a:rPr>
+                        <a:t>Qwen2.5-3B-Instruct</a:t>
+                      </a:r>
+                      <a:endParaRPr lang="en-US" altLang="zh-CN" sz="2000" b="0" i="0">
+                        <a:solidFill>
+                          <a:srgbClr val="000000"/>
+                        </a:solidFill>
+                        <a:latin typeface="宋体" panose="02010600030101010101" pitchFamily="2" charset="-122"/>
+                        <a:ea typeface="宋体" panose="02010600030101010101" pitchFamily="2" charset="-122"/>
+                      </a:endParaRPr>
+                    </a:p>
+                  </a:txBody>
+                  <a:tcPr marL="9842" marR="9842" marT="9842" marB="0" anchor="ctr"/>
+                </a:tc>
+                <a:tc>
+                  <a:txBody>
+                    <a:bodyPr/>
+                    <a:lstStyle/>
+                    <a:p>
+                      <a:pPr algn="ctr">
+                        <a:buNone/>
+                      </a:pPr>
+                      <a:r>
+                        <a:rPr lang="en-US" altLang="zh-CN" sz="2400">
+                          <a:latin typeface="Times New Roman" panose="02020603050405020304" charset="0"/>
+                          <a:cs typeface="Times New Roman" panose="02020603050405020304" charset="0"/>
+                        </a:rPr>
+                        <a:t>+2.3</a:t>
+                      </a:r>
+                      <a:endParaRPr lang="en-US" altLang="zh-CN" sz="2400">
+                        <a:latin typeface="Times New Roman" panose="02020603050405020304" charset="0"/>
+                        <a:cs typeface="Times New Roman" panose="02020603050405020304" charset="0"/>
+                      </a:endParaRPr>
+                    </a:p>
+                  </a:txBody>
+                  <a:tcPr anchor="ctr"/>
+                </a:tc>
+                <a:tc>
+                  <a:txBody>
+                    <a:bodyPr/>
+                    <a:lstStyle/>
+                    <a:p>
+                      <a:pPr algn="ctr">
+                        <a:buNone/>
+                      </a:pPr>
+                      <a:r>
+                        <a:rPr lang="en-US" altLang="zh-CN" sz="2400" b="0">
+                          <a:latin typeface="Times New Roman" panose="02020603050405020304" charset="0"/>
+                          <a:cs typeface="Times New Roman" panose="02020603050405020304" charset="0"/>
+                        </a:rPr>
+                        <a:t>+2.45</a:t>
+                      </a:r>
+                      <a:endParaRPr lang="en-US" altLang="zh-CN" sz="2400" b="0">
+                        <a:latin typeface="Times New Roman" panose="02020603050405020304" charset="0"/>
+                        <a:cs typeface="Times New Roman" panose="02020603050405020304" charset="0"/>
+                      </a:endParaRPr>
+                    </a:p>
+                  </a:txBody>
+                  <a:tcPr anchor="ctr"/>
+                </a:tc>
+                <a:tc>
+                  <a:txBody>
+                    <a:bodyPr/>
+                    <a:lstStyle/>
+                    <a:p>
+                      <a:pPr algn="ctr">
+                        <a:buNone/>
+                      </a:pPr>
+                      <a:r>
+                        <a:rPr lang="en-US" altLang="zh-CN" sz="2400" b="1">
+                          <a:latin typeface="Times New Roman" panose="02020603050405020304" charset="0"/>
+                          <a:cs typeface="Times New Roman" panose="02020603050405020304" charset="0"/>
+                        </a:rPr>
+                        <a:t>+3.2</a:t>
+                      </a:r>
+                      <a:endParaRPr lang="en-US" altLang="zh-CN" sz="2400" b="1">
+                        <a:latin typeface="Times New Roman" panose="02020603050405020304" charset="0"/>
+                        <a:cs typeface="Times New Roman" panose="02020603050405020304" charset="0"/>
+                      </a:endParaRPr>
+                    </a:p>
+                  </a:txBody>
+                  <a:tcPr anchor="ctr"/>
+                </a:tc>
+                <a:tc>
+                  <a:txBody>
+                    <a:bodyPr/>
+                    <a:lstStyle/>
+                    <a:p>
+                      <a:pPr algn="ctr">
+                        <a:buNone/>
+                      </a:pPr>
+                      <a:r>
+                        <a:rPr lang="en-US" altLang="zh-CN" sz="2400">
+                          <a:latin typeface="Times New Roman" panose="02020603050405020304" charset="0"/>
+                          <a:cs typeface="Times New Roman" panose="02020603050405020304" charset="0"/>
+                        </a:rPr>
+                        <a:t>+2.35</a:t>
+                      </a:r>
+                      <a:endParaRPr lang="en-US" altLang="zh-CN" sz="2400">
+                        <a:latin typeface="Times New Roman" panose="02020603050405020304" charset="0"/>
+                        <a:cs typeface="Times New Roman" panose="02020603050405020304" charset="0"/>
+                      </a:endParaRPr>
+                    </a:p>
+                  </a:txBody>
+                  <a:tcPr anchor="ctr"/>
+                </a:tc>
+              </a:tr>
+              <a:tr h="935990">
+                <a:tc>
+                  <a:txBody>
+                    <a:bodyPr/>
+                    <a:p>
+                      <a:pPr algn="ctr" fontAlgn="ctr"/>
+                      <a:r>
+                        <a:rPr lang="en-US" altLang="zh-CN" sz="2000" b="0" i="0">
+                          <a:solidFill>
+                            <a:srgbClr val="000000"/>
+                          </a:solidFill>
+                          <a:latin typeface="宋体" panose="02010600030101010101" pitchFamily="2" charset="-122"/>
+                          <a:ea typeface="宋体" panose="02010600030101010101" pitchFamily="2" charset="-122"/>
+                        </a:rPr>
+                        <a:t>Qwen2.5-7B-Instruct</a:t>
+                      </a:r>
+                      <a:endParaRPr lang="en-US" altLang="zh-CN" sz="2000" b="0" i="0">
+                        <a:solidFill>
+                          <a:srgbClr val="000000"/>
+                        </a:solidFill>
+                        <a:latin typeface="宋体" panose="02010600030101010101" pitchFamily="2" charset="-122"/>
+                        <a:ea typeface="宋体" panose="02010600030101010101" pitchFamily="2" charset="-122"/>
+                      </a:endParaRPr>
+                    </a:p>
+                  </a:txBody>
+                  <a:tcPr marL="9842" marR="9842" marT="9842" marB="0" anchor="ctr"/>
+                </a:tc>
+                <a:tc>
+                  <a:txBody>
+                    <a:bodyPr/>
+                    <a:p>
+                      <a:pPr algn="ctr">
+                        <a:buNone/>
+                      </a:pPr>
+                      <a:r>
+                        <a:rPr lang="en-US" altLang="zh-CN" sz="2400">
+                          <a:latin typeface="Times New Roman" panose="02020603050405020304" charset="0"/>
+                          <a:cs typeface="Times New Roman" panose="02020603050405020304" charset="0"/>
+                        </a:rPr>
+                        <a:t>+1.3</a:t>
+                      </a:r>
+                      <a:endParaRPr lang="en-US" altLang="zh-CN" sz="2400">
+                        <a:latin typeface="Times New Roman" panose="02020603050405020304" charset="0"/>
+                        <a:cs typeface="Times New Roman" panose="02020603050405020304" charset="0"/>
+                      </a:endParaRPr>
+                    </a:p>
+                  </a:txBody>
+                  <a:tcPr anchor="ctr"/>
+                </a:tc>
+                <a:tc>
+                  <a:txBody>
+                    <a:bodyPr/>
+                    <a:p>
+                      <a:pPr algn="ctr">
+                        <a:buNone/>
+                      </a:pPr>
+                      <a:r>
+                        <a:rPr lang="en-US" altLang="zh-CN" sz="2400">
+                          <a:latin typeface="Times New Roman" panose="02020603050405020304" charset="0"/>
+                          <a:cs typeface="Times New Roman" panose="02020603050405020304" charset="0"/>
+                        </a:rPr>
+                        <a:t>+1</a:t>
+                      </a:r>
+                      <a:endParaRPr lang="en-US" altLang="zh-CN" sz="2400">
+                        <a:latin typeface="Times New Roman" panose="02020603050405020304" charset="0"/>
+                        <a:cs typeface="Times New Roman" panose="02020603050405020304" charset="0"/>
+                      </a:endParaRPr>
+                    </a:p>
+                  </a:txBody>
+                  <a:tcPr anchor="ctr"/>
+                </a:tc>
+                <a:tc>
+                  <a:txBody>
+                    <a:bodyPr/>
+                    <a:p>
+                      <a:pPr algn="ctr">
+                        <a:buNone/>
+                      </a:pPr>
+                      <a:r>
+                        <a:rPr lang="en-US" altLang="zh-CN" sz="2400" b="1">
+                          <a:latin typeface="Times New Roman" panose="02020603050405020304" charset="0"/>
+                          <a:cs typeface="Times New Roman" panose="02020603050405020304" charset="0"/>
+                        </a:rPr>
+                        <a:t>+2.25</a:t>
+                      </a:r>
+                      <a:endParaRPr lang="en-US" altLang="zh-CN" sz="2400" b="1">
+                        <a:latin typeface="Times New Roman" panose="02020603050405020304" charset="0"/>
+                        <a:cs typeface="Times New Roman" panose="02020603050405020304" charset="0"/>
+                      </a:endParaRPr>
+                    </a:p>
+                  </a:txBody>
+                  <a:tcPr anchor="ctr"/>
+                </a:tc>
+                <a:tc>
+                  <a:txBody>
+                    <a:bodyPr/>
+                    <a:p>
+                      <a:pPr algn="ctr">
+                        <a:buNone/>
+                      </a:pPr>
+                      <a:r>
+                        <a:rPr lang="en-US" altLang="zh-CN" sz="2400">
+                          <a:latin typeface="Times New Roman" panose="02020603050405020304" charset="0"/>
+                          <a:cs typeface="Times New Roman" panose="02020603050405020304" charset="0"/>
+                        </a:rPr>
+                        <a:t>+1.9</a:t>
+                      </a:r>
+                      <a:endParaRPr lang="en-US" altLang="zh-CN" sz="2400">
+                        <a:latin typeface="Times New Roman" panose="02020603050405020304" charset="0"/>
+                        <a:cs typeface="Times New Roman" panose="02020603050405020304" charset="0"/>
+                      </a:endParaRPr>
+                    </a:p>
+                  </a:txBody>
+                  <a:tcPr anchor="ctr"/>
+                </a:tc>
+              </a:tr>
+              <a:tr h="1014095">
+                <a:tc>
+                  <a:txBody>
+                    <a:bodyPr/>
+                    <a:lstStyle/>
+                    <a:p>
+                      <a:pPr algn="ctr" fontAlgn="ctr"/>
+                      <a:r>
+                        <a:rPr lang="en-US" altLang="zh-CN" sz="2000">
+                          <a:solidFill>
+                            <a:srgbClr val="000000"/>
+                          </a:solidFill>
+                          <a:latin typeface="宋体" panose="02010600030101010101" pitchFamily="2" charset="-122"/>
+                          <a:ea typeface="宋体" panose="02010600030101010101" pitchFamily="2" charset="-122"/>
+                          <a:sym typeface="+mn-ea"/>
+                        </a:rPr>
+                        <a:t>Qwen2.5-32B-Instruct</a:t>
+                      </a:r>
+                      <a:endParaRPr lang="en-US" altLang="zh-CN" sz="2000" b="0" i="0">
+                        <a:solidFill>
+                          <a:srgbClr val="000000"/>
+                        </a:solidFill>
+                        <a:latin typeface="宋体" panose="02010600030101010101" pitchFamily="2" charset="-122"/>
+                        <a:ea typeface="宋体" panose="02010600030101010101" pitchFamily="2" charset="-122"/>
+                        <a:sym typeface="+mn-ea"/>
+                      </a:endParaRPr>
+                    </a:p>
+                  </a:txBody>
+                  <a:tcPr marL="9842" marR="9842" marT="9842" marB="0" anchor="ctr"/>
+                </a:tc>
+                <a:tc>
+                  <a:txBody>
+                    <a:bodyPr/>
+                    <a:lstStyle/>
+                    <a:p>
+                      <a:pPr algn="ctr">
+                        <a:buClrTx/>
+                        <a:buSzTx/>
+                        <a:buFontTx/>
+                        <a:buNone/>
+                      </a:pPr>
+                      <a:r>
+                        <a:rPr lang="en-US" altLang="zh-CN" sz="2400" b="1">
+                          <a:solidFill>
+                            <a:schemeClr val="tx1"/>
+                          </a:solidFill>
+                          <a:latin typeface="Times New Roman" panose="02020603050405020304" charset="0"/>
+                          <a:ea typeface="等线" panose="02010600030101010101" charset="-122"/>
+                          <a:cs typeface="Times New Roman" panose="02020603050405020304" charset="0"/>
+                        </a:rPr>
+                        <a:t>+1.35</a:t>
+                      </a:r>
+                      <a:endParaRPr lang="en-US" altLang="zh-CN" sz="2400" b="1">
+                        <a:solidFill>
+                          <a:schemeClr val="tx1"/>
+                        </a:solidFill>
+                        <a:latin typeface="Times New Roman" panose="02020603050405020304" charset="0"/>
+                        <a:ea typeface="等线" panose="02010600030101010101" charset="-122"/>
+                        <a:cs typeface="Times New Roman" panose="02020603050405020304" charset="0"/>
+                      </a:endParaRPr>
+                    </a:p>
+                  </a:txBody>
+                  <a:tcPr anchor="ctr" anchorCtr="0"/>
+                </a:tc>
+                <a:tc>
+                  <a:txBody>
+                    <a:bodyPr/>
+                    <a:lstStyle/>
+                    <a:p>
+                      <a:pPr algn="ctr">
+                        <a:buClrTx/>
+                        <a:buSzTx/>
+                        <a:buFontTx/>
+                        <a:buNone/>
+                      </a:pPr>
+                      <a:r>
+                        <a:rPr lang="en-US" altLang="zh-CN" sz="2400" b="0">
+                          <a:solidFill>
+                            <a:schemeClr val="tx1"/>
+                          </a:solidFill>
+                          <a:latin typeface="Times New Roman" panose="02020603050405020304" charset="0"/>
+                          <a:ea typeface="等线" panose="02010600030101010101" charset="-122"/>
+                          <a:cs typeface="Times New Roman" panose="02020603050405020304" charset="0"/>
+                        </a:rPr>
+                        <a:t>+0.25</a:t>
+                      </a:r>
+                      <a:endParaRPr lang="en-US" altLang="zh-CN" sz="2400" b="0">
+                        <a:solidFill>
+                          <a:schemeClr val="tx1"/>
+                        </a:solidFill>
+                        <a:latin typeface="Times New Roman" panose="02020603050405020304" charset="0"/>
+                        <a:ea typeface="等线" panose="02010600030101010101" charset="-122"/>
+                        <a:cs typeface="Times New Roman" panose="02020603050405020304" charset="0"/>
+                      </a:endParaRPr>
+                    </a:p>
+                  </a:txBody>
+                  <a:tcPr anchor="ctr" anchorCtr="0"/>
+                </a:tc>
+                <a:tc>
+                  <a:txBody>
+                    <a:bodyPr/>
+                    <a:lstStyle/>
+                    <a:p>
+                      <a:pPr algn="ctr">
+                        <a:buClrTx/>
+                        <a:buSzTx/>
+                        <a:buFontTx/>
+                        <a:buNone/>
+                      </a:pPr>
+                      <a:r>
+                        <a:rPr lang="en-US" altLang="zh-CN" sz="2400" b="0">
+                          <a:solidFill>
+                            <a:schemeClr val="tx1"/>
+                          </a:solidFill>
+                          <a:latin typeface="Times New Roman" panose="02020603050405020304" charset="0"/>
+                          <a:ea typeface="等线" panose="02010600030101010101" charset="-122"/>
+                          <a:cs typeface="Times New Roman" panose="02020603050405020304" charset="0"/>
+                        </a:rPr>
+                        <a:t>+0.35</a:t>
+                      </a:r>
+                      <a:endParaRPr lang="en-US" altLang="zh-CN" sz="2400" b="0">
+                        <a:solidFill>
+                          <a:schemeClr val="tx1"/>
+                        </a:solidFill>
+                        <a:latin typeface="Times New Roman" panose="02020603050405020304" charset="0"/>
+                        <a:ea typeface="等线" panose="02010600030101010101" charset="-122"/>
+                        <a:cs typeface="Times New Roman" panose="02020603050405020304" charset="0"/>
+                      </a:endParaRPr>
+                    </a:p>
+                  </a:txBody>
+                  <a:tcPr anchor="ctr" anchorCtr="0"/>
+                </a:tc>
+                <a:tc>
+                  <a:txBody>
+                    <a:bodyPr/>
+                    <a:lstStyle/>
+                    <a:p>
+                      <a:pPr algn="ctr">
+                        <a:buClrTx/>
+                        <a:buSzTx/>
+                        <a:buFontTx/>
+                        <a:buNone/>
+                      </a:pPr>
+                      <a:r>
+                        <a:rPr lang="en-US" altLang="zh-CN" sz="2400" b="0">
+                          <a:solidFill>
+                            <a:schemeClr val="tx1"/>
+                          </a:solidFill>
+                          <a:latin typeface="Times New Roman" panose="02020603050405020304" charset="0"/>
+                          <a:ea typeface="等线" panose="02010600030101010101" charset="-122"/>
+                          <a:cs typeface="Times New Roman" panose="02020603050405020304" charset="0"/>
+                        </a:rPr>
+                        <a:t>+0.4</a:t>
+                      </a:r>
+                      <a:endParaRPr lang="en-US" altLang="zh-CN" sz="2400" b="0">
+                        <a:solidFill>
+                          <a:schemeClr val="tx1"/>
+                        </a:solidFill>
+                        <a:latin typeface="Times New Roman" panose="02020603050405020304" charset="0"/>
+                        <a:ea typeface="等线" panose="02010600030101010101" charset="-122"/>
+                        <a:cs typeface="Times New Roman" panose="02020603050405020304" charset="0"/>
+                      </a:endParaRPr>
+                    </a:p>
+                  </a:txBody>
+                  <a:tcPr anchor="ctr" anchorCtr="0"/>
+                </a:tc>
+              </a:tr>
+            </a:tbl>
+          </a:graphicData>
+        </a:graphic>
+      </p:graphicFrame>
+      <p:sp>
+        <p:nvSpPr>
+          <p:cNvPr id="8" name="文本框 7"/>
+          <p:cNvSpPr txBox="1"/>
           <p:nvPr/>
-        </p:nvPicPr>
-        <p:blipFill>
-          <a:blip r:embed="rId2"/>
-          <a:stretch>
-            <a:fillRect/>
-          </a:stretch>
-        </p:blipFill>
+        </p:nvSpPr>
         <p:spPr>
           <a:xfrm>
-            <a:off x="375920" y="1952625"/>
-            <a:ext cx="11439525" cy="2952750"/>
+            <a:off x="554355" y="1228090"/>
+            <a:ext cx="11177905" cy="829945"/>
           </a:xfrm>
           <a:prstGeom prst="rect">
             <a:avLst/>
           </a:prstGeom>
-          <a:ln>
-            <a:solidFill>
-              <a:schemeClr val="accent1"/>
-            </a:solidFill>
-          </a:ln>
+          <a:noFill/>
         </p:spPr>
-      </p:pic>
+        <p:txBody>
+          <a:bodyPr wrap="square" rtlCol="0" anchor="t">
+            <a:spAutoFit/>
+          </a:bodyPr>
+          <a:p>
+            <a:r>
+              <a:rPr lang="zh-CN" altLang="en-US" sz="2400"/>
+              <a:t>随着模型参数的提升，相同数据集对模型的提升反而没那么大</a:t>
+            </a:r>
+            <a:r>
+              <a:rPr lang="en-US" altLang="zh-CN" sz="2400"/>
+              <a:t>(</a:t>
+            </a:r>
+            <a:r>
+              <a:rPr lang="zh-CN" altLang="en-US" sz="2400"/>
+              <a:t>可能是数据量不够，达不到大幅改变模型的程度</a:t>
+            </a:r>
+            <a:r>
+              <a:rPr lang="en-US" altLang="zh-CN" sz="2400"/>
+              <a:t>)</a:t>
+            </a:r>
+            <a:endParaRPr lang="en-US" altLang="zh-CN" sz="2400"/>
+          </a:p>
+        </p:txBody>
+      </p:sp>
+    </p:spTree>
+  </p:cSld>
+  <p:clrMapOvr>
+    <a:masterClrMapping/>
+  </p:clrMapOvr>
+</p:sld>
+</file>
+
+<file path=ppt/slides/slide9.xml><?xml version="1.0" encoding="utf-8"?>
+<p:sld xmlns:a="http://schemas.openxmlformats.org/drawingml/2006/main" xmlns:r="http://schemas.openxmlformats.org/officeDocument/2006/relationships" xmlns:p="http://schemas.openxmlformats.org/presentationml/2006/main">
+  <p:cSld>
+    <p:spTree>
+      <p:nvGrpSpPr>
+        <p:cNvPr id="1" name=""/>
+        <p:cNvGrpSpPr/>
+        <p:nvPr/>
+      </p:nvGrpSpPr>
+      <p:grpSpPr>
+        <a:xfrm>
+          <a:off x="0" y="0"/>
+          <a:ext cx="0" cy="0"/>
+          <a:chOff x="0" y="0"/>
+          <a:chExt cx="0" cy="0"/>
+        </a:xfrm>
+      </p:grpSpPr>
+      <p:sp>
+        <p:nvSpPr>
+          <p:cNvPr id="2" name="文本框 1"/>
+          <p:cNvSpPr txBox="1"/>
+          <p:nvPr/>
+        </p:nvSpPr>
+        <p:spPr>
+          <a:xfrm>
+            <a:off x="344805" y="302895"/>
+            <a:ext cx="10258425" cy="460375"/>
+          </a:xfrm>
+          <a:prstGeom prst="rect">
+            <a:avLst/>
+          </a:prstGeom>
+          <a:noFill/>
+        </p:spPr>
+        <p:txBody>
+          <a:bodyPr wrap="square" rtlCol="0">
+            <a:spAutoFit/>
+          </a:bodyPr>
+          <a:lstStyle/>
+          <a:p>
+            <a:r>
+              <a:rPr lang="zh-CN" altLang="en-US" sz="2400" dirty="0"/>
+              <a:t>进展分享</a:t>
+            </a:r>
+            <a:r>
+              <a:rPr lang="zh-CN" altLang="en-US" sz="2400" dirty="0"/>
+              <a:t>五：对</a:t>
+            </a:r>
+            <a:r>
+              <a:rPr lang="en-US" altLang="zh-CN" sz="2400" dirty="0"/>
+              <a:t>DeepSeek-R1-Distill-7B</a:t>
+            </a:r>
+            <a:r>
+              <a:rPr lang="zh-CN" altLang="en-US" sz="2400" dirty="0"/>
+              <a:t>和</a:t>
+            </a:r>
+            <a:r>
+              <a:rPr lang="en-US" altLang="zh-CN" sz="2400" dirty="0"/>
+              <a:t>14B</a:t>
+            </a:r>
+            <a:r>
+              <a:rPr lang="zh-CN" altLang="en-US" sz="2400" dirty="0"/>
+              <a:t>模型进行</a:t>
+            </a:r>
+            <a:r>
+              <a:rPr lang="en-US" altLang="zh-CN" sz="2400" dirty="0"/>
+              <a:t>lora</a:t>
+            </a:r>
+            <a:r>
+              <a:rPr lang="zh-CN" altLang="en-US" sz="2400" dirty="0"/>
+              <a:t>微调</a:t>
+            </a:r>
+            <a:endParaRPr lang="zh-CN" altLang="en-US" sz="2400" dirty="0"/>
+          </a:p>
+        </p:txBody>
+      </p:sp>
+      <p:graphicFrame>
+        <p:nvGraphicFramePr>
+          <p:cNvPr id="3" name="表格 2"/>
+          <p:cNvGraphicFramePr>
+            <a:graphicFrameLocks noGrp="1"/>
+          </p:cNvGraphicFramePr>
+          <p:nvPr>
+            <p:custDataLst>
+              <p:tags r:id="rId1"/>
+            </p:custDataLst>
+          </p:nvPr>
+        </p:nvGraphicFramePr>
+        <p:xfrm>
+          <a:off x="468630" y="2493645"/>
+          <a:ext cx="10797540" cy="3655060"/>
+        </p:xfrm>
+        <a:graphic>
+          <a:graphicData uri="http://schemas.openxmlformats.org/drawingml/2006/table">
+            <a:tbl>
+              <a:tblPr firstRow="1" bandRow="1">
+                <a:effectLst/>
+                <a:tableStyleId>{5940675A-B579-460E-94D1-54222C63F5DA}</a:tableStyleId>
+              </a:tblPr>
+              <a:tblGrid>
+                <a:gridCol w="2699385"/>
+                <a:gridCol w="2699385"/>
+                <a:gridCol w="2699385"/>
+                <a:gridCol w="2699385"/>
+              </a:tblGrid>
+              <a:tr h="1316355">
+                <a:tc>
+                  <a:txBody>
+                    <a:bodyPr/>
+                    <a:lstStyle/>
+                    <a:p>
+                      <a:pPr algn="ctr">
+                        <a:buNone/>
+                      </a:pPr>
+                      <a:r>
+                        <a:rPr lang="en-US" altLang="zh-CN" sz="2400" b="1">
+                          <a:solidFill>
+                            <a:sysClr val="window" lastClr="FFFFFF"/>
+                          </a:solidFill>
+                          <a:latin typeface="Times New Roman" panose="02020603050405020304" charset="0"/>
+                          <a:ea typeface="等线" panose="02010600030101010101" charset="-122"/>
+                          <a:cs typeface="Times New Roman" panose="02020603050405020304" charset="0"/>
+                        </a:rPr>
+                        <a:t>MODEL</a:t>
+                      </a:r>
+                      <a:endParaRPr lang="en-US" altLang="zh-CN" sz="2400" b="1">
+                        <a:solidFill>
+                          <a:sysClr val="window" lastClr="FFFFFF"/>
+                        </a:solidFill>
+                        <a:latin typeface="Times New Roman" panose="02020603050405020304" charset="0"/>
+                        <a:ea typeface="等线" panose="02010600030101010101" charset="-122"/>
+                        <a:cs typeface="Times New Roman" panose="02020603050405020304" charset="0"/>
+                      </a:endParaRPr>
+                    </a:p>
+                  </a:txBody>
+                  <a:tcPr anchor="ctr">
+                    <a:lnL w="12700" cmpd="sng">
+                      <a:solidFill>
+                        <a:sysClr val="window" lastClr="FFFFFF"/>
+                      </a:solidFill>
+                    </a:lnL>
+                    <a:lnR w="12700" cmpd="sng">
+                      <a:solidFill>
+                        <a:sysClr val="window" lastClr="FFFFFF"/>
+                      </a:solidFill>
+                    </a:lnR>
+                    <a:lnT w="12700" cmpd="sng">
+                      <a:solidFill>
+                        <a:sysClr val="window" lastClr="FFFFFF"/>
+                      </a:solidFill>
+                    </a:lnT>
+                    <a:lnB w="38100" cmpd="sng">
+                      <a:solidFill>
+                        <a:sysClr val="window" lastClr="FFFFFF"/>
+                      </a:solidFill>
+                    </a:lnB>
+                    <a:solidFill>
+                      <a:srgbClr val="156082"/>
+                    </a:solidFill>
+                  </a:tcPr>
+                </a:tc>
+                <a:tc>
+                  <a:txBody>
+                    <a:bodyPr/>
+                    <a:lstStyle/>
+                    <a:p>
+                      <a:pPr algn="ctr">
+                        <a:buNone/>
+                      </a:pPr>
+                      <a:r>
+                        <a:rPr lang="en-US" altLang="zh-CN" sz="2400" b="1">
+                          <a:solidFill>
+                            <a:sysClr val="window" lastClr="FFFFFF"/>
+                          </a:solidFill>
+                          <a:latin typeface="Times New Roman" panose="02020603050405020304" charset="0"/>
+                          <a:ea typeface="等线" panose="02010600030101010101" charset="-122"/>
+                          <a:cs typeface="Times New Roman" panose="02020603050405020304" charset="0"/>
+                        </a:rPr>
+                        <a:t>reduced_fomated</a:t>
+                      </a:r>
+                      <a:endParaRPr lang="en-US" altLang="zh-CN" sz="2400" b="1">
+                        <a:solidFill>
+                          <a:sysClr val="window" lastClr="FFFFFF"/>
+                        </a:solidFill>
+                        <a:latin typeface="Times New Roman" panose="02020603050405020304" charset="0"/>
+                        <a:ea typeface="等线" panose="02010600030101010101" charset="-122"/>
+                        <a:cs typeface="Times New Roman" panose="02020603050405020304" charset="0"/>
+                      </a:endParaRPr>
+                    </a:p>
+                    <a:p>
+                      <a:pPr algn="ctr">
+                        <a:buNone/>
+                      </a:pPr>
+                      <a:r>
+                        <a:rPr lang="en-US" altLang="zh-CN" sz="2400" b="1">
+                          <a:solidFill>
+                            <a:sysClr val="window" lastClr="FFFFFF"/>
+                          </a:solidFill>
+                          <a:latin typeface="Times New Roman" panose="02020603050405020304" charset="0"/>
+                          <a:ea typeface="等线" panose="02010600030101010101" charset="-122"/>
+                          <a:cs typeface="Times New Roman" panose="02020603050405020304" charset="0"/>
+                        </a:rPr>
+                        <a:t>+ai generate</a:t>
+                      </a:r>
+                      <a:endParaRPr lang="en-US" altLang="zh-CN" sz="2400" b="1">
+                        <a:solidFill>
+                          <a:sysClr val="window" lastClr="FFFFFF"/>
+                        </a:solidFill>
+                        <a:latin typeface="Times New Roman" panose="02020603050405020304" charset="0"/>
+                        <a:ea typeface="等线" panose="02010600030101010101" charset="-122"/>
+                        <a:cs typeface="Times New Roman" panose="02020603050405020304" charset="0"/>
+                      </a:endParaRPr>
+                    </a:p>
+                  </a:txBody>
+                  <a:tcPr anchor="ctr">
+                    <a:lnL w="12700" cmpd="sng">
+                      <a:solidFill>
+                        <a:sysClr val="window" lastClr="FFFFFF"/>
+                      </a:solidFill>
+                    </a:lnL>
+                    <a:lnR w="12700" cmpd="sng">
+                      <a:solidFill>
+                        <a:sysClr val="window" lastClr="FFFFFF"/>
+                      </a:solidFill>
+                    </a:lnR>
+                    <a:lnT w="12700" cmpd="sng">
+                      <a:solidFill>
+                        <a:sysClr val="window" lastClr="FFFFFF"/>
+                      </a:solidFill>
+                    </a:lnT>
+                    <a:lnB w="38100" cmpd="sng">
+                      <a:solidFill>
+                        <a:sysClr val="window" lastClr="FFFFFF"/>
+                      </a:solidFill>
+                    </a:lnB>
+                    <a:solidFill>
+                      <a:srgbClr val="156082"/>
+                    </a:solidFill>
+                  </a:tcPr>
+                </a:tc>
+                <a:tc>
+                  <a:txBody>
+                    <a:bodyPr/>
+                    <a:lstStyle/>
+                    <a:p>
+                      <a:pPr algn="ctr">
+                        <a:buNone/>
+                      </a:pPr>
+                      <a:r>
+                        <a:rPr lang="en-US" altLang="zh-CN" sz="2400" b="1">
+                          <a:solidFill>
+                            <a:sysClr val="window" lastClr="FFFFFF"/>
+                          </a:solidFill>
+                          <a:latin typeface="Times New Roman" panose="02020603050405020304" charset="0"/>
+                          <a:ea typeface="等线" panose="02010600030101010101" charset="-122"/>
+                          <a:cs typeface="Times New Roman" panose="02020603050405020304" charset="0"/>
+                          <a:sym typeface="+mn-ea"/>
+                        </a:rPr>
+                        <a:t>reduced_formated+natural</a:t>
+                      </a:r>
+                      <a:endParaRPr lang="en-US" altLang="zh-CN" sz="2400" b="1">
+                        <a:solidFill>
+                          <a:sysClr val="window" lastClr="FFFFFF"/>
+                        </a:solidFill>
+                        <a:latin typeface="Times New Roman" panose="02020603050405020304" charset="0"/>
+                        <a:ea typeface="等线" panose="02010600030101010101" charset="-122"/>
+                        <a:cs typeface="Times New Roman" panose="02020603050405020304" charset="0"/>
+                        <a:sym typeface="+mn-ea"/>
+                      </a:endParaRPr>
+                    </a:p>
+                  </a:txBody>
+                  <a:tcPr anchor="ctr">
+                    <a:lnL w="12700" cmpd="sng">
+                      <a:solidFill>
+                        <a:sysClr val="window" lastClr="FFFFFF"/>
+                      </a:solidFill>
+                    </a:lnL>
+                    <a:lnR w="12700" cmpd="sng">
+                      <a:solidFill>
+                        <a:sysClr val="window" lastClr="FFFFFF"/>
+                      </a:solidFill>
+                    </a:lnR>
+                    <a:lnT w="12700" cmpd="sng">
+                      <a:solidFill>
+                        <a:sysClr val="window" lastClr="FFFFFF"/>
+                      </a:solidFill>
+                    </a:lnT>
+                    <a:lnB w="38100" cmpd="sng">
+                      <a:solidFill>
+                        <a:sysClr val="window" lastClr="FFFFFF"/>
+                      </a:solidFill>
+                    </a:lnB>
+                    <a:solidFill>
+                      <a:srgbClr val="156082"/>
+                    </a:solidFill>
+                  </a:tcPr>
+                </a:tc>
+                <a:tc>
+                  <a:txBody>
+                    <a:bodyPr/>
+                    <a:lstStyle/>
+                    <a:p>
+                      <a:pPr algn="ctr">
+                        <a:buNone/>
+                      </a:pPr>
+                      <a:r>
+                        <a:rPr lang="en-US" altLang="zh-CN" sz="2400" b="1">
+                          <a:solidFill>
+                            <a:sysClr val="window" lastClr="FFFFFF"/>
+                          </a:solidFill>
+                          <a:latin typeface="Times New Roman" panose="02020603050405020304" charset="0"/>
+                          <a:ea typeface="等线" panose="02010600030101010101" charset="-122"/>
+                          <a:cs typeface="Times New Roman" panose="02020603050405020304" charset="0"/>
+                        </a:rPr>
+                        <a:t>reduced_natural</a:t>
+                      </a:r>
+                      <a:endParaRPr lang="en-US" altLang="zh-CN" sz="2400" b="1">
+                        <a:solidFill>
+                          <a:sysClr val="window" lastClr="FFFFFF"/>
+                        </a:solidFill>
+                        <a:latin typeface="Times New Roman" panose="02020603050405020304" charset="0"/>
+                        <a:ea typeface="等线" panose="02010600030101010101" charset="-122"/>
+                        <a:cs typeface="Times New Roman" panose="02020603050405020304" charset="0"/>
+                      </a:endParaRPr>
+                    </a:p>
+                    <a:p>
+                      <a:pPr algn="ctr">
+                        <a:buNone/>
+                      </a:pPr>
+                      <a:r>
+                        <a:rPr lang="en-US" altLang="zh-CN" sz="2400" b="1">
+                          <a:solidFill>
+                            <a:sysClr val="window" lastClr="FFFFFF"/>
+                          </a:solidFill>
+                          <a:latin typeface="Times New Roman" panose="02020603050405020304" charset="0"/>
+                          <a:ea typeface="等线" panose="02010600030101010101" charset="-122"/>
+                          <a:cs typeface="Times New Roman" panose="02020603050405020304" charset="0"/>
+                        </a:rPr>
+                        <a:t>+ai generate</a:t>
+                      </a:r>
+                      <a:endParaRPr lang="en-US" altLang="zh-CN" sz="2400" b="1">
+                        <a:solidFill>
+                          <a:sysClr val="window" lastClr="FFFFFF"/>
+                        </a:solidFill>
+                        <a:latin typeface="Times New Roman" panose="02020603050405020304" charset="0"/>
+                        <a:ea typeface="等线" panose="02010600030101010101" charset="-122"/>
+                        <a:cs typeface="Times New Roman" panose="02020603050405020304" charset="0"/>
+                      </a:endParaRPr>
+                    </a:p>
+                  </a:txBody>
+                  <a:tcPr anchor="ctr">
+                    <a:lnL w="12700" cmpd="sng">
+                      <a:solidFill>
+                        <a:sysClr val="window" lastClr="FFFFFF"/>
+                      </a:solidFill>
+                    </a:lnL>
+                    <a:lnR w="12700" cmpd="sng">
+                      <a:solidFill>
+                        <a:sysClr val="window" lastClr="FFFFFF"/>
+                      </a:solidFill>
+                    </a:lnR>
+                    <a:lnT w="12700" cmpd="sng">
+                      <a:solidFill>
+                        <a:sysClr val="window" lastClr="FFFFFF"/>
+                      </a:solidFill>
+                    </a:lnT>
+                    <a:lnB w="38100" cmpd="sng">
+                      <a:solidFill>
+                        <a:sysClr val="window" lastClr="FFFFFF"/>
+                      </a:solidFill>
+                    </a:lnB>
+                    <a:solidFill>
+                      <a:srgbClr val="156082"/>
+                    </a:solidFill>
+                  </a:tcPr>
+                </a:tc>
+              </a:tr>
+              <a:tr h="1169670">
+                <a:tc>
+                  <a:txBody>
+                    <a:bodyPr/>
+                    <a:lstStyle/>
+                    <a:p>
+                      <a:pPr algn="ctr" fontAlgn="ctr"/>
+                      <a:r>
+                        <a:rPr lang="en-US" altLang="zh-CN" sz="2400" b="0" i="0">
+                          <a:solidFill>
+                            <a:srgbClr val="000000"/>
+                          </a:solidFill>
+                          <a:latin typeface="宋体" panose="02010600030101010101" pitchFamily="2" charset="-122"/>
+                          <a:ea typeface="宋体" panose="02010600030101010101" pitchFamily="2" charset="-122"/>
+                        </a:rPr>
+                        <a:t>DeepSeek-R1-Distill-Qwen-7B</a:t>
+                      </a:r>
+                      <a:endParaRPr lang="en-US" altLang="zh-CN" sz="2400" b="0" i="0">
+                        <a:solidFill>
+                          <a:srgbClr val="000000"/>
+                        </a:solidFill>
+                        <a:latin typeface="宋体" panose="02010600030101010101" pitchFamily="2" charset="-122"/>
+                        <a:ea typeface="宋体" panose="02010600030101010101" pitchFamily="2" charset="-122"/>
+                      </a:endParaRPr>
+                    </a:p>
+                  </a:txBody>
+                  <a:tcPr marL="9842" marR="9842" marT="9842" marB="0" anchor="ctr">
+                    <a:lnL w="12700" cmpd="sng">
+                      <a:solidFill>
+                        <a:sysClr val="window" lastClr="FFFFFF"/>
+                      </a:solidFill>
+                    </a:lnL>
+                    <a:lnR w="12700" cmpd="sng">
+                      <a:solidFill>
+                        <a:sysClr val="window" lastClr="FFFFFF"/>
+                      </a:solidFill>
+                    </a:lnR>
+                    <a:lnT w="12700" cmpd="sng">
+                      <a:solidFill>
+                        <a:sysClr val="window" lastClr="FFFFFF"/>
+                      </a:solidFill>
+                    </a:lnT>
+                    <a:lnB w="12700" cmpd="sng">
+                      <a:solidFill>
+                        <a:sysClr val="window" lastClr="FFFFFF"/>
+                      </a:solidFill>
+                    </a:lnB>
+                    <a:solidFill>
+                      <a:srgbClr val="156082">
+                        <a:tint val="40000"/>
+                      </a:srgbClr>
+                    </a:solidFill>
+                  </a:tcPr>
+                </a:tc>
+                <a:tc>
+                  <a:txBody>
+                    <a:bodyPr/>
+                    <a:lstStyle/>
+                    <a:p>
+                      <a:pPr algn="ctr">
+                        <a:buNone/>
+                      </a:pPr>
+                      <a:r>
+                        <a:rPr lang="en-US" altLang="zh-CN" sz="2800">
+                          <a:solidFill>
+                            <a:srgbClr val="FF0000"/>
+                          </a:solidFill>
+                          <a:latin typeface="Times New Roman" panose="02020603050405020304" charset="0"/>
+                          <a:ea typeface="等线" panose="02010600030101010101" charset="-122"/>
+                          <a:cs typeface="Times New Roman" panose="02020603050405020304" charset="0"/>
+                        </a:rPr>
+                        <a:t>+1.9/+2.4</a:t>
+                      </a:r>
+                      <a:endParaRPr lang="en-US" altLang="zh-CN" sz="2800">
+                        <a:solidFill>
+                          <a:srgbClr val="FF0000"/>
+                        </a:solidFill>
+                        <a:latin typeface="Times New Roman" panose="02020603050405020304" charset="0"/>
+                        <a:ea typeface="等线" panose="02010600030101010101" charset="-122"/>
+                        <a:cs typeface="Times New Roman" panose="02020603050405020304" charset="0"/>
+                      </a:endParaRPr>
+                    </a:p>
+                  </a:txBody>
+                  <a:tcPr anchor="ctr">
+                    <a:lnL w="12700" cmpd="sng">
+                      <a:solidFill>
+                        <a:sysClr val="window" lastClr="FFFFFF"/>
+                      </a:solidFill>
+                    </a:lnL>
+                    <a:lnR w="12700" cmpd="sng">
+                      <a:solidFill>
+                        <a:sysClr val="window" lastClr="FFFFFF"/>
+                      </a:solidFill>
+                    </a:lnR>
+                    <a:lnT w="12700" cmpd="sng">
+                      <a:solidFill>
+                        <a:sysClr val="window" lastClr="FFFFFF"/>
+                      </a:solidFill>
+                    </a:lnT>
+                    <a:lnB w="12700" cmpd="sng">
+                      <a:solidFill>
+                        <a:sysClr val="window" lastClr="FFFFFF"/>
+                      </a:solidFill>
+                    </a:lnB>
+                    <a:solidFill>
+                      <a:srgbClr val="156082">
+                        <a:tint val="40000"/>
+                      </a:srgbClr>
+                    </a:solidFill>
+                  </a:tcPr>
+                </a:tc>
+                <a:tc>
+                  <a:txBody>
+                    <a:bodyPr/>
+                    <a:lstStyle/>
+                    <a:p>
+                      <a:pPr algn="ctr">
+                        <a:buNone/>
+                      </a:pPr>
+                      <a:r>
+                        <a:rPr lang="en-US" altLang="zh-CN" sz="2800">
+                          <a:solidFill>
+                            <a:srgbClr val="FF0000"/>
+                          </a:solidFill>
+                          <a:latin typeface="Times New Roman" panose="02020603050405020304" charset="0"/>
+                          <a:ea typeface="等线" panose="02010600030101010101" charset="-122"/>
+                          <a:cs typeface="Times New Roman" panose="02020603050405020304" charset="0"/>
+                        </a:rPr>
+                        <a:t>+0.9/+2.4</a:t>
+                      </a:r>
+                      <a:endParaRPr lang="en-US" altLang="zh-CN" sz="2800">
+                        <a:solidFill>
+                          <a:srgbClr val="FF0000"/>
+                        </a:solidFill>
+                        <a:latin typeface="Times New Roman" panose="02020603050405020304" charset="0"/>
+                        <a:ea typeface="等线" panose="02010600030101010101" charset="-122"/>
+                        <a:cs typeface="Times New Roman" panose="02020603050405020304" charset="0"/>
+                      </a:endParaRPr>
+                    </a:p>
+                  </a:txBody>
+                  <a:tcPr anchor="ctr">
+                    <a:lnL w="12700" cmpd="sng">
+                      <a:solidFill>
+                        <a:sysClr val="window" lastClr="FFFFFF"/>
+                      </a:solidFill>
+                    </a:lnL>
+                    <a:lnR w="12700" cmpd="sng">
+                      <a:solidFill>
+                        <a:sysClr val="window" lastClr="FFFFFF"/>
+                      </a:solidFill>
+                    </a:lnR>
+                    <a:lnT w="12700" cmpd="sng">
+                      <a:solidFill>
+                        <a:sysClr val="window" lastClr="FFFFFF"/>
+                      </a:solidFill>
+                    </a:lnT>
+                    <a:lnB w="12700" cmpd="sng">
+                      <a:solidFill>
+                        <a:sysClr val="window" lastClr="FFFFFF"/>
+                      </a:solidFill>
+                    </a:lnB>
+                    <a:solidFill>
+                      <a:srgbClr val="156082">
+                        <a:tint val="40000"/>
+                      </a:srgbClr>
+                    </a:solidFill>
+                  </a:tcPr>
+                </a:tc>
+                <a:tc>
+                  <a:txBody>
+                    <a:bodyPr/>
+                    <a:lstStyle/>
+                    <a:p>
+                      <a:pPr algn="ctr">
+                        <a:buNone/>
+                      </a:pPr>
+                      <a:r>
+                        <a:rPr lang="en-US" altLang="zh-CN" sz="2800">
+                          <a:solidFill>
+                            <a:srgbClr val="FF0000"/>
+                          </a:solidFill>
+                          <a:latin typeface="Times New Roman" panose="02020603050405020304" charset="0"/>
+                          <a:ea typeface="等线" panose="02010600030101010101" charset="-122"/>
+                          <a:cs typeface="Times New Roman" panose="02020603050405020304" charset="0"/>
+                        </a:rPr>
+                        <a:t>+0.55/+1.6</a:t>
+                      </a:r>
+                      <a:endParaRPr lang="en-US" altLang="zh-CN" sz="2800">
+                        <a:solidFill>
+                          <a:srgbClr val="FF0000"/>
+                        </a:solidFill>
+                        <a:latin typeface="Times New Roman" panose="02020603050405020304" charset="0"/>
+                        <a:ea typeface="等线" panose="02010600030101010101" charset="-122"/>
+                        <a:cs typeface="Times New Roman" panose="02020603050405020304" charset="0"/>
+                      </a:endParaRPr>
+                    </a:p>
+                  </a:txBody>
+                  <a:tcPr anchor="ctr">
+                    <a:lnL w="12700" cmpd="sng">
+                      <a:solidFill>
+                        <a:sysClr val="window" lastClr="FFFFFF"/>
+                      </a:solidFill>
+                    </a:lnL>
+                    <a:lnR w="12700" cmpd="sng">
+                      <a:solidFill>
+                        <a:sysClr val="window" lastClr="FFFFFF"/>
+                      </a:solidFill>
+                    </a:lnR>
+                    <a:lnT w="12700" cmpd="sng">
+                      <a:solidFill>
+                        <a:sysClr val="window" lastClr="FFFFFF"/>
+                      </a:solidFill>
+                    </a:lnT>
+                    <a:lnB w="12700" cmpd="sng">
+                      <a:solidFill>
+                        <a:sysClr val="window" lastClr="FFFFFF"/>
+                      </a:solidFill>
+                    </a:lnB>
+                    <a:solidFill>
+                      <a:srgbClr val="156082">
+                        <a:tint val="40000"/>
+                      </a:srgbClr>
+                    </a:solidFill>
+                  </a:tcPr>
+                </a:tc>
+              </a:tr>
+              <a:tr h="1169035">
+                <a:tc>
+                  <a:txBody>
+                    <a:bodyPr/>
+                    <a:lstStyle/>
+                    <a:p>
+                      <a:pPr algn="ctr" fontAlgn="ctr"/>
+                      <a:r>
+                        <a:rPr lang="en-US" altLang="zh-CN" sz="2400" b="0" i="0">
+                          <a:solidFill>
+                            <a:srgbClr val="000000"/>
+                          </a:solidFill>
+                          <a:latin typeface="宋体" panose="02010600030101010101" pitchFamily="2" charset="-122"/>
+                          <a:ea typeface="宋体" panose="02010600030101010101" pitchFamily="2" charset="-122"/>
+                        </a:rPr>
+                        <a:t>DeepSeek-R1-Distill-Qwen-14B</a:t>
+                      </a:r>
+                      <a:endParaRPr lang="en-US" altLang="zh-CN" sz="2400" b="0" i="0">
+                        <a:solidFill>
+                          <a:srgbClr val="000000"/>
+                        </a:solidFill>
+                        <a:latin typeface="宋体" panose="02010600030101010101" pitchFamily="2" charset="-122"/>
+                        <a:ea typeface="宋体" panose="02010600030101010101" pitchFamily="2" charset="-122"/>
+                      </a:endParaRPr>
+                    </a:p>
+                  </a:txBody>
+                  <a:tcPr marL="9842" marR="9842" marT="9842" marB="0" anchor="ctr">
+                    <a:lnL w="12700" cmpd="sng">
+                      <a:solidFill>
+                        <a:sysClr val="window" lastClr="FFFFFF"/>
+                      </a:solidFill>
+                    </a:lnL>
+                    <a:lnR w="12700" cmpd="sng">
+                      <a:solidFill>
+                        <a:sysClr val="window" lastClr="FFFFFF"/>
+                      </a:solidFill>
+                    </a:lnR>
+                    <a:lnT w="12700" cmpd="sng">
+                      <a:solidFill>
+                        <a:sysClr val="window" lastClr="FFFFFF"/>
+                      </a:solidFill>
+                    </a:lnT>
+                    <a:lnB w="12700" cmpd="sng">
+                      <a:solidFill>
+                        <a:sysClr val="window" lastClr="FFFFFF"/>
+                      </a:solidFill>
+                    </a:lnB>
+                    <a:solidFill>
+                      <a:srgbClr val="156082">
+                        <a:tint val="20000"/>
+                      </a:srgbClr>
+                    </a:solidFill>
+                  </a:tcPr>
+                </a:tc>
+                <a:tc>
+                  <a:txBody>
+                    <a:bodyPr/>
+                    <a:lstStyle/>
+                    <a:p>
+                      <a:pPr algn="ctr">
+                        <a:buNone/>
+                      </a:pPr>
+                      <a:r>
+                        <a:rPr lang="en-US" altLang="zh-CN" sz="2800">
+                          <a:solidFill>
+                            <a:srgbClr val="00B0F0"/>
+                          </a:solidFill>
+                          <a:latin typeface="Times New Roman" panose="02020603050405020304" charset="0"/>
+                          <a:ea typeface="等线" panose="02010600030101010101" charset="-122"/>
+                          <a:cs typeface="Times New Roman" panose="02020603050405020304" charset="0"/>
+                        </a:rPr>
+                        <a:t>-0.85/-0.15</a:t>
+                      </a:r>
+                      <a:endParaRPr lang="en-US" altLang="zh-CN" sz="2800">
+                        <a:solidFill>
+                          <a:srgbClr val="00B0F0"/>
+                        </a:solidFill>
+                        <a:latin typeface="Times New Roman" panose="02020603050405020304" charset="0"/>
+                        <a:ea typeface="等线" panose="02010600030101010101" charset="-122"/>
+                        <a:cs typeface="Times New Roman" panose="02020603050405020304" charset="0"/>
+                      </a:endParaRPr>
+                    </a:p>
+                  </a:txBody>
+                  <a:tcPr anchor="ctr">
+                    <a:lnL w="12700" cmpd="sng">
+                      <a:solidFill>
+                        <a:sysClr val="window" lastClr="FFFFFF"/>
+                      </a:solidFill>
+                    </a:lnL>
+                    <a:lnR w="12700" cmpd="sng">
+                      <a:solidFill>
+                        <a:sysClr val="window" lastClr="FFFFFF"/>
+                      </a:solidFill>
+                    </a:lnR>
+                    <a:lnT w="12700" cmpd="sng">
+                      <a:solidFill>
+                        <a:sysClr val="window" lastClr="FFFFFF"/>
+                      </a:solidFill>
+                    </a:lnT>
+                    <a:lnB w="12700" cmpd="sng">
+                      <a:solidFill>
+                        <a:sysClr val="window" lastClr="FFFFFF"/>
+                      </a:solidFill>
+                    </a:lnB>
+                    <a:solidFill>
+                      <a:srgbClr val="156082">
+                        <a:tint val="20000"/>
+                      </a:srgbClr>
+                    </a:solidFill>
+                  </a:tcPr>
+                </a:tc>
+                <a:tc>
+                  <a:txBody>
+                    <a:bodyPr/>
+                    <a:lstStyle/>
+                    <a:p>
+                      <a:pPr algn="ctr">
+                        <a:buNone/>
+                      </a:pPr>
+                      <a:r>
+                        <a:rPr lang="en-US" altLang="zh-CN" sz="2800" b="0">
+                          <a:solidFill>
+                            <a:srgbClr val="00B0F0"/>
+                          </a:solidFill>
+                          <a:latin typeface="Times New Roman" panose="02020603050405020304" charset="0"/>
+                          <a:ea typeface="等线" panose="02010600030101010101" charset="-122"/>
+                          <a:cs typeface="Times New Roman" panose="02020603050405020304" charset="0"/>
+                        </a:rPr>
+                        <a:t>-0.2</a:t>
+                      </a:r>
+                      <a:r>
+                        <a:rPr lang="en-US" altLang="zh-CN" sz="2800" b="0">
+                          <a:solidFill>
+                            <a:sysClr val="windowText" lastClr="000000"/>
+                          </a:solidFill>
+                          <a:latin typeface="Times New Roman" panose="02020603050405020304" charset="0"/>
+                          <a:ea typeface="等线" panose="02010600030101010101" charset="-122"/>
+                          <a:cs typeface="Times New Roman" panose="02020603050405020304" charset="0"/>
+                        </a:rPr>
+                        <a:t>/</a:t>
+                      </a:r>
+                      <a:r>
+                        <a:rPr lang="en-US" altLang="zh-CN" sz="2800" b="0">
+                          <a:solidFill>
+                            <a:srgbClr val="FF0000"/>
+                          </a:solidFill>
+                          <a:latin typeface="Times New Roman" panose="02020603050405020304" charset="0"/>
+                          <a:ea typeface="等线" panose="02010600030101010101" charset="-122"/>
+                          <a:cs typeface="Times New Roman" panose="02020603050405020304" charset="0"/>
+                        </a:rPr>
+                        <a:t>+0.4</a:t>
+                      </a:r>
+                      <a:endParaRPr lang="en-US" altLang="zh-CN" sz="2800" b="0">
+                        <a:solidFill>
+                          <a:srgbClr val="FF0000"/>
+                        </a:solidFill>
+                        <a:latin typeface="Times New Roman" panose="02020603050405020304" charset="0"/>
+                        <a:ea typeface="等线" panose="02010600030101010101" charset="-122"/>
+                        <a:cs typeface="Times New Roman" panose="02020603050405020304" charset="0"/>
+                      </a:endParaRPr>
+                    </a:p>
+                  </a:txBody>
+                  <a:tcPr anchor="ctr">
+                    <a:lnL w="12700" cmpd="sng">
+                      <a:solidFill>
+                        <a:sysClr val="window" lastClr="FFFFFF"/>
+                      </a:solidFill>
+                    </a:lnL>
+                    <a:lnR w="12700" cmpd="sng">
+                      <a:solidFill>
+                        <a:sysClr val="window" lastClr="FFFFFF"/>
+                      </a:solidFill>
+                    </a:lnR>
+                    <a:lnT w="12700" cmpd="sng">
+                      <a:solidFill>
+                        <a:sysClr val="window" lastClr="FFFFFF"/>
+                      </a:solidFill>
+                    </a:lnT>
+                    <a:lnB w="12700" cmpd="sng">
+                      <a:solidFill>
+                        <a:sysClr val="window" lastClr="FFFFFF"/>
+                      </a:solidFill>
+                    </a:lnB>
+                    <a:solidFill>
+                      <a:srgbClr val="156082">
+                        <a:tint val="20000"/>
+                      </a:srgbClr>
+                    </a:solidFill>
+                  </a:tcPr>
+                </a:tc>
+                <a:tc>
+                  <a:txBody>
+                    <a:bodyPr/>
+                    <a:lstStyle/>
+                    <a:p>
+                      <a:pPr algn="ctr">
+                        <a:buNone/>
+                      </a:pPr>
+                      <a:r>
+                        <a:rPr lang="en-US" altLang="zh-CN" sz="2800">
+                          <a:solidFill>
+                            <a:srgbClr val="FF0000"/>
+                          </a:solidFill>
+                          <a:latin typeface="Times New Roman" panose="02020603050405020304" charset="0"/>
+                          <a:ea typeface="等线" panose="02010600030101010101" charset="-122"/>
+                          <a:cs typeface="Times New Roman" panose="02020603050405020304" charset="0"/>
+                        </a:rPr>
+                        <a:t>+0.65/+0.6</a:t>
+                      </a:r>
+                      <a:endParaRPr lang="en-US" altLang="zh-CN" sz="2800">
+                        <a:solidFill>
+                          <a:srgbClr val="FF0000"/>
+                        </a:solidFill>
+                        <a:latin typeface="Times New Roman" panose="02020603050405020304" charset="0"/>
+                        <a:ea typeface="等线" panose="02010600030101010101" charset="-122"/>
+                        <a:cs typeface="Times New Roman" panose="02020603050405020304" charset="0"/>
+                      </a:endParaRPr>
+                    </a:p>
+                  </a:txBody>
+                  <a:tcPr anchor="ctr">
+                    <a:lnL w="12700" cmpd="sng">
+                      <a:solidFill>
+                        <a:sysClr val="window" lastClr="FFFFFF"/>
+                      </a:solidFill>
+                    </a:lnL>
+                    <a:lnR w="12700" cmpd="sng">
+                      <a:solidFill>
+                        <a:sysClr val="window" lastClr="FFFFFF"/>
+                      </a:solidFill>
+                    </a:lnR>
+                    <a:lnT w="12700" cmpd="sng">
+                      <a:solidFill>
+                        <a:sysClr val="window" lastClr="FFFFFF"/>
+                      </a:solidFill>
+                    </a:lnT>
+                    <a:lnB w="12700" cmpd="sng">
+                      <a:solidFill>
+                        <a:sysClr val="window" lastClr="FFFFFF"/>
+                      </a:solidFill>
+                    </a:lnB>
+                    <a:solidFill>
+                      <a:srgbClr val="156082">
+                        <a:tint val="20000"/>
+                      </a:srgbClr>
+                    </a:solidFill>
+                  </a:tcPr>
+                </a:tc>
+              </a:tr>
+            </a:tbl>
+          </a:graphicData>
+        </a:graphic>
+      </p:graphicFrame>
+      <p:sp>
+        <p:nvSpPr>
+          <p:cNvPr id="4" name="文本框 3"/>
+          <p:cNvSpPr txBox="1"/>
+          <p:nvPr/>
+        </p:nvSpPr>
+        <p:spPr>
+          <a:xfrm>
+            <a:off x="394335" y="1278255"/>
+            <a:ext cx="11177905" cy="829945"/>
+          </a:xfrm>
+          <a:prstGeom prst="rect">
+            <a:avLst/>
+          </a:prstGeom>
+          <a:noFill/>
+        </p:spPr>
+        <p:txBody>
+          <a:bodyPr wrap="square" rtlCol="0" anchor="t">
+            <a:spAutoFit/>
+          </a:bodyPr>
+          <a:p>
+            <a:r>
+              <a:rPr lang="zh-CN" altLang="en-US" sz="2400"/>
+              <a:t>针对</a:t>
+            </a:r>
+            <a:r>
+              <a:rPr lang="en-US" altLang="zh-CN" sz="2400"/>
+              <a:t>CruxEval</a:t>
+            </a:r>
+            <a:r>
+              <a:rPr lang="zh-CN" altLang="en-US" sz="2400"/>
+              <a:t>的输入输出预测都做了评估，发现在输入方面有所下降，但是输出是提升的（</a:t>
+            </a:r>
+            <a:r>
+              <a:rPr lang="en-US" altLang="zh-CN" sz="2400"/>
+              <a:t>input/output</a:t>
+            </a:r>
+            <a:r>
+              <a:rPr lang="zh-CN" altLang="en-US" sz="2400"/>
+              <a:t>）</a:t>
+            </a:r>
+            <a:endParaRPr lang="zh-CN" altLang="en-US" sz="2400"/>
+          </a:p>
+        </p:txBody>
+      </p:sp>
     </p:spTree>
   </p:cSld>
   <p:clrMapOvr>
@@ -6644,22 +9245,29 @@
 </file>
 
 <file path=ppt/tags/tag1.xml><?xml version="1.0" encoding="utf-8"?>
-<p:tagLst xmlns:a="http://schemas.openxmlformats.org/drawingml/2006/main" xmlns:r="http://schemas.openxmlformats.org/officeDocument/2006/relationships" xmlns:p="http://schemas.openxmlformats.org/presentationml/2006/main">
-  <p:tag name="RESOURCE_RECORD_KEY" val="{&quot;10&quot;:[20179637,20211662,50039266,21564682]}"/>
+<p:tagLst xmlns:p="http://schemas.openxmlformats.org/presentationml/2006/main">
+  <p:tag name="TABLE_ENDDRAG_ORIGIN_RECT" val="929*476"/>
+  <p:tag name="TABLE_ENDDRAG_RECT" val="15*52*929*476"/>
 </p:tagLst>
 </file>
 
 <file path=ppt/tags/tag2.xml><?xml version="1.0" encoding="utf-8"?>
-<p:tagLst xmlns:a="http://schemas.openxmlformats.org/drawingml/2006/main" xmlns:r="http://schemas.openxmlformats.org/officeDocument/2006/relationships" xmlns:p="http://schemas.openxmlformats.org/presentationml/2006/main">
-  <p:tag name="TABLE_ENDDRAG_ORIGIN_RECT" val="929*505"/>
-  <p:tag name="TABLE_ENDDRAG_RECT" val="21*141*929*505"/>
+<p:tagLst xmlns:p="http://schemas.openxmlformats.org/presentationml/2006/main">
+  <p:tag name="TABLE_ENDDRAG_ORIGIN_RECT" val="869*321"/>
+  <p:tag name="TABLE_ENDDRAG_RECT" val="44*151*869*321"/>
 </p:tagLst>
 </file>
 
 <file path=ppt/tags/tag3.xml><?xml version="1.0" encoding="utf-8"?>
-<p:tagLst xmlns:a="http://schemas.openxmlformats.org/drawingml/2006/main" xmlns:r="http://schemas.openxmlformats.org/officeDocument/2006/relationships" xmlns:p="http://schemas.openxmlformats.org/presentationml/2006/main">
-  <p:tag name="TABLE_ENDDRAG_ORIGIN_RECT" val="885*230"/>
-  <p:tag name="TABLE_ENDDRAG_RECT" val="27*282*885*230"/>
+<p:tagLst xmlns:p="http://schemas.openxmlformats.org/presentationml/2006/main">
+  <p:tag name="TABLE_ENDDRAG_ORIGIN_RECT" val="850*287"/>
+  <p:tag name="TABLE_ENDDRAG_RECT" val="55*95*850*287"/>
+</p:tagLst>
+</file>
+
+<file path=ppt/tags/tag4.xml><?xml version="1.0" encoding="utf-8"?>
+<p:tagLst xmlns:p="http://schemas.openxmlformats.org/presentationml/2006/main">
+  <p:tag name="RESOURCE_RECORD_KEY" val="{&quot;10&quot;:[20179637,20211662,50039266,21564682]}"/>
 </p:tagLst>
 </file>
 
@@ -6935,7 +9543,6 @@
       </a:style>
     </a:lnDef>
   </a:objectDefaults>
-  <a:extraClrSchemeLst/>
   <a:extLst>
     <a:ext uri="{05A4C25C-085E-4340-85A3-A5531E510DB2}">
       <thm15:themeFamily xmlns:thm15="http://schemas.microsoft.com/office/thememl/2012/main" name="Office Theme" id="{62F939B6-93AF-4DB8-9C6B-D6C7DFDC589F}" vid="{4A3C46E8-61CC-4603-A589-7422A47A8E4A}"/>
@@ -7195,8 +9802,6 @@
       </a:bgFillStyleLst>
     </a:fmtScheme>
   </a:themeElements>
-  <a:objectDefaults/>
-  <a:extraClrSchemeLst/>
   <a:extLst>
     <a:ext uri="{05A4C25C-085E-4340-85A3-A5531E510DB2}">
       <thm15:themeFamily xmlns:thm15="http://schemas.microsoft.com/office/thememl/2012/main" name="Office Theme" id="{62F939B6-93AF-4DB8-9C6B-D6C7DFDC589F}" vid="{4A3C46E8-61CC-4603-A589-7422A47A8E4A}"/>
